--- a/articles/mochi-kiki-teams-agent/video/mochi-kiki-demo-deck.pptx
+++ b/articles/mochi-kiki-teams-agent/video/mochi-kiki-demo-deck.pptx
@@ -514,8 +514,9 @@
             <a:r>
               <a:rPr lang="en-US" dirty="0"/>
               <a:t>[0:00–0:15 / 15 秒]
-Teams の会議中、用語や仕様の確認のために誰かが画面共有で資料を探し始めて、議論が止まる。よくありますよね。
-Microsoft 365 Copilot は会議後に要約してくれますが、会議中には介入してくれません。
+Teams の会議中、用語や仕様を確認するために、誰かが画面共有で資料を探し始めて、議論が止まる。
+「あれをやっておいて」のまま会議が終わって、半年後にすれ違う。
+よくある光景ですよね。
 [撮影メモ] 静止 5 秒 → 次スライドへフェード。</a:t>
             </a:r>
             <a:endParaRPr lang="en-US" dirty="0"/>
@@ -605,9 +606,9 @@
             <a:r>
               <a:rPr lang="en-US" dirty="0"/>
               <a:t>[2:50–3:05 / 15 秒]
-現状の最大の弱点は、補完投稿のレイテンシです。
-Recall.ai の日本語文字起こしは精度モード固定で、発話から投稿まで数十秒かかります。
-「議論を止めずに即答」は MVP では未達で、後追いの補足として機能している段階です。
+弱点も正直に話します。補完投稿のレイテンシです。
+Recall.ai の日本語 STT は精度モード固定で、発話から投稿まで数十秒。
+即答は未達、後追い補足にとどまっています。
 STT 置き換えが本番投入前の宿題です。</a:t>
             </a:r>
             <a:endParaRPr lang="en-US" dirty="0"/>
@@ -787,8 +788,9 @@
             <a:r>
               <a:rPr lang="en-US" dirty="0"/>
               <a:t>[3:05–3:15 / 10 秒]
-Microsoft Agent Hackathon 2026 への提出作品です。
-詳細は Zenn の記事をご覧ください。
+詳細は Zenn の記事にまとめています。
+Microsoft Agent Hackathon 2026 への提出作品でした。
+ご視聴ありがとうございました。
 [撮影メモ] 5 秒静止 → ゆっくりフェードアウト。BGM のフェードに合わせる。</a:t>
             </a:r>
             <a:endParaRPr lang="en-US" dirty="0"/>
@@ -878,9 +880,9 @@
             <a:r>
               <a:rPr lang="en-US" dirty="0"/>
               <a:t>[0:15–0:30 / 15 秒]
-Microsoft 365 Copilot は、会議が終わってから要約してくれます。
-でも、会議中の用語不明や仕様確認の場面では、助けに来てくれません。
-そこを埋めるために、MOCHI-kiki を作りました。</a:t>
+Microsoft 365 Copilot Recap は、会議が終わってからは要約してくれます。
+ただ、会議中には介入してくれない。
+会議の場で動いてくれる相棒が、欲しかった。</a:t>
             </a:r>
             <a:endParaRPr lang="en-US" dirty="0"/>
           </a:p>
@@ -969,8 +971,8 @@
             <a:r>
               <a:rPr lang="en-US" dirty="0"/>
               <a:t>[0:30–0:45 / 15 秒]
-ボットエージェント MOCHI-kiki を作りました。
-MVP は 2 機能で構成しています。
+それが、MOCHI-kiki です。会議の場で動くボット。
+MVP は 2 機能で組みました。
 1 つはドキュメント参照補完。もう 1 つはライブ議事録ビューです。</a:t>
             </a:r>
             <a:endParaRPr lang="en-US" dirty="0"/>
@@ -1060,11 +1062,11 @@
             <a:r>
               <a:rPr lang="en-US" dirty="0"/>
               <a:t>[0:45–1:10 / 25 秒]
-構成はこちらです。
+では、中身の構成を見ていきます。
 Teams の音声と文字起こしを Recall.ai のボットから WebSocket で受け取り、
-Semantic Kernel のオーケストレータが意図検知と RAG を回します。
-検索基盤は Azure AI Search のハイブリッド検索、回答生成は GPT-4o。
-投稿は Bot Framework 経由で会議チャットへ返します。</a:t>
+Semantic Kernel のオーケストレータが、意図検知と RAG を回します。
+検索は Azure AI Search のハイブリッド検索、回答生成は GPT-4o。
+投稿は Bot Framework から、会議チャットへ自発的に返します。</a:t>
             </a:r>
             <a:endParaRPr lang="en-US" dirty="0"/>
           </a:p>
@@ -1153,9 +1155,9 @@
             <a:r>
               <a:rPr lang="en-US" dirty="0"/>
               <a:t>[1:10–1:25 / 15 秒]
-補完機能は 5 つのステップで動かします。
-意図検知 → 検索 → 整形 → ガード → 投稿。
-次の画面で実際の動きをお見せします。</a:t>
+補完機能の中身は、5 つのステップです。
+意図検知、検索、回答整形、ガード、投稿。
+Semantic Kernel のプラグインとして組んでいます。</a:t>
             </a:r>
             <a:endParaRPr lang="en-US" dirty="0"/>
           </a:p>
@@ -1244,7 +1246,7 @@
             <a:r>
               <a:rPr lang="en-US" dirty="0"/>
               <a:t>[1:25–1:30 / 5 秒]
-まず、補完機能を動かします。
+まずは、補完デモから。
 [撮影メモ] このタイトルカードは 3–5 秒だけ表示してすぐ次の画面録画スライドへ。</a:t>
             </a:r>
             <a:endParaRPr lang="en-US" dirty="0"/>
@@ -1430,9 +1432,10 @@
             <a:r>
               <a:rPr lang="en-US" dirty="0"/>
               <a:t>[2:10–2:25 / 15 秒]
-ライブ議事録ビューは、3 つのテンポを 1 画面に同居させています。
-議事録は 90 秒ごとに全文再生成、タイムラインは 5 分ブロックごとに 150 字、文字起こしは 5 秒ポーリング。
-会議チャットには投稿せず、別ウィンドウで俯瞰だけする導線です。</a:t>
+議事録ビューは別 UI に切り出しました。
+会議チャットを汚さず、あとから振り返る用途。
+3 つのテンポを 1 画面に同居させます。
+議事録は 90 秒、タイムラインは 5 分、文字起こしは 5 秒で更新します。</a:t>
             </a:r>
             <a:endParaRPr lang="en-US" dirty="0"/>
           </a:p>

--- a/articles/mochi-kiki-teams-agent/video/mochi-kiki-demo-deck.pptx
+++ b/articles/mochi-kiki-teams-agent/video/mochi-kiki-demo-deck.pptx
@@ -514,9 +514,10 @@
             <a:r>
               <a:rPr lang="en-US" dirty="0"/>
               <a:t>[0:00–0:15 / 15 秒]
-Teams の会議中、用語や仕様を確認するために、誰かが画面共有で資料を探し始めて、議論が止まる。
-「あれをやっておいて」のまま会議が終わって、半年後にすれ違う。
-よくある光景ですよね。
+Teams 会議で、こんなことありませんか。
+用語や仕様を確認したくて、誰かが画面共有で資料を探し始める。
+そのあいだ、会議の流れは止まったまま。
+「あれをやっておいて」と言われたまま会議が終わって、半年後にすれ違う。
 [撮影メモ] 静止 5 秒 → 次スライドへフェード。</a:t>
             </a:r>
             <a:endParaRPr lang="en-US" dirty="0"/>
@@ -880,9 +881,9 @@
             <a:r>
               <a:rPr lang="en-US" dirty="0"/>
               <a:t>[0:15–0:30 / 15 秒]
-Microsoft 365 Copilot Recap は、会議が終わってからは要約してくれます。
-ただ、会議中には介入してくれない。
-会議の場で動いてくれる相棒が、欲しかった。</a:t>
+Microsoft 365 Copilot Recap は、会議のあとには要約してくれます。
+ただ、会議の最中には動いてくれません。
+会議の場で動いてくれる相棒が、欲しかったんです。</a:t>
             </a:r>
             <a:endParaRPr lang="en-US" dirty="0"/>
           </a:p>

--- a/articles/mochi-kiki-teams-agent/video/mochi-kiki-demo-deck.pptx
+++ b/articles/mochi-kiki-teams-agent/video/mochi-kiki-demo-deck.pptx
@@ -515,9 +515,8 @@
               <a:rPr lang="en-US" dirty="0"/>
               <a:t>[0:00–0:15 / 15 秒]
 Teams 会議で、こんなことありませんか。
-用語や仕様を確認したくて、誰かが画面共有で資料を探し始める。
-そのあいだ、会議の流れは止まったまま。
-「あれをやっておいて」と言われたまま会議が終わって、半年後にすれ違う。
+仕様の確認のために、誰かが画面共有で資料を探し始めて、会議が止まる。
+「あれをやっておいて」のまま終わって、あとで認識が食い違う。
 [撮影メモ] 静止 5 秒 → 次スライドへフェード。</a:t>
             </a:r>
             <a:endParaRPr lang="en-US" dirty="0"/>

--- a/articles/mochi-kiki-teams-agent/video/mochi-kiki-demo-deck.pptx
+++ b/articles/mochi-kiki-teams-agent/video/mochi-kiki-demo-deck.pptx
@@ -606,10 +606,10 @@
             <a:r>
               <a:rPr lang="en-US" dirty="0"/>
               <a:t>[2:50–3:05 / 15 秒]
-弱点も正直に話します。補完投稿のレイテンシです。
-Recall.ai の日本語 STT は精度モード固定で、発話から投稿まで数十秒。
-即答は未達、後追い補足にとどまっています。
-STT 置き換えが本番投入前の宿題です。</a:t>
+課題もあります。補完投稿のレイテンシです。
+Recall.ai の日本語 STT は精度モード固定で、発話から投稿まで数十秒かかります。
+即答は未達で、後追いの補足にとどまっています。
+STT の置き換えが今後の課題です。</a:t>
             </a:r>
             <a:endParaRPr lang="en-US" dirty="0"/>
           </a:p>
@@ -789,7 +789,7 @@
               <a:rPr lang="en-US" dirty="0"/>
               <a:t>[3:05–3:15 / 10 秒]
 詳細は Zenn の記事にまとめています。
-Microsoft Agent Hackathon 2026 への提出作品でした。
+Microsoft Agent Hackathon 2026 への提出作品です。
 ご視聴ありがとうございました。
 [撮影メモ] 5 秒静止 → ゆっくりフェードアウト。BGM のフェードに合わせる。</a:t>
             </a:r>
@@ -880,9 +880,9 @@
             <a:r>
               <a:rPr lang="en-US" dirty="0"/>
               <a:t>[0:15–0:30 / 15 秒]
-Microsoft 365 Copilot Recap は、会議のあとには要約してくれます。
-ただ、会議の最中には動いてくれません。
-会議の場で動いてくれる相棒が、欲しかったんです。</a:t>
+Microsoft 365 Copilot Recap は、会議後の要約や Action 抽出は十分まかなえます。
+ただ、会議の最中には動きません。
+会議中の用語確認や、認識合わせは、別の仕組みが要ります。</a:t>
             </a:r>
             <a:endParaRPr lang="en-US" dirty="0"/>
           </a:p>
@@ -971,9 +971,9 @@
             <a:r>
               <a:rPr lang="en-US" dirty="0"/>
               <a:t>[0:30–0:45 / 15 秒]
-それが、MOCHI-kiki です。会議の場で動くボット。
-MVP は 2 機能で組みました。
-1 つはドキュメント参照補完。もう 1 つはライブ議事録ビューです。</a:t>
+そこで作ったのが MOCHI-kiki です。
+会議中に動くボットで、MVP は 2 機能。
+ドキュメント参照補完と、ライブ議事録ビューです。</a:t>
             </a:r>
             <a:endParaRPr lang="en-US" dirty="0"/>
           </a:p>
@@ -1062,11 +1062,11 @@
             <a:r>
               <a:rPr lang="en-US" dirty="0"/>
               <a:t>[0:45–1:10 / 25 秒]
-では、中身の構成を見ていきます。
+構成はこうです。
 Teams の音声と文字起こしを Recall.ai のボットから WebSocket で受け取り、
-Semantic Kernel のオーケストレータが、意図検知と RAG を回します。
+Semantic Kernel のオーケストレータが意図検知と RAG を回します。
 検索は Azure AI Search のハイブリッド検索、回答生成は GPT-4o。
-投稿は Bot Framework から、会議チャットへ自発的に返します。</a:t>
+投稿は Bot Framework から会議チャットに返します。</a:t>
             </a:r>
             <a:endParaRPr lang="en-US" dirty="0"/>
           </a:p>
@@ -1338,8 +1338,8 @@
               <a:t>[1:30–2:10 / 40 秒]
 会議で「マスター切替の RU 上限ってどれくらいでしたっけ」と話します。
 意図検知が spec_inquiry と判定し、キーワードでハイブリッド検索が走ります。
-GPT-4o が 200 字以内に整形し、会議チャットへ [仕様補完] プレフィックス付きで自動投稿されます。
-社内ドキュメントを誰も画面共有しないまま、議論が前に進みます。
+GPT-4o が 200 字以内に整形し、会議チャットへ [仕様補完] プレフィックス付きで自動投稿します。
+発言者はドキュメントを開かなくて済みます。
 [撮影メモ]
 ・素材: Teams 会議 5–10 分を Cmd+Shift+5 でフル録画。チャット欄が見える分割。
 ・編集: 待機時間は 4–6x 倍速、テロップ「実測 ~25 秒」を画面下に重ねる。
@@ -1432,9 +1432,9 @@
             <a:r>
               <a:rPr lang="en-US" dirty="0"/>
               <a:t>[2:10–2:25 / 15 秒]
-議事録ビューは別 UI に切り出しました。
-会議チャットを汚さず、あとから振り返る用途。
-3 つのテンポを 1 画面に同居させます。
+議事録ビューは別 UI に切り出しています。
+会議チャットには投稿せず、あとから振り返る用途です。
+1 画面に 3 つのビューがあります。
 議事録は 90 秒、タイムラインは 5 分、文字起こしは 5 秒で更新します。</a:t>
             </a:r>
             <a:endParaRPr lang="en-US" dirty="0"/>
@@ -2078,7 +2078,7 @@
                 <a:ea typeface="Hiragino Sans" pitchFamily="34" charset="-122"/>
                 <a:cs typeface="Hiragino Sans" pitchFamily="34" charset="-120"/>
               </a:rPr>
-              <a:t>会議の場で動く相棒 — 仕様補完と、ライブ議事録ビュー</a:t>
+              <a:t>会議中に動くボット — 仕様補完と、ライブ議事録ビュー</a:t>
             </a:r>
             <a:endParaRPr lang="en-US" sz="1600" dirty="0"/>
           </a:p>
@@ -2289,7 +2289,7 @@
                 <a:ea typeface="Hiragino Sans" pitchFamily="34" charset="-122"/>
                 <a:cs typeface="Hiragino Sans" pitchFamily="34" charset="-120"/>
               </a:rPr>
-              <a:t>現状の弱点  —  補完投稿のレイテンシ</a:t>
+              <a:t>現状の課題  —  補完投稿のレイテンシ</a:t>
             </a:r>
             <a:endParaRPr lang="en-US" sz="2800" dirty="0"/>
           </a:p>
@@ -2378,7 +2378,7 @@
                 <a:ea typeface="Hiragino Sans" pitchFamily="34" charset="-122"/>
                 <a:cs typeface="Hiragino Sans" pitchFamily="34" charset="-120"/>
               </a:rPr>
-              <a:t>発話から投稿まで数十秒。「即答」は MVP では未達。後追い補足として機能している段階。</a:t>
+              <a:t>発話から投稿まで数十秒かかり、即答は MVP では未達。後追いの補足にとどまっている。</a:t>
             </a:r>
             <a:endParaRPr lang="en-US" sz="1400" dirty="0"/>
           </a:p>
@@ -2588,7 +2588,7 @@
                 <a:ea typeface="Helvetica Neue" pitchFamily="34" charset="-122"/>
                 <a:cs typeface="Helvetica Neue" pitchFamily="34" charset="-120"/>
               </a:rPr>
-              <a:t>本番投入前の宿題</a:t>
+              <a:t>残課題</a:t>
             </a:r>
             <a:endParaRPr lang="en-US" sz="1200" dirty="0"/>
           </a:p>
@@ -2631,7 +2631,7 @@
                 <a:ea typeface="Hiragino Sans" pitchFamily="34" charset="-122"/>
                 <a:cs typeface="Hiragino Sans" pitchFamily="34" charset="-120"/>
               </a:rPr>
-              <a:t>Recall.ai を諦め、低遅延な STT に置き換える検証</a:t>
+              <a:t>Recall.ai を外し、低遅延な STT に置き換える検証</a:t>
             </a:r>
             <a:endParaRPr lang="en-US" sz="1200" dirty="0"/>
           </a:p>
@@ -2649,7 +2649,7 @@
                 <a:ea typeface="Hiragino Sans" pitchFamily="34" charset="-122"/>
                 <a:cs typeface="Hiragino Sans" pitchFamily="34" charset="-120"/>
               </a:rPr>
-              <a:t>Recall.ai だけで現実的な Teams 音声取得と即答は両立しない、というのが MVP の学び</a:t>
+              <a:t>Recall.ai 単体では、現実的な Teams 音声取得と即答が両立しない</a:t>
             </a:r>
             <a:endParaRPr lang="en-US" sz="1200" dirty="0"/>
           </a:p>
@@ -4102,7 +4102,7 @@
                 <a:ea typeface="Hiragino Sans" pitchFamily="34" charset="-122"/>
                 <a:cs typeface="Hiragino Sans" pitchFamily="34" charset="-120"/>
               </a:rPr>
-              <a:t>会議の場で動く相棒を、もう少し前へ。</a:t>
+              <a:t>ここまでが、MOCHI-kiki の現状です。</a:t>
             </a:r>
             <a:endParaRPr lang="en-US" sz="3200" dirty="0"/>
           </a:p>
@@ -4524,7 +4524,7 @@
                 <a:ea typeface="Hiragino Sans" pitchFamily="34" charset="-122"/>
                 <a:cs typeface="Hiragino Sans" pitchFamily="34" charset="-120"/>
               </a:rPr>
-              <a:t>会議が止まる、半年後にすれ違う</a:t>
+              <a:t>会議が止まる、認識が食い違う</a:t>
             </a:r>
             <a:endParaRPr lang="en-US" sz="3400" dirty="0"/>
           </a:p>
@@ -4695,7 +4695,7 @@
                 <a:ea typeface="Hiragino Sans" pitchFamily="34" charset="-122"/>
                 <a:cs typeface="Hiragino Sans" pitchFamily="34" charset="-120"/>
               </a:rPr>
-              <a:t>「あれをやっておいて」のまま会議が終わり、半年後にすれ違う</a:t>
+              <a:t>「あれをやっておいて」のまま終わり、あとで認識が食い違う</a:t>
             </a:r>
             <a:endParaRPr lang="en-US" sz="1400" dirty="0"/>
           </a:p>
@@ -5068,7 +5068,7 @@
                 <a:ea typeface="Hiragino Sans" pitchFamily="34" charset="-122"/>
                 <a:cs typeface="Hiragino Sans" pitchFamily="34" charset="-120"/>
               </a:rPr>
-              <a:t>MOCHI-kiki — 会議の場で動く相棒</a:t>
+              <a:t>MOCHI-kiki — 会議中に動くボット</a:t>
             </a:r>
             <a:endParaRPr lang="en-US" sz="3400" dirty="0"/>
           </a:p>
@@ -5249,7 +5249,7 @@
                 <a:ea typeface="Hiragino Sans" pitchFamily="34" charset="-122"/>
                 <a:cs typeface="Hiragino Sans" pitchFamily="34" charset="-120"/>
               </a:rPr>
-              <a:t>用語・仕様などドキュメント参照が必要な発言を検知し、社内ドキュメントを引いて 200 字の回答を会議チャットへ自発的に投稿する。</a:t>
+              <a:t>用語・仕様などドキュメント参照が必要な発言を検知し、社内ドキュメントを引いて 200 字の回答を会議チャットへ自動投稿する。</a:t>
             </a:r>
             <a:endParaRPr lang="en-US" sz="1300" dirty="0"/>
           </a:p>
@@ -5391,7 +5391,7 @@
                 <a:ea typeface="Hiragino Sans" pitchFamily="34" charset="-122"/>
                 <a:cs typeface="Hiragino Sans" pitchFamily="34" charset="-120"/>
               </a:rPr>
-              <a:t>会議の発話から議事録とタイムラインをライブ生成し、管理コンソールで閲覧できる。会議チャットは汚さない。</a:t>
+              <a:t>会議の発話から議事録とタイムラインをライブ生成し、管理コンソールで閲覧できる。会議チャットには投稿しない。</a:t>
             </a:r>
             <a:endParaRPr lang="en-US" sz="1300" dirty="0"/>
           </a:p>
@@ -8362,7 +8362,7 @@
                 <a:ea typeface="Hiragino Sans" pitchFamily="34" charset="-122"/>
                 <a:cs typeface="Hiragino Sans" pitchFamily="34" charset="-120"/>
               </a:rPr>
-              <a:t>ライブ議事録ビュー  —  会議チャットを汚さない</a:t>
+              <a:t>ライブ議事録ビュー  —  別 UI に切り出し</a:t>
             </a:r>
             <a:endParaRPr lang="en-US" sz="2800" dirty="0"/>
           </a:p>
@@ -8401,7 +8401,7 @@
                 <a:ea typeface="Hiragino Sans" pitchFamily="34" charset="-122"/>
                 <a:cs typeface="Hiragino Sans" pitchFamily="34" charset="-120"/>
               </a:rPr>
-              <a:t>管理コンソール /meeting?id=... で 3 つのテンポを 1 画面に同居させる。</a:t>
+              <a:t>管理コンソール /meeting?id=... に 3 つのビューを並べている。</a:t>
             </a:r>
             <a:endParaRPr lang="en-US" sz="1300" dirty="0"/>
           </a:p>

--- a/articles/mochi-kiki-teams-agent/video/mochi-kiki-demo-deck.pptx
+++ b/articles/mochi-kiki-teams-agent/video/mochi-kiki-demo-deck.pptx
@@ -2434,7 +2434,7 @@
               <a:buNone/>
             </a:pPr>
             <a:r>
-              <a:rPr lang="en-US" sz="1200" b="1" spc="300" kern="0" dirty="0">
+              <a:rPr lang="en-US" sz="1200" b="1" dirty="0">
                 <a:solidFill>
                   <a:srgbClr val="D97706"/>
                 </a:solidFill>
@@ -2580,7 +2580,7 @@
               <a:buNone/>
             </a:pPr>
             <a:r>
-              <a:rPr lang="en-US" sz="1200" b="1" spc="300" kern="0" dirty="0">
+              <a:rPr lang="en-US" sz="1200" b="1" dirty="0">
                 <a:solidFill>
                   <a:srgbClr val="065A82"/>
                 </a:solidFill>
@@ -4605,7 +4605,7 @@
               <a:buNone/>
             </a:pPr>
             <a:r>
-              <a:rPr lang="en-US" sz="1200" b="1" spc="300" kern="0" dirty="0">
+              <a:rPr lang="en-US" sz="1200" b="1" dirty="0">
                 <a:solidFill>
                   <a:srgbClr val="065A82"/>
                 </a:solidFill>
@@ -4776,7 +4776,7 @@
               <a:buNone/>
             </a:pPr>
             <a:r>
-              <a:rPr lang="en-US" sz="1200" b="1" spc="300" kern="0" dirty="0">
+              <a:rPr lang="en-US" sz="1200" b="1" dirty="0">
                 <a:solidFill>
                   <a:srgbClr val="D97706"/>
                 </a:solidFill>
@@ -6352,7 +6352,7 @@
               <a:buNone/>
             </a:pPr>
             <a:r>
-              <a:rPr lang="en-US" sz="1100" b="1" spc="300" kern="0" dirty="0">
+              <a:rPr lang="en-US" sz="1100" b="1" dirty="0">
                 <a:solidFill>
                   <a:srgbClr val="065A82"/>
                 </a:solidFill>
@@ -8053,7 +8053,7 @@
               <a:buNone/>
             </a:pPr>
             <a:r>
-              <a:rPr lang="en-US" sz="1400" spc="300" kern="0" dirty="0">
+              <a:rPr lang="en-US" sz="1400" dirty="0">
                 <a:solidFill>
                   <a:srgbClr val="D6E6F0"/>
                 </a:solidFill>
@@ -8149,7 +8149,7 @@
               <a:buNone/>
             </a:pPr>
             <a:r>
-              <a:rPr lang="en-US" sz="2200" b="1" spc="300" kern="0" dirty="0">
+              <a:rPr lang="en-US" sz="2200" b="1" dirty="0">
                 <a:solidFill>
                   <a:srgbClr val="8A8A8A"/>
                 </a:solidFill>
@@ -8244,7 +8244,7 @@
               <a:buNone/>
             </a:pPr>
             <a:r>
-              <a:rPr lang="en-US" sz="1000" spc="400" kern="0" dirty="0">
+              <a:rPr lang="en-US" sz="1000" dirty="0">
                 <a:solidFill>
                   <a:srgbClr val="6A6A6A"/>
                 </a:solidFill>
@@ -8585,7 +8585,7 @@
               <a:buNone/>
             </a:pPr>
             <a:r>
-              <a:rPr lang="en-US" sz="1000" b="1" spc="200" kern="0" dirty="0">
+              <a:rPr lang="en-US" sz="1000" b="1" dirty="0">
                 <a:solidFill>
                   <a:srgbClr val="065A82"/>
                 </a:solidFill>
@@ -8777,7 +8777,7 @@
               <a:buNone/>
             </a:pPr>
             <a:r>
-              <a:rPr lang="en-US" sz="1000" b="1" spc="200" kern="0" dirty="0">
+              <a:rPr lang="en-US" sz="1000" b="1" dirty="0">
                 <a:solidFill>
                   <a:srgbClr val="065A82"/>
                 </a:solidFill>
@@ -8969,7 +8969,7 @@
               <a:buNone/>
             </a:pPr>
             <a:r>
-              <a:rPr lang="en-US" sz="1000" b="1" spc="200" kern="0" dirty="0">
+              <a:rPr lang="en-US" sz="1000" b="1" dirty="0">
                 <a:solidFill>
                   <a:srgbClr val="065A82"/>
                 </a:solidFill>
@@ -9157,7 +9157,7 @@
               <a:buNone/>
             </a:pPr>
             <a:r>
-              <a:rPr lang="en-US" sz="2200" b="1" spc="300" kern="0" dirty="0">
+              <a:rPr lang="en-US" sz="2200" b="1" dirty="0">
                 <a:solidFill>
                   <a:srgbClr val="8A8A8A"/>
                 </a:solidFill>
@@ -9252,7 +9252,7 @@
               <a:buNone/>
             </a:pPr>
             <a:r>
-              <a:rPr lang="en-US" sz="1000" spc="400" kern="0" dirty="0">
+              <a:rPr lang="en-US" sz="1000" dirty="0">
                 <a:solidFill>
                   <a:srgbClr val="6A6A6A"/>
                 </a:solidFill>

--- a/articles/mochi-kiki-teams-agent/video/mochi-kiki-demo-deck.pptx
+++ b/articles/mochi-kiki-teams-agent/video/mochi-kiki-demo-deck.pptx
@@ -880,7 +880,7 @@
             <a:r>
               <a:rPr lang="en-US" dirty="0"/>
               <a:t>[0:15–0:30 / 15 秒]
-Microsoft 365 Copilot Recap は、会議後の要約や Action 抽出は十分まかなえます。
+Copilot Recap は、会議後の要約や Action 抽出は十分まかなえます。
 ただ、会議の最中には動きません。
 会議中の用語確認や、認識合わせは、別の仕組みが要ります。</a:t>
             </a:r>
@@ -4784,7 +4784,7 @@
                 <a:ea typeface="Helvetica Neue" pitchFamily="34" charset="-122"/>
                 <a:cs typeface="Helvetica Neue" pitchFamily="34" charset="-120"/>
               </a:rPr>
-              <a:t>Microsoft 365 Copilot Recap</a:t>
+              <a:t>Copilot Recap</a:t>
             </a:r>
             <a:endParaRPr lang="en-US" sz="1200" dirty="0"/>
           </a:p>

--- a/articles/mochi-kiki-teams-agent/video/mochi-kiki-demo-deck.pptx
+++ b/articles/mochi-kiki-teams-agent/video/mochi-kiki-demo-deck.pptx
@@ -880,7 +880,7 @@
             <a:r>
               <a:rPr lang="en-US" dirty="0"/>
               <a:t>[0:15–0:30 / 15 秒]
-Copilot Recap は、会議後の要約や Action 抽出は十分まかなえます。
+Intelligent Recap は、会議後の要約や Action 抽出は十分まかなえます。
 ただ、会議の最中には動きません。
 会議中の用語確認や、認識合わせは、別の仕組みが要ります。</a:t>
             </a:r>
@@ -4784,7 +4784,7 @@
                 <a:ea typeface="Helvetica Neue" pitchFamily="34" charset="-122"/>
                 <a:cs typeface="Helvetica Neue" pitchFamily="34" charset="-120"/>
               </a:rPr>
-              <a:t>Copilot Recap</a:t>
+              <a:t>Intelligent Recap</a:t>
             </a:r>
             <a:endParaRPr lang="en-US" sz="1200" dirty="0"/>
           </a:p>

--- a/articles/mochi-kiki-teams-agent/video/mochi-kiki-demo-deck.pptx
+++ b/articles/mochi-kiki-teams-agent/video/mochi-kiki-demo-deck.pptx
@@ -880,9 +880,9 @@
             <a:r>
               <a:rPr lang="en-US" dirty="0"/>
               <a:t>[0:15–0:30 / 15 秒]
-Intelligent Recap は、会議後の要約や Action 抽出は十分まかなえます。
+Web 会議の議事録システムは、会議後の要約や Action 抽出はひと通りまかなえます。
 ただ、会議の最中には動きません。
-会議中の用語確認や、認識合わせは、別の仕組みが要ります。</a:t>
+会議中の用語確認や認識合わせは、別の仕組みが要ります。</a:t>
             </a:r>
             <a:endParaRPr lang="en-US" dirty="0"/>
           </a:p>
@@ -4784,7 +4784,7 @@
                 <a:ea typeface="Helvetica Neue" pitchFamily="34" charset="-122"/>
                 <a:cs typeface="Helvetica Neue" pitchFamily="34" charset="-120"/>
               </a:rPr>
-              <a:t>Intelligent Recap</a:t>
+              <a:t>Web 会議の議事録システム</a:t>
             </a:r>
             <a:endParaRPr lang="en-US" sz="1200" dirty="0"/>
           </a:p>

--- a/articles/mochi-kiki-teams-agent/video/mochi-kiki-demo-deck.pptx
+++ b/articles/mochi-kiki-teams-agent/video/mochi-kiki-demo-deck.pptx
@@ -17,9 +17,11 @@
     <p:sldId id="265" r:id="rId11"/>
     <p:sldId id="266" r:id="rId12"/>
     <p:sldId id="267" r:id="rId13"/>
+    <p:sldId id="268" r:id="rId14"/>
+    <p:sldId id="269" r:id="rId15"/>
   </p:sldIdLst>
   <p:notesMasterIdLst>
-    <p:notesMasterId r:id="rId14"/>
+    <p:notesMasterId r:id="rId16"/>
   </p:notesMasterIdLst>
   <p:sldSz cx="9144000" cy="5143500"/>
   <p:notesSz cx="5143500" cy="9144000"/>
@@ -605,11 +607,9 @@
           <a:p>
             <a:r>
               <a:rPr lang="en-US" dirty="0"/>
-              <a:t>[2:50–3:05 / 15 秒]
-課題もあります。補完投稿のレイテンシです。
-Recall.ai の日本語 STT は精度モード固定で、発話から投稿まで数十秒かかります。
-即答は未達で、後追いの補足にとどまっています。
-STT の置き換えが今後の課題です。</a:t>
+              <a:t>[2:35–2:43 / 8 秒]
+次がタイムライン。
+ブロックごとに 150 字に要約します。確定済みブロックには触らず、末尾のみ再要約する設計です。</a:t>
             </a:r>
             <a:endParaRPr lang="en-US" dirty="0"/>
           </a:p>
@@ -697,9 +697,8 @@
           <a:p>
             <a:r>
               <a:rPr lang="en-US" dirty="0"/>
-              <a:t>[BGM のみ / 補助スライド]
-ナレーションは入れず、5 秒前後で素早く流す。
-尺が押した場合はスキップしても OK。</a:t>
+              <a:t>[2:43–2:50 / 7 秒]
+文字起こしビューは 5 秒ポーリングで最新発話まで追えます。</a:t>
             </a:r>
             <a:endParaRPr lang="en-US" dirty="0"/>
           </a:p>
@@ -787,11 +786,11 @@
           <a:p>
             <a:r>
               <a:rPr lang="en-US" dirty="0"/>
-              <a:t>[3:05–3:15 / 10 秒]
-詳細は Zenn の記事にまとめています。
-Microsoft Agent Hackathon 2026 への提出作品です。
-ご視聴ありがとうございました。
-[撮影メモ] 5 秒静止 → ゆっくりフェードアウト。BGM のフェードに合わせる。</a:t>
+              <a:t>[2:50–3:05 / 15 秒]
+課題もあります。補完投稿のレイテンシです。
+Recall.ai の日本語 STT は精度モード固定で、発話から投稿まで数十秒かかります。
+即答は未達で、後追いの補足にとどまっています。
+STT の置き換えが今後の課題です。</a:t>
             </a:r>
             <a:endParaRPr lang="en-US" dirty="0"/>
           </a:p>
@@ -815,6 +814,188 @@
             <a:fld id="{F7021451-1387-4CA6-816F-3879F97B5CBC}" type="slidenum">
               <a:rPr lang="en-US"/>
               <a:t>12</a:t>
+            </a:fld>
+            <a:endParaRPr lang="en-US"/>
+          </a:p>
+        </p:txBody>
+      </p:sp>
+    </p:spTree>
+    <p:extLst>
+      <p:ext uri="{BB962C8B-B14F-4D97-AF65-F5344CB8AC3E}">
+        <p14:creationId xmlns:p14="http://schemas.microsoft.com/office/powerpoint/2010/main" val="1024086991"/>
+      </p:ext>
+    </p:extLst>
+  </p:cSld>
+  <p:clrMapOvr>
+    <a:masterClrMapping/>
+  </p:clrMapOvr>
+</p:notes>
+</file>
+
+<file path=ppt/notesSlides/notesSlide13.xml><?xml version="1.0" encoding="utf-8"?>
+<p:notes xmlns:a="http://schemas.openxmlformats.org/drawingml/2006/main" xmlns:r="http://schemas.openxmlformats.org/officeDocument/2006/relationships" xmlns:p="http://schemas.openxmlformats.org/presentationml/2006/main">
+  <p:cSld>
+    <p:spTree>
+      <p:nvGrpSpPr>
+        <p:cNvPr id="1" name=""/>
+        <p:cNvGrpSpPr/>
+        <p:nvPr/>
+      </p:nvGrpSpPr>
+      <p:grpSpPr>
+        <a:xfrm>
+          <a:off x="0" y="0"/>
+          <a:ext cx="0" cy="0"/>
+          <a:chOff x="0" y="0"/>
+          <a:chExt cx="0" cy="0"/>
+        </a:xfrm>
+      </p:grpSpPr>
+      <p:sp>
+        <p:nvSpPr>
+          <p:cNvPr id="2" name="Slide Image Placeholder 1"/>
+          <p:cNvSpPr>
+            <a:spLocks noGrp="1" noRot="1" noChangeAspect="1"/>
+          </p:cNvSpPr>
+          <p:nvPr>
+            <p:ph type="sldImg"/>
+          </p:nvPr>
+        </p:nvSpPr>
+        <p:spPr/>
+      </p:sp>
+      <p:sp>
+        <p:nvSpPr>
+          <p:cNvPr id="3" name="Notes Placeholder 2"/>
+          <p:cNvSpPr>
+            <a:spLocks noGrp="1"/>
+          </p:cNvSpPr>
+          <p:nvPr>
+            <p:ph type="body" idx="1"/>
+          </p:nvPr>
+        </p:nvSpPr>
+        <p:spPr/>
+        <p:txBody>
+          <a:bodyPr/>
+          <a:lstStyle/>
+          <a:p>
+            <a:r>
+              <a:rPr lang="en-US" dirty="0"/>
+              <a:t>[BGM のみ / 補助スライド]
+ナレーションは入れず、5 秒前後で素早く流す。
+尺が押した場合はスキップしても OK。</a:t>
+            </a:r>
+            <a:endParaRPr lang="en-US" dirty="0"/>
+          </a:p>
+        </p:txBody>
+      </p:sp>
+      <p:sp>
+        <p:nvSpPr>
+          <p:cNvPr id="4" name="Slide Number Placeholder 3"/>
+          <p:cNvSpPr>
+            <a:spLocks noGrp="1"/>
+          </p:cNvSpPr>
+          <p:nvPr>
+            <p:ph type="sldNum" sz="quarter" idx="10"/>
+          </p:nvPr>
+        </p:nvSpPr>
+        <p:spPr/>
+        <p:txBody>
+          <a:bodyPr/>
+          <a:lstStyle/>
+          <a:p>
+            <a:fld id="{F7021451-1387-4CA6-816F-3879F97B5CBC}" type="slidenum">
+              <a:rPr lang="en-US"/>
+              <a:t>13</a:t>
+            </a:fld>
+            <a:endParaRPr lang="en-US"/>
+          </a:p>
+        </p:txBody>
+      </p:sp>
+    </p:spTree>
+    <p:extLst>
+      <p:ext uri="{BB962C8B-B14F-4D97-AF65-F5344CB8AC3E}">
+        <p14:creationId xmlns:p14="http://schemas.microsoft.com/office/powerpoint/2010/main" val="1024086991"/>
+      </p:ext>
+    </p:extLst>
+  </p:cSld>
+  <p:clrMapOvr>
+    <a:masterClrMapping/>
+  </p:clrMapOvr>
+</p:notes>
+</file>
+
+<file path=ppt/notesSlides/notesSlide14.xml><?xml version="1.0" encoding="utf-8"?>
+<p:notes xmlns:a="http://schemas.openxmlformats.org/drawingml/2006/main" xmlns:r="http://schemas.openxmlformats.org/officeDocument/2006/relationships" xmlns:p="http://schemas.openxmlformats.org/presentationml/2006/main">
+  <p:cSld>
+    <p:spTree>
+      <p:nvGrpSpPr>
+        <p:cNvPr id="1" name=""/>
+        <p:cNvGrpSpPr/>
+        <p:nvPr/>
+      </p:nvGrpSpPr>
+      <p:grpSpPr>
+        <a:xfrm>
+          <a:off x="0" y="0"/>
+          <a:ext cx="0" cy="0"/>
+          <a:chOff x="0" y="0"/>
+          <a:chExt cx="0" cy="0"/>
+        </a:xfrm>
+      </p:grpSpPr>
+      <p:sp>
+        <p:nvSpPr>
+          <p:cNvPr id="2" name="Slide Image Placeholder 1"/>
+          <p:cNvSpPr>
+            <a:spLocks noGrp="1" noRot="1" noChangeAspect="1"/>
+          </p:cNvSpPr>
+          <p:nvPr>
+            <p:ph type="sldImg"/>
+          </p:nvPr>
+        </p:nvSpPr>
+        <p:spPr/>
+      </p:sp>
+      <p:sp>
+        <p:nvSpPr>
+          <p:cNvPr id="3" name="Notes Placeholder 2"/>
+          <p:cNvSpPr>
+            <a:spLocks noGrp="1"/>
+          </p:cNvSpPr>
+          <p:nvPr>
+            <p:ph type="body" idx="1"/>
+          </p:nvPr>
+        </p:nvSpPr>
+        <p:spPr/>
+        <p:txBody>
+          <a:bodyPr/>
+          <a:lstStyle/>
+          <a:p>
+            <a:r>
+              <a:rPr lang="en-US" dirty="0"/>
+              <a:t>[3:05–3:15 / 10 秒]
+詳細は Zenn の記事にまとめています。
+Microsoft Agent Hackathon 2026 への提出作品です。
+ご視聴ありがとうございました。
+[撮影メモ] 5 秒静止 → ゆっくりフェードアウト。BGM のフェードに合わせる。</a:t>
+            </a:r>
+            <a:endParaRPr lang="en-US" dirty="0"/>
+          </a:p>
+        </p:txBody>
+      </p:sp>
+      <p:sp>
+        <p:nvSpPr>
+          <p:cNvPr id="4" name="Slide Number Placeholder 3"/>
+          <p:cNvSpPr>
+            <a:spLocks noGrp="1"/>
+          </p:cNvSpPr>
+          <p:nvPr>
+            <p:ph type="sldNum" sz="quarter" idx="10"/>
+          </p:nvPr>
+        </p:nvSpPr>
+        <p:spPr/>
+        <p:txBody>
+          <a:bodyPr/>
+          <a:lstStyle/>
+          <a:p>
+            <a:fld id="{F7021451-1387-4CA6-816F-3879F97B5CBC}" type="slidenum">
+              <a:rPr lang="en-US"/>
+              <a:t>14</a:t>
             </a:fld>
             <a:endParaRPr lang="en-US"/>
           </a:p>
@@ -1336,14 +1517,11 @@
             <a:r>
               <a:rPr lang="en-US" dirty="0"/>
               <a:t>[1:30–2:10 / 40 秒]
-会議で「マスター切替の RU 上限ってどれくらいでしたっけ」と話します。
+会議で「MOCHI-kiki の仕様を教えてください」と話します。
 意図検知が spec_inquiry と判定し、キーワードでハイブリッド検索が走ります。
-GPT-4o が 200 字以内に整形し、会議チャットへ [仕様補完] プレフィックス付きで自動投稿します。
-発言者はドキュメントを開かなくて済みます。
-[撮影メモ]
-・素材: Teams 会議 5–10 分を Cmd+Shift+5 でフル録画。チャット欄が見える分割。
-・編集: 待機時間は 4–6x 倍速、テロップ「実測 ~25 秒」を画面下に重ねる。
-・字幕は必須 (DaVinci の音声→字幕 or CapCut)。</a:t>
+GPT-4o が 200 字以内に整形し、会議チャットへ [仕様補完] プレフィックス付きで自動投稿されます。
+発言者はドキュメントを開かずに済みます。
+[撮影メモ] 画像を 8–10 秒表示し、必要に応じてチャットの [仕様補完] 部分にズームインまたはハイライト。</a:t>
             </a:r>
             <a:endParaRPr lang="en-US" dirty="0"/>
           </a:p>
@@ -1523,14 +1701,9 @@
           <a:p>
             <a:r>
               <a:rPr lang="en-US" dirty="0"/>
-              <a:t>[2:25–2:50 / 25 秒]
-議事録ビューに切り替えます。
-会議の発話から、議題・決定事項・TODO・質疑応答が 90 秒ごとに構造化 Markdown で再生成されます。
-タイムラインは 5 分ブロックごとに 150 字要約。確定済みブロックには触らず、末尾のみ再要約します。
-文字起こしは 5 秒ポーリングで最新発話まで追えます。
-[撮影メモ]
-・/meeting?id=... を別ウィンドウで開いた状態の録画。タブ切替を 3 回。
-・更新がよく見えるよう、会議終盤の発話が積もった素材を選ぶ。</a:t>
+              <a:t>[2:25–2:35 / 10 秒]
+ライブ議事録ビューを開きます。
+発話から議題・決定事項・TODO・質疑応答が、90 秒ごとに構造化 Markdown で全文再生成されます。</a:t>
             </a:r>
             <a:endParaRPr lang="en-US" dirty="0"/>
           </a:p>
@@ -2244,13 +2417,13 @@
             <a:r>
               <a:rPr lang="en-US" sz="1100" b="1" spc="400" kern="0" dirty="0">
                 <a:solidFill>
-                  <a:srgbClr val="D97706"/>
+                  <a:srgbClr val="065A82"/>
                 </a:solidFill>
                 <a:latin typeface="Helvetica Neue" pitchFamily="34" charset="0"/>
                 <a:ea typeface="Helvetica Neue" pitchFamily="34" charset="-122"/>
                 <a:cs typeface="Helvetica Neue" pitchFamily="34" charset="-120"/>
               </a:rPr>
-              <a:t>06  /  KNOWN ISSUE</a:t>
+              <a:t>DEMO B  /  2 of 3</a:t>
             </a:r>
             <a:endParaRPr lang="en-US" sz="1100" dirty="0"/>
           </a:p>
@@ -2264,24 +2437,24 @@
         </p:nvSpPr>
         <p:spPr>
           <a:xfrm>
-            <a:off x="365760" y="685800"/>
-            <a:ext cx="8412480" cy="640080"/>
-          </a:xfrm>
-          <a:prstGeom prst="rect">
-            <a:avLst/>
-          </a:prstGeom>
-          <a:noFill/>
-          <a:ln/>
-        </p:spPr>
-        <p:txBody>
-          <a:bodyPr wrap="square" lIns="0" tIns="0" rIns="0" bIns="0" rtlCol="0" anchor="ctr"/>
-          <a:lstStyle/>
-          <a:p>
-            <a:pPr indent="0" marL="0">
-              <a:buNone/>
-            </a:pPr>
-            <a:r>
-              <a:rPr lang="en-US" sz="2800" b="1" dirty="0">
+            <a:off x="365760" y="640080"/>
+            <a:ext cx="8412480" cy="502920"/>
+          </a:xfrm>
+          <a:prstGeom prst="rect">
+            <a:avLst/>
+          </a:prstGeom>
+          <a:noFill/>
+          <a:ln/>
+        </p:spPr>
+        <p:txBody>
+          <a:bodyPr wrap="square" lIns="0" tIns="0" rIns="0" bIns="0" rtlCol="0" anchor="ctr"/>
+          <a:lstStyle/>
+          <a:p>
+            <a:pPr indent="0" marL="0">
+              <a:buNone/>
+            </a:pPr>
+            <a:r>
+              <a:rPr lang="en-US" sz="2400" b="1" dirty="0">
                 <a:solidFill>
                   <a:srgbClr val="0B1B2B"/>
                 </a:solidFill>
@@ -2289,398 +2462,153 @@
                 <a:ea typeface="Hiragino Sans" pitchFamily="34" charset="-122"/>
                 <a:cs typeface="Hiragino Sans" pitchFamily="34" charset="-120"/>
               </a:rPr>
-              <a:t>現状の課題  —  補完投稿のレイテンシ</a:t>
-            </a:r>
-            <a:endParaRPr lang="en-US" sz="2800" dirty="0"/>
-          </a:p>
-        </p:txBody>
-      </p:sp>
-      <p:sp>
-        <p:nvSpPr>
-          <p:cNvPr id="4" name="Shape 2"/>
-          <p:cNvSpPr/>
-          <p:nvPr/>
-        </p:nvSpPr>
-        <p:spPr>
-          <a:xfrm>
-            <a:off x="365760" y="1417320"/>
-            <a:ext cx="8412480" cy="777240"/>
-          </a:xfrm>
-          <a:prstGeom prst="rect">
-            <a:avLst/>
-          </a:prstGeom>
-          <a:solidFill>
-            <a:srgbClr val="FEF3C7"/>
-          </a:solidFill>
-          <a:ln w="12700">
-            <a:solidFill>
-              <a:srgbClr val="D97706"/>
-            </a:solidFill>
-            <a:prstDash val="solid"/>
-          </a:ln>
-        </p:spPr>
-      </p:sp>
-      <p:sp>
-        <p:nvSpPr>
-          <p:cNvPr id="5" name="Shape 3"/>
-          <p:cNvSpPr/>
-          <p:nvPr/>
-        </p:nvSpPr>
-        <p:spPr>
-          <a:xfrm>
-            <a:off x="365760" y="1417320"/>
-            <a:ext cx="73152" cy="777240"/>
-          </a:xfrm>
-          <a:prstGeom prst="rect">
-            <a:avLst/>
-          </a:prstGeom>
-          <a:solidFill>
-            <a:srgbClr val="D97706"/>
-          </a:solidFill>
-          <a:ln w="12700">
-            <a:solidFill>
-              <a:srgbClr val="D97706"/>
-            </a:solidFill>
-            <a:prstDash val="solid"/>
-          </a:ln>
-        </p:spPr>
-      </p:sp>
-      <p:sp>
-        <p:nvSpPr>
-          <p:cNvPr id="6" name="Text 4"/>
-          <p:cNvSpPr/>
-          <p:nvPr/>
-        </p:nvSpPr>
-        <p:spPr>
-          <a:xfrm>
-            <a:off x="640080" y="1417320"/>
-            <a:ext cx="8046720" cy="777240"/>
-          </a:xfrm>
-          <a:prstGeom prst="rect">
-            <a:avLst/>
-          </a:prstGeom>
-          <a:noFill/>
-          <a:ln/>
-        </p:spPr>
-        <p:txBody>
-          <a:bodyPr wrap="square" lIns="0" tIns="0" rIns="0" bIns="0" rtlCol="0" anchor="ctr"/>
-          <a:lstStyle/>
-          <a:p>
-            <a:pPr indent="0" marL="0">
-              <a:buNone/>
-            </a:pPr>
-            <a:r>
-              <a:rPr lang="en-US" sz="1400" b="1" dirty="0">
-                <a:solidFill>
-                  <a:srgbClr val="0B1B2B"/>
+              <a:t>ライブ議事録ビュー  —  タイムライン</a:t>
+            </a:r>
+            <a:endParaRPr lang="en-US" sz="2400" dirty="0"/>
+          </a:p>
+        </p:txBody>
+      </p:sp>
+      <p:sp>
+        <p:nvSpPr>
+          <p:cNvPr id="4" name="Text 2"/>
+          <p:cNvSpPr/>
+          <p:nvPr/>
+        </p:nvSpPr>
+        <p:spPr>
+          <a:xfrm>
+            <a:off x="365760" y="1143000"/>
+            <a:ext cx="8412480" cy="274320"/>
+          </a:xfrm>
+          <a:prstGeom prst="rect">
+            <a:avLst/>
+          </a:prstGeom>
+          <a:noFill/>
+          <a:ln/>
+        </p:spPr>
+        <p:txBody>
+          <a:bodyPr wrap="square" lIns="0" tIns="0" rIns="0" bIns="0" rtlCol="0" anchor="ctr"/>
+          <a:lstStyle/>
+          <a:p>
+            <a:pPr indent="0" marL="0">
+              <a:buNone/>
+            </a:pPr>
+            <a:r>
+              <a:rPr lang="en-US" sz="1200" dirty="0">
+                <a:solidFill>
+                  <a:srgbClr val="55667A"/>
                 </a:solidFill>
                 <a:latin typeface="Hiragino Sans" pitchFamily="34" charset="0"/>
                 <a:ea typeface="Hiragino Sans" pitchFamily="34" charset="-122"/>
                 <a:cs typeface="Hiragino Sans" pitchFamily="34" charset="-120"/>
               </a:rPr>
-              <a:t>発話から投稿まで数十秒かかり、即答は MVP では未達。後追いの補足にとどまっている。</a:t>
-            </a:r>
-            <a:endParaRPr lang="en-US" sz="1400" dirty="0"/>
-          </a:p>
-        </p:txBody>
-      </p:sp>
-      <p:sp>
-        <p:nvSpPr>
-          <p:cNvPr id="7" name="Shape 5"/>
-          <p:cNvSpPr/>
-          <p:nvPr/>
-        </p:nvSpPr>
-        <p:spPr>
-          <a:xfrm>
-            <a:off x="365760" y="2423160"/>
-            <a:ext cx="4114800" cy="2103120"/>
-          </a:xfrm>
-          <a:prstGeom prst="rect">
-            <a:avLst/>
-          </a:prstGeom>
-          <a:solidFill>
-            <a:srgbClr val="FFFFFF"/>
-          </a:solidFill>
-          <a:ln w="12700">
-            <a:solidFill>
-              <a:srgbClr val="D6E6F0"/>
-            </a:solidFill>
-            <a:prstDash val="solid"/>
-          </a:ln>
-        </p:spPr>
-      </p:sp>
-      <p:sp>
-        <p:nvSpPr>
-          <p:cNvPr id="8" name="Text 6"/>
-          <p:cNvSpPr/>
-          <p:nvPr/>
-        </p:nvSpPr>
-        <p:spPr>
-          <a:xfrm>
-            <a:off x="640080" y="2606040"/>
-            <a:ext cx="3749040" cy="320040"/>
-          </a:xfrm>
-          <a:prstGeom prst="rect">
-            <a:avLst/>
-          </a:prstGeom>
-          <a:noFill/>
-          <a:ln/>
-        </p:spPr>
-        <p:txBody>
-          <a:bodyPr wrap="square" lIns="0" tIns="0" rIns="0" bIns="0" rtlCol="0" anchor="ctr"/>
-          <a:lstStyle/>
-          <a:p>
-            <a:pPr indent="0" marL="0">
-              <a:buNone/>
-            </a:pPr>
-            <a:r>
-              <a:rPr lang="en-US" sz="1200" b="1" dirty="0">
-                <a:solidFill>
-                  <a:srgbClr val="D97706"/>
+              <a:t>ブロックごとに 150 字以内に要約。末尾ブロックのみ再要約し、確定済みは触らない</a:t>
+            </a:r>
+            <a:endParaRPr lang="en-US" sz="1200" dirty="0"/>
+          </a:p>
+        </p:txBody>
+      </p:sp>
+      <p:pic>
+        <p:nvPicPr>
+          <p:cNvPr id="5" name="Image 0" descr="assets/demo-b-timeline.png">    </p:cNvPr>
+          <p:cNvPicPr>
+            <a:picLocks noChangeAspect="1"/>
+          </p:cNvPicPr>
+          <p:nvPr/>
+        </p:nvPicPr>
+        <p:blipFill>
+          <a:blip r:embed="rId1"/>
+          <a:srcRect l="0" r="0" t="0" b="0"/>
+          <a:stretch/>
+        </p:blipFill>
+        <p:spPr>
+          <a:xfrm>
+            <a:off x="457200" y="2011680"/>
+            <a:ext cx="8229600" cy="2395728"/>
+          </a:xfrm>
+          <a:prstGeom prst="rect">
+            <a:avLst/>
+          </a:prstGeom>
+        </p:spPr>
+      </p:pic>
+      <p:sp>
+        <p:nvSpPr>
+          <p:cNvPr id="6" name="Text 3"/>
+          <p:cNvSpPr/>
+          <p:nvPr/>
+        </p:nvSpPr>
+        <p:spPr>
+          <a:xfrm>
+            <a:off x="365760" y="4800600"/>
+            <a:ext cx="5486400" cy="274320"/>
+          </a:xfrm>
+          <a:prstGeom prst="rect">
+            <a:avLst/>
+          </a:prstGeom>
+          <a:noFill/>
+          <a:ln/>
+        </p:spPr>
+        <p:txBody>
+          <a:bodyPr wrap="square" lIns="0" tIns="0" rIns="0" bIns="0" rtlCol="0" anchor="ctr"/>
+          <a:lstStyle/>
+          <a:p>
+            <a:pPr indent="0" marL="0">
+              <a:buNone/>
+            </a:pPr>
+            <a:r>
+              <a:rPr lang="en-US" sz="900" b="1" dirty="0">
+                <a:solidFill>
+                  <a:srgbClr val="55667A"/>
                 </a:solidFill>
                 <a:latin typeface="Helvetica Neue" pitchFamily="34" charset="0"/>
                 <a:ea typeface="Helvetica Neue" pitchFamily="34" charset="-122"/>
                 <a:cs typeface="Helvetica Neue" pitchFamily="34" charset="-120"/>
               </a:rPr>
-              <a:t>原因</a:t>
-            </a:r>
-            <a:endParaRPr lang="en-US" sz="1200" dirty="0"/>
-          </a:p>
-        </p:txBody>
-      </p:sp>
-      <p:sp>
-        <p:nvSpPr>
-          <p:cNvPr id="9" name="Text 7"/>
-          <p:cNvSpPr/>
-          <p:nvPr/>
-        </p:nvSpPr>
-        <p:spPr>
-          <a:xfrm>
-            <a:off x="640080" y="2971800"/>
-            <a:ext cx="3749040" cy="1463040"/>
-          </a:xfrm>
-          <a:prstGeom prst="rect">
-            <a:avLst/>
-          </a:prstGeom>
-          <a:noFill/>
-          <a:ln/>
-        </p:spPr>
-        <p:txBody>
-          <a:bodyPr wrap="square" rtlCol="0" anchor="t"/>
-          <a:lstStyle/>
-          <a:p>
-            <a:pPr marL="342900" indent="-342900">
-              <a:spcAft>
-                <a:spcPts val="1000"/>
-              </a:spcAft>
-              <a:buSzPct val="100000"/>
-              <a:buChar char="•"/>
-            </a:pPr>
-            <a:r>
-              <a:rPr lang="en-US" sz="1200" dirty="0">
-                <a:solidFill>
-                  <a:srgbClr val="0B1B2B"/>
-                </a:solidFill>
-                <a:latin typeface="Hiragino Sans" pitchFamily="34" charset="0"/>
-                <a:ea typeface="Hiragino Sans" pitchFamily="34" charset="-122"/>
-                <a:cs typeface="Hiragino Sans" pitchFamily="34" charset="-120"/>
-              </a:rPr>
-              <a:t>Recall.ai の日本語 STT は精度モード固定 (prioritize_accuracy)</a:t>
-            </a:r>
-            <a:endParaRPr lang="en-US" sz="1200" dirty="0"/>
-          </a:p>
-          <a:p>
-            <a:pPr marL="342900" indent="-342900">
-              <a:spcAft>
-                <a:spcPts val="1000"/>
-              </a:spcAft>
-              <a:buSzPct val="100000"/>
-              <a:buChar char="•"/>
-            </a:pPr>
-            <a:r>
-              <a:rPr lang="en-US" sz="1200" dirty="0">
-                <a:solidFill>
-                  <a:srgbClr val="0B1B2B"/>
-                </a:solidFill>
-                <a:latin typeface="Hiragino Sans" pitchFamily="34" charset="0"/>
-                <a:ea typeface="Hiragino Sans" pitchFamily="34" charset="-122"/>
-                <a:cs typeface="Hiragino Sans" pitchFamily="34" charset="-120"/>
-              </a:rPr>
-              <a:t>発話塊が一区切りつくまで貯めてから返すため、STT だけで十数〜数十秒</a:t>
-            </a:r>
-            <a:endParaRPr lang="en-US" sz="1200" dirty="0"/>
-          </a:p>
-          <a:p>
-            <a:pPr marL="342900" indent="-342900">
-              <a:buSzPct val="100000"/>
-              <a:buChar char="•"/>
-            </a:pPr>
-            <a:r>
-              <a:rPr lang="en-US" sz="1200" dirty="0">
-                <a:solidFill>
-                  <a:srgbClr val="0B1B2B"/>
-                </a:solidFill>
-                <a:latin typeface="Hiragino Sans" pitchFamily="34" charset="0"/>
-                <a:ea typeface="Hiragino Sans" pitchFamily="34" charset="-122"/>
-                <a:cs typeface="Hiragino Sans" pitchFamily="34" charset="-120"/>
-              </a:rPr>
-              <a:t>日本語では prioritize_low_latency が選べない (英語専用)</a:t>
-            </a:r>
-            <a:endParaRPr lang="en-US" sz="1200" dirty="0"/>
-          </a:p>
-        </p:txBody>
-      </p:sp>
-      <p:sp>
-        <p:nvSpPr>
-          <p:cNvPr id="10" name="Shape 8"/>
-          <p:cNvSpPr/>
-          <p:nvPr/>
-        </p:nvSpPr>
-        <p:spPr>
-          <a:xfrm>
-            <a:off x="4663440" y="2423160"/>
-            <a:ext cx="4114800" cy="2103120"/>
-          </a:xfrm>
-          <a:prstGeom prst="rect">
-            <a:avLst/>
-          </a:prstGeom>
-          <a:solidFill>
-            <a:srgbClr val="FFFFFF"/>
-          </a:solidFill>
-          <a:ln w="12700">
-            <a:solidFill>
-              <a:srgbClr val="D6E6F0"/>
-            </a:solidFill>
-            <a:prstDash val="solid"/>
-          </a:ln>
-        </p:spPr>
-      </p:sp>
-      <p:sp>
-        <p:nvSpPr>
-          <p:cNvPr id="11" name="Text 9"/>
-          <p:cNvSpPr/>
-          <p:nvPr/>
-        </p:nvSpPr>
-        <p:spPr>
-          <a:xfrm>
-            <a:off x="4937760" y="2606040"/>
-            <a:ext cx="3749040" cy="320040"/>
-          </a:xfrm>
-          <a:prstGeom prst="rect">
-            <a:avLst/>
-          </a:prstGeom>
-          <a:noFill/>
-          <a:ln/>
-        </p:spPr>
-        <p:txBody>
-          <a:bodyPr wrap="square" lIns="0" tIns="0" rIns="0" bIns="0" rtlCol="0" anchor="ctr"/>
-          <a:lstStyle/>
-          <a:p>
-            <a:pPr indent="0" marL="0">
-              <a:buNone/>
-            </a:pPr>
-            <a:r>
-              <a:rPr lang="en-US" sz="1200" b="1" dirty="0">
-                <a:solidFill>
-                  <a:srgbClr val="065A82"/>
+              <a:t>MOCHI-kiki</a:t>
+            </a:r>
+            <a:pPr indent="0" marL="0">
+              <a:buNone/>
+            </a:pPr>
+            <a:r>
+              <a:rPr lang="en-US" sz="900" dirty="0">
+                <a:solidFill>
+                  <a:srgbClr val="55667A"/>
                 </a:solidFill>
                 <a:latin typeface="Helvetica Neue" pitchFamily="34" charset="0"/>
                 <a:ea typeface="Helvetica Neue" pitchFamily="34" charset="-122"/>
                 <a:cs typeface="Helvetica Neue" pitchFamily="34" charset="-120"/>
               </a:rPr>
-              <a:t>残課題</a:t>
-            </a:r>
-            <a:endParaRPr lang="en-US" sz="1200" dirty="0"/>
-          </a:p>
-        </p:txBody>
-      </p:sp>
-      <p:sp>
-        <p:nvSpPr>
-          <p:cNvPr id="12" name="Text 10"/>
-          <p:cNvSpPr/>
-          <p:nvPr/>
-        </p:nvSpPr>
-        <p:spPr>
-          <a:xfrm>
-            <a:off x="4937760" y="2971800"/>
-            <a:ext cx="3749040" cy="1463040"/>
-          </a:xfrm>
-          <a:prstGeom prst="rect">
-            <a:avLst/>
-          </a:prstGeom>
-          <a:noFill/>
-          <a:ln/>
-        </p:spPr>
-        <p:txBody>
-          <a:bodyPr wrap="square" rtlCol="0" anchor="t"/>
-          <a:lstStyle/>
-          <a:p>
-            <a:pPr marL="342900" indent="-342900">
-              <a:spcAft>
-                <a:spcPts val="1000"/>
-              </a:spcAft>
-              <a:buSzPct val="100000"/>
-              <a:buChar char="•"/>
-            </a:pPr>
-            <a:r>
-              <a:rPr lang="en-US" sz="1200" dirty="0">
-                <a:solidFill>
-                  <a:srgbClr val="0B1B2B"/>
-                </a:solidFill>
-                <a:latin typeface="Hiragino Sans" pitchFamily="34" charset="0"/>
-                <a:ea typeface="Hiragino Sans" pitchFamily="34" charset="-122"/>
-                <a:cs typeface="Hiragino Sans" pitchFamily="34" charset="-120"/>
-              </a:rPr>
-              <a:t>Recall.ai を外し、低遅延な STT に置き換える検証</a:t>
-            </a:r>
-            <a:endParaRPr lang="en-US" sz="1200" dirty="0"/>
-          </a:p>
-          <a:p>
-            <a:pPr marL="342900" indent="-342900">
-              <a:buSzPct val="100000"/>
-              <a:buChar char="•"/>
-            </a:pPr>
-            <a:r>
-              <a:rPr lang="en-US" sz="1200" dirty="0">
-                <a:solidFill>
-                  <a:srgbClr val="0B1B2B"/>
-                </a:solidFill>
-                <a:latin typeface="Hiragino Sans" pitchFamily="34" charset="0"/>
-                <a:ea typeface="Hiragino Sans" pitchFamily="34" charset="-122"/>
-                <a:cs typeface="Hiragino Sans" pitchFamily="34" charset="-120"/>
-              </a:rPr>
-              <a:t>Recall.ai 単体では、現実的な Teams 音声取得と即答が両立しない</a:t>
-            </a:r>
-            <a:endParaRPr lang="en-US" sz="1200" dirty="0"/>
-          </a:p>
-        </p:txBody>
-      </p:sp>
-      <p:sp>
-        <p:nvSpPr>
-          <p:cNvPr id="13" name="Text 11"/>
-          <p:cNvSpPr/>
-          <p:nvPr/>
-        </p:nvSpPr>
-        <p:spPr>
-          <a:xfrm>
-            <a:off x="365760" y="4800600"/>
-            <a:ext cx="5486400" cy="274320"/>
-          </a:xfrm>
-          <a:prstGeom prst="rect">
-            <a:avLst/>
-          </a:prstGeom>
-          <a:noFill/>
-          <a:ln/>
-        </p:spPr>
-        <p:txBody>
-          <a:bodyPr wrap="square" lIns="0" tIns="0" rIns="0" bIns="0" rtlCol="0" anchor="ctr"/>
-          <a:lstStyle/>
-          <a:p>
-            <a:pPr indent="0" marL="0">
-              <a:buNone/>
-            </a:pPr>
-            <a:r>
-              <a:rPr lang="en-US" sz="900" b="1" dirty="0">
+              <a:t>  /  Microsoft Agent Hackathon 2026</a:t>
+            </a:r>
+            <a:endParaRPr lang="en-US" sz="900" dirty="0"/>
+          </a:p>
+        </p:txBody>
+      </p:sp>
+      <p:sp>
+        <p:nvSpPr>
+          <p:cNvPr id="7" name="Text 4"/>
+          <p:cNvSpPr/>
+          <p:nvPr/>
+        </p:nvSpPr>
+        <p:spPr>
+          <a:xfrm>
+            <a:off x="8229600" y="4800600"/>
+            <a:ext cx="548640" cy="274320"/>
+          </a:xfrm>
+          <a:prstGeom prst="rect">
+            <a:avLst/>
+          </a:prstGeom>
+          <a:noFill/>
+          <a:ln/>
+        </p:spPr>
+        <p:txBody>
+          <a:bodyPr wrap="square" lIns="0" tIns="0" rIns="0" bIns="0" rtlCol="0" anchor="ctr"/>
+          <a:lstStyle/>
+          <a:p>
+            <a:pPr algn="r" indent="0" marL="0">
+              <a:buNone/>
+            </a:pPr>
+            <a:r>
+              <a:rPr lang="en-US" sz="900" dirty="0">
                 <a:solidFill>
                   <a:srgbClr val="55667A"/>
                 </a:solidFill>
@@ -2688,60 +2616,7 @@
                 <a:ea typeface="Helvetica Neue" pitchFamily="34" charset="-122"/>
                 <a:cs typeface="Helvetica Neue" pitchFamily="34" charset="-120"/>
               </a:rPr>
-              <a:t>MOCHI-kiki</a:t>
-            </a:r>
-            <a:pPr indent="0" marL="0">
-              <a:buNone/>
-            </a:pPr>
-            <a:r>
-              <a:rPr lang="en-US" sz="900" dirty="0">
-                <a:solidFill>
-                  <a:srgbClr val="55667A"/>
-                </a:solidFill>
-                <a:latin typeface="Helvetica Neue" pitchFamily="34" charset="0"/>
-                <a:ea typeface="Helvetica Neue" pitchFamily="34" charset="-122"/>
-                <a:cs typeface="Helvetica Neue" pitchFamily="34" charset="-120"/>
-              </a:rPr>
-              <a:t>  /  Microsoft Agent Hackathon 2026</a:t>
-            </a:r>
-            <a:endParaRPr lang="en-US" sz="900" dirty="0"/>
-          </a:p>
-        </p:txBody>
-      </p:sp>
-      <p:sp>
-        <p:nvSpPr>
-          <p:cNvPr id="14" name="Text 12"/>
-          <p:cNvSpPr/>
-          <p:nvPr/>
-        </p:nvSpPr>
-        <p:spPr>
-          <a:xfrm>
-            <a:off x="8229600" y="4800600"/>
-            <a:ext cx="548640" cy="274320"/>
-          </a:xfrm>
-          <a:prstGeom prst="rect">
-            <a:avLst/>
-          </a:prstGeom>
-          <a:noFill/>
-          <a:ln/>
-        </p:spPr>
-        <p:txBody>
-          <a:bodyPr wrap="square" lIns="0" tIns="0" rIns="0" bIns="0" rtlCol="0" anchor="ctr"/>
-          <a:lstStyle/>
-          <a:p>
-            <a:pPr algn="r" indent="0" marL="0">
-              <a:buNone/>
-            </a:pPr>
-            <a:r>
-              <a:rPr lang="en-US" sz="900" dirty="0">
-                <a:solidFill>
-                  <a:srgbClr val="55667A"/>
-                </a:solidFill>
-                <a:latin typeface="Helvetica Neue" pitchFamily="34" charset="0"/>
-                <a:ea typeface="Helvetica Neue" pitchFamily="34" charset="-122"/>
-                <a:cs typeface="Helvetica Neue" pitchFamily="34" charset="-120"/>
-              </a:rPr>
-              <a:t>10 / 12</a:t>
+              <a:t>10 / 14</a:t>
             </a:r>
             <a:endParaRPr lang="en-US" sz="900" dirty="0"/>
           </a:p>
@@ -2812,7 +2687,7 @@
                 <a:ea typeface="Helvetica Neue" pitchFamily="34" charset="-122"/>
                 <a:cs typeface="Helvetica Neue" pitchFamily="34" charset="-120"/>
               </a:rPr>
-              <a:t>07  /  STACK</a:t>
+              <a:t>DEMO B  /  3 of 3</a:t>
             </a:r>
             <a:endParaRPr lang="en-US" sz="1100" dirty="0"/>
           </a:p>
@@ -2826,24 +2701,24 @@
         </p:nvSpPr>
         <p:spPr>
           <a:xfrm>
-            <a:off x="365760" y="685800"/>
-            <a:ext cx="8412480" cy="640080"/>
-          </a:xfrm>
-          <a:prstGeom prst="rect">
-            <a:avLst/>
-          </a:prstGeom>
-          <a:noFill/>
-          <a:ln/>
-        </p:spPr>
-        <p:txBody>
-          <a:bodyPr wrap="square" lIns="0" tIns="0" rIns="0" bIns="0" rtlCol="0" anchor="ctr"/>
-          <a:lstStyle/>
-          <a:p>
-            <a:pPr indent="0" marL="0">
-              <a:buNone/>
-            </a:pPr>
-            <a:r>
-              <a:rPr lang="en-US" sz="3000" b="1" dirty="0">
+            <a:off x="365760" y="640080"/>
+            <a:ext cx="8412480" cy="502920"/>
+          </a:xfrm>
+          <a:prstGeom prst="rect">
+            <a:avLst/>
+          </a:prstGeom>
+          <a:noFill/>
+          <a:ln/>
+        </p:spPr>
+        <p:txBody>
+          <a:bodyPr wrap="square" lIns="0" tIns="0" rIns="0" bIns="0" rtlCol="0" anchor="ctr"/>
+          <a:lstStyle/>
+          <a:p>
+            <a:pPr indent="0" marL="0">
+              <a:buNone/>
+            </a:pPr>
+            <a:r>
+              <a:rPr lang="en-US" sz="2400" b="1" dirty="0">
                 <a:solidFill>
                   <a:srgbClr val="0B1B2B"/>
                 </a:solidFill>
@@ -2851,1123 +2726,161 @@
                 <a:ea typeface="Hiragino Sans" pitchFamily="34" charset="-122"/>
                 <a:cs typeface="Hiragino Sans" pitchFamily="34" charset="-120"/>
               </a:rPr>
-              <a:t>使用した Microsoft 技術</a:t>
-            </a:r>
-            <a:endParaRPr lang="en-US" sz="3000" dirty="0"/>
-          </a:p>
-        </p:txBody>
-      </p:sp>
-      <p:sp>
-        <p:nvSpPr>
-          <p:cNvPr id="4" name="Shape 2"/>
-          <p:cNvSpPr/>
-          <p:nvPr/>
-        </p:nvSpPr>
-        <p:spPr>
-          <a:xfrm>
-            <a:off x="365760" y="1417320"/>
-            <a:ext cx="4160520" cy="685800"/>
-          </a:xfrm>
-          <a:prstGeom prst="rect">
-            <a:avLst/>
-          </a:prstGeom>
-          <a:solidFill>
-            <a:srgbClr val="FFFFFF"/>
-          </a:solidFill>
-          <a:ln w="12700">
-            <a:solidFill>
-              <a:srgbClr val="D6E6F0"/>
-            </a:solidFill>
-            <a:prstDash val="solid"/>
-          </a:ln>
-        </p:spPr>
-      </p:sp>
-      <p:sp>
-        <p:nvSpPr>
-          <p:cNvPr id="5" name="Shape 3"/>
-          <p:cNvSpPr/>
-          <p:nvPr/>
-        </p:nvSpPr>
-        <p:spPr>
-          <a:xfrm>
-            <a:off x="365760" y="1417320"/>
-            <a:ext cx="73152" cy="685800"/>
-          </a:xfrm>
-          <a:prstGeom prst="rect">
-            <a:avLst/>
-          </a:prstGeom>
-          <a:solidFill>
-            <a:srgbClr val="065A82"/>
-          </a:solidFill>
-          <a:ln w="12700">
-            <a:solidFill>
-              <a:srgbClr val="065A82"/>
-            </a:solidFill>
-            <a:prstDash val="solid"/>
-          </a:ln>
-        </p:spPr>
-      </p:sp>
-      <p:sp>
-        <p:nvSpPr>
-          <p:cNvPr id="6" name="Text 4"/>
-          <p:cNvSpPr/>
-          <p:nvPr/>
-        </p:nvSpPr>
-        <p:spPr>
-          <a:xfrm>
-            <a:off x="548640" y="1490472"/>
-            <a:ext cx="3886200" cy="320040"/>
-          </a:xfrm>
-          <a:prstGeom prst="rect">
-            <a:avLst/>
-          </a:prstGeom>
-          <a:noFill/>
-          <a:ln/>
-        </p:spPr>
-        <p:txBody>
-          <a:bodyPr wrap="square" lIns="0" tIns="0" rIns="0" bIns="0" rtlCol="0" anchor="ctr"/>
-          <a:lstStyle/>
-          <a:p>
-            <a:pPr indent="0" marL="0">
-              <a:buNone/>
-            </a:pPr>
-            <a:r>
-              <a:rPr lang="en-US" sz="1300" b="1" dirty="0">
-                <a:solidFill>
-                  <a:srgbClr val="0B1B2B"/>
+              <a:t>ライブ議事録ビュー  —  文字起こし</a:t>
+            </a:r>
+            <a:endParaRPr lang="en-US" sz="2400" dirty="0"/>
+          </a:p>
+        </p:txBody>
+      </p:sp>
+      <p:sp>
+        <p:nvSpPr>
+          <p:cNvPr id="4" name="Text 2"/>
+          <p:cNvSpPr/>
+          <p:nvPr/>
+        </p:nvSpPr>
+        <p:spPr>
+          <a:xfrm>
+            <a:off x="365760" y="1143000"/>
+            <a:ext cx="8412480" cy="274320"/>
+          </a:xfrm>
+          <a:prstGeom prst="rect">
+            <a:avLst/>
+          </a:prstGeom>
+          <a:noFill/>
+          <a:ln/>
+        </p:spPr>
+        <p:txBody>
+          <a:bodyPr wrap="square" lIns="0" tIns="0" rIns="0" bIns="0" rtlCol="0" anchor="ctr"/>
+          <a:lstStyle/>
+          <a:p>
+            <a:pPr indent="0" marL="0">
+              <a:buNone/>
+            </a:pPr>
+            <a:r>
+              <a:rPr lang="en-US" sz="1200" dirty="0">
+                <a:solidFill>
+                  <a:srgbClr val="55667A"/>
+                </a:solidFill>
+                <a:latin typeface="Hiragino Sans" pitchFamily="34" charset="0"/>
+                <a:ea typeface="Hiragino Sans" pitchFamily="34" charset="-122"/>
+                <a:cs typeface="Hiragino Sans" pitchFamily="34" charset="-120"/>
+              </a:rPr>
+              <a:t>発話データをそのまま 5 秒ポーリングで表示。最新発話を即座に追える</a:t>
+            </a:r>
+            <a:endParaRPr lang="en-US" sz="1200" dirty="0"/>
+          </a:p>
+        </p:txBody>
+      </p:sp>
+      <p:pic>
+        <p:nvPicPr>
+          <p:cNvPr id="5" name="Image 0" descr="assets/demo-b-transcript.png">    </p:cNvPr>
+          <p:cNvPicPr>
+            <a:picLocks noChangeAspect="1"/>
+          </p:cNvPicPr>
+          <p:nvPr/>
+        </p:nvPicPr>
+        <p:blipFill>
+          <a:blip r:embed="rId1"/>
+          <a:srcRect l="0" r="0" t="0" b="0"/>
+          <a:stretch/>
+        </p:blipFill>
+        <p:spPr>
+          <a:xfrm>
+            <a:off x="1403604" y="1463040"/>
+            <a:ext cx="6336792" cy="3337560"/>
+          </a:xfrm>
+          <a:prstGeom prst="rect">
+            <a:avLst/>
+          </a:prstGeom>
+        </p:spPr>
+      </p:pic>
+      <p:sp>
+        <p:nvSpPr>
+          <p:cNvPr id="6" name="Text 3"/>
+          <p:cNvSpPr/>
+          <p:nvPr/>
+        </p:nvSpPr>
+        <p:spPr>
+          <a:xfrm>
+            <a:off x="365760" y="4800600"/>
+            <a:ext cx="5486400" cy="274320"/>
+          </a:xfrm>
+          <a:prstGeom prst="rect">
+            <a:avLst/>
+          </a:prstGeom>
+          <a:noFill/>
+          <a:ln/>
+        </p:spPr>
+        <p:txBody>
+          <a:bodyPr wrap="square" lIns="0" tIns="0" rIns="0" bIns="0" rtlCol="0" anchor="ctr"/>
+          <a:lstStyle/>
+          <a:p>
+            <a:pPr indent="0" marL="0">
+              <a:buNone/>
+            </a:pPr>
+            <a:r>
+              <a:rPr lang="en-US" sz="900" b="1" dirty="0">
+                <a:solidFill>
+                  <a:srgbClr val="55667A"/>
                 </a:solidFill>
                 <a:latin typeface="Helvetica Neue" pitchFamily="34" charset="0"/>
                 <a:ea typeface="Helvetica Neue" pitchFamily="34" charset="-122"/>
                 <a:cs typeface="Helvetica Neue" pitchFamily="34" charset="-120"/>
               </a:rPr>
-              <a:t>Azure Container Apps</a:t>
-            </a:r>
-            <a:endParaRPr lang="en-US" sz="1300" dirty="0"/>
-          </a:p>
-        </p:txBody>
-      </p:sp>
-      <p:sp>
-        <p:nvSpPr>
-          <p:cNvPr id="7" name="Text 5"/>
-          <p:cNvSpPr/>
-          <p:nvPr/>
-        </p:nvSpPr>
-        <p:spPr>
-          <a:xfrm>
-            <a:off x="548640" y="1801368"/>
-            <a:ext cx="3886200" cy="274320"/>
-          </a:xfrm>
-          <a:prstGeom prst="rect">
-            <a:avLst/>
-          </a:prstGeom>
-          <a:noFill/>
-          <a:ln/>
-        </p:spPr>
-        <p:txBody>
-          <a:bodyPr wrap="square" lIns="0" tIns="0" rIns="0" bIns="0" rtlCol="0" anchor="ctr"/>
-          <a:lstStyle/>
-          <a:p>
-            <a:pPr indent="0" marL="0">
-              <a:buNone/>
-            </a:pPr>
-            <a:r>
-              <a:rPr lang="en-US" sz="1100" dirty="0">
+              <a:t>MOCHI-kiki</a:t>
+            </a:r>
+            <a:pPr indent="0" marL="0">
+              <a:buNone/>
+            </a:pPr>
+            <a:r>
+              <a:rPr lang="en-US" sz="900" dirty="0">
                 <a:solidFill>
                   <a:srgbClr val="55667A"/>
-                </a:solidFill>
-                <a:latin typeface="Hiragino Sans" pitchFamily="34" charset="0"/>
-                <a:ea typeface="Hiragino Sans" pitchFamily="34" charset="-122"/>
-                <a:cs typeface="Hiragino Sans" pitchFamily="34" charset="-120"/>
-              </a:rPr>
-              <a:t>Bot プロセス実行基盤 (必須要件 ①)</a:t>
-            </a:r>
-            <a:endParaRPr lang="en-US" sz="1100" dirty="0"/>
-          </a:p>
-        </p:txBody>
-      </p:sp>
-      <p:sp>
-        <p:nvSpPr>
-          <p:cNvPr id="8" name="Shape 6"/>
-          <p:cNvSpPr/>
-          <p:nvPr/>
-        </p:nvSpPr>
-        <p:spPr>
-          <a:xfrm>
-            <a:off x="4617720" y="1417320"/>
-            <a:ext cx="4160520" cy="685800"/>
-          </a:xfrm>
-          <a:prstGeom prst="rect">
-            <a:avLst/>
-          </a:prstGeom>
-          <a:solidFill>
-            <a:srgbClr val="FFFFFF"/>
-          </a:solidFill>
-          <a:ln w="12700">
-            <a:solidFill>
-              <a:srgbClr val="D6E6F0"/>
-            </a:solidFill>
-            <a:prstDash val="solid"/>
-          </a:ln>
-        </p:spPr>
-      </p:sp>
-      <p:sp>
-        <p:nvSpPr>
-          <p:cNvPr id="9" name="Shape 7"/>
-          <p:cNvSpPr/>
-          <p:nvPr/>
-        </p:nvSpPr>
-        <p:spPr>
-          <a:xfrm>
-            <a:off x="4617720" y="1417320"/>
-            <a:ext cx="73152" cy="685800"/>
-          </a:xfrm>
-          <a:prstGeom prst="rect">
-            <a:avLst/>
-          </a:prstGeom>
-          <a:solidFill>
-            <a:srgbClr val="065A82"/>
-          </a:solidFill>
-          <a:ln w="12700">
-            <a:solidFill>
-              <a:srgbClr val="065A82"/>
-            </a:solidFill>
-            <a:prstDash val="solid"/>
-          </a:ln>
-        </p:spPr>
-      </p:sp>
-      <p:sp>
-        <p:nvSpPr>
-          <p:cNvPr id="10" name="Text 8"/>
-          <p:cNvSpPr/>
-          <p:nvPr/>
-        </p:nvSpPr>
-        <p:spPr>
-          <a:xfrm>
-            <a:off x="4800600" y="1490472"/>
-            <a:ext cx="3886200" cy="320040"/>
-          </a:xfrm>
-          <a:prstGeom prst="rect">
-            <a:avLst/>
-          </a:prstGeom>
-          <a:noFill/>
-          <a:ln/>
-        </p:spPr>
-        <p:txBody>
-          <a:bodyPr wrap="square" lIns="0" tIns="0" rIns="0" bIns="0" rtlCol="0" anchor="ctr"/>
-          <a:lstStyle/>
-          <a:p>
-            <a:pPr indent="0" marL="0">
-              <a:buNone/>
-            </a:pPr>
-            <a:r>
-              <a:rPr lang="en-US" sz="1300" b="1" dirty="0">
-                <a:solidFill>
-                  <a:srgbClr val="0B1B2B"/>
                 </a:solidFill>
                 <a:latin typeface="Helvetica Neue" pitchFamily="34" charset="0"/>
                 <a:ea typeface="Helvetica Neue" pitchFamily="34" charset="-122"/>
                 <a:cs typeface="Helvetica Neue" pitchFamily="34" charset="-120"/>
               </a:rPr>
-              <a:t>Azure OpenAI</a:t>
-            </a:r>
-            <a:endParaRPr lang="en-US" sz="1300" dirty="0"/>
-          </a:p>
-        </p:txBody>
-      </p:sp>
-      <p:sp>
-        <p:nvSpPr>
-          <p:cNvPr id="11" name="Text 9"/>
-          <p:cNvSpPr/>
-          <p:nvPr/>
-        </p:nvSpPr>
-        <p:spPr>
-          <a:xfrm>
-            <a:off x="4800600" y="1801368"/>
-            <a:ext cx="3886200" cy="274320"/>
-          </a:xfrm>
-          <a:prstGeom prst="rect">
-            <a:avLst/>
-          </a:prstGeom>
-          <a:noFill/>
-          <a:ln/>
-        </p:spPr>
-        <p:txBody>
-          <a:bodyPr wrap="square" lIns="0" tIns="0" rIns="0" bIns="0" rtlCol="0" anchor="ctr"/>
-          <a:lstStyle/>
-          <a:p>
-            <a:pPr indent="0" marL="0">
-              <a:buNone/>
-            </a:pPr>
-            <a:r>
-              <a:rPr lang="en-US" sz="1100" dirty="0">
+              <a:t>  /  Microsoft Agent Hackathon 2026</a:t>
+            </a:r>
+            <a:endParaRPr lang="en-US" sz="900" dirty="0"/>
+          </a:p>
+        </p:txBody>
+      </p:sp>
+      <p:sp>
+        <p:nvSpPr>
+          <p:cNvPr id="7" name="Text 4"/>
+          <p:cNvSpPr/>
+          <p:nvPr/>
+        </p:nvSpPr>
+        <p:spPr>
+          <a:xfrm>
+            <a:off x="8229600" y="4800600"/>
+            <a:ext cx="548640" cy="274320"/>
+          </a:xfrm>
+          <a:prstGeom prst="rect">
+            <a:avLst/>
+          </a:prstGeom>
+          <a:noFill/>
+          <a:ln/>
+        </p:spPr>
+        <p:txBody>
+          <a:bodyPr wrap="square" lIns="0" tIns="0" rIns="0" bIns="0" rtlCol="0" anchor="ctr"/>
+          <a:lstStyle/>
+          <a:p>
+            <a:pPr algn="r" indent="0" marL="0">
+              <a:buNone/>
+            </a:pPr>
+            <a:r>
+              <a:rPr lang="en-US" sz="900" dirty="0">
                 <a:solidFill>
                   <a:srgbClr val="55667A"/>
-                </a:solidFill>
-                <a:latin typeface="Hiragino Sans" pitchFamily="34" charset="0"/>
-                <a:ea typeface="Hiragino Sans" pitchFamily="34" charset="-122"/>
-                <a:cs typeface="Hiragino Sans" pitchFamily="34" charset="-120"/>
-              </a:rPr>
-              <a:t>GPT-4o + Embedding (必須要件 ②)</a:t>
-            </a:r>
-            <a:endParaRPr lang="en-US" sz="1100" dirty="0"/>
-          </a:p>
-        </p:txBody>
-      </p:sp>
-      <p:sp>
-        <p:nvSpPr>
-          <p:cNvPr id="12" name="Shape 10"/>
-          <p:cNvSpPr/>
-          <p:nvPr/>
-        </p:nvSpPr>
-        <p:spPr>
-          <a:xfrm>
-            <a:off x="365760" y="2194560"/>
-            <a:ext cx="4160520" cy="685800"/>
-          </a:xfrm>
-          <a:prstGeom prst="rect">
-            <a:avLst/>
-          </a:prstGeom>
-          <a:solidFill>
-            <a:srgbClr val="FFFFFF"/>
-          </a:solidFill>
-          <a:ln w="12700">
-            <a:solidFill>
-              <a:srgbClr val="D6E6F0"/>
-            </a:solidFill>
-            <a:prstDash val="solid"/>
-          </a:ln>
-        </p:spPr>
-      </p:sp>
-      <p:sp>
-        <p:nvSpPr>
-          <p:cNvPr id="13" name="Shape 11"/>
-          <p:cNvSpPr/>
-          <p:nvPr/>
-        </p:nvSpPr>
-        <p:spPr>
-          <a:xfrm>
-            <a:off x="365760" y="2194560"/>
-            <a:ext cx="73152" cy="685800"/>
-          </a:xfrm>
-          <a:prstGeom prst="rect">
-            <a:avLst/>
-          </a:prstGeom>
-          <a:solidFill>
-            <a:srgbClr val="065A82"/>
-          </a:solidFill>
-          <a:ln w="12700">
-            <a:solidFill>
-              <a:srgbClr val="065A82"/>
-            </a:solidFill>
-            <a:prstDash val="solid"/>
-          </a:ln>
-        </p:spPr>
-      </p:sp>
-      <p:sp>
-        <p:nvSpPr>
-          <p:cNvPr id="14" name="Text 12"/>
-          <p:cNvSpPr/>
-          <p:nvPr/>
-        </p:nvSpPr>
-        <p:spPr>
-          <a:xfrm>
-            <a:off x="548640" y="2267712"/>
-            <a:ext cx="3886200" cy="320040"/>
-          </a:xfrm>
-          <a:prstGeom prst="rect">
-            <a:avLst/>
-          </a:prstGeom>
-          <a:noFill/>
-          <a:ln/>
-        </p:spPr>
-        <p:txBody>
-          <a:bodyPr wrap="square" lIns="0" tIns="0" rIns="0" bIns="0" rtlCol="0" anchor="ctr"/>
-          <a:lstStyle/>
-          <a:p>
-            <a:pPr indent="0" marL="0">
-              <a:buNone/>
-            </a:pPr>
-            <a:r>
-              <a:rPr lang="en-US" sz="1300" b="1" dirty="0">
-                <a:solidFill>
-                  <a:srgbClr val="0B1B2B"/>
                 </a:solidFill>
                 <a:latin typeface="Helvetica Neue" pitchFamily="34" charset="0"/>
                 <a:ea typeface="Helvetica Neue" pitchFamily="34" charset="-122"/>
                 <a:cs typeface="Helvetica Neue" pitchFamily="34" charset="-120"/>
               </a:rPr>
-              <a:t>Azure AI Search</a:t>
-            </a:r>
-            <a:endParaRPr lang="en-US" sz="1300" dirty="0"/>
-          </a:p>
-        </p:txBody>
-      </p:sp>
-      <p:sp>
-        <p:nvSpPr>
-          <p:cNvPr id="15" name="Text 13"/>
-          <p:cNvSpPr/>
-          <p:nvPr/>
-        </p:nvSpPr>
-        <p:spPr>
-          <a:xfrm>
-            <a:off x="548640" y="2578608"/>
-            <a:ext cx="3886200" cy="274320"/>
-          </a:xfrm>
-          <a:prstGeom prst="rect">
-            <a:avLst/>
-          </a:prstGeom>
-          <a:noFill/>
-          <a:ln/>
-        </p:spPr>
-        <p:txBody>
-          <a:bodyPr wrap="square" lIns="0" tIns="0" rIns="0" bIns="0" rtlCol="0" anchor="ctr"/>
-          <a:lstStyle/>
-          <a:p>
-            <a:pPr indent="0" marL="0">
-              <a:buNone/>
-            </a:pPr>
-            <a:r>
-              <a:rPr lang="en-US" sz="1100" dirty="0">
-                <a:solidFill>
-                  <a:srgbClr val="55667A"/>
-                </a:solidFill>
-                <a:latin typeface="Hiragino Sans" pitchFamily="34" charset="0"/>
-                <a:ea typeface="Hiragino Sans" pitchFamily="34" charset="-122"/>
-                <a:cs typeface="Hiragino Sans" pitchFamily="34" charset="-120"/>
-              </a:rPr>
-              <a:t>RAG ハイブリッド検索</a:t>
-            </a:r>
-            <a:endParaRPr lang="en-US" sz="1100" dirty="0"/>
-          </a:p>
-        </p:txBody>
-      </p:sp>
-      <p:sp>
-        <p:nvSpPr>
-          <p:cNvPr id="16" name="Shape 14"/>
-          <p:cNvSpPr/>
-          <p:nvPr/>
-        </p:nvSpPr>
-        <p:spPr>
-          <a:xfrm>
-            <a:off x="4617720" y="2194560"/>
-            <a:ext cx="4160520" cy="685800"/>
-          </a:xfrm>
-          <a:prstGeom prst="rect">
-            <a:avLst/>
-          </a:prstGeom>
-          <a:solidFill>
-            <a:srgbClr val="FFFFFF"/>
-          </a:solidFill>
-          <a:ln w="12700">
-            <a:solidFill>
-              <a:srgbClr val="D6E6F0"/>
-            </a:solidFill>
-            <a:prstDash val="solid"/>
-          </a:ln>
-        </p:spPr>
-      </p:sp>
-      <p:sp>
-        <p:nvSpPr>
-          <p:cNvPr id="17" name="Shape 15"/>
-          <p:cNvSpPr/>
-          <p:nvPr/>
-        </p:nvSpPr>
-        <p:spPr>
-          <a:xfrm>
-            <a:off x="4617720" y="2194560"/>
-            <a:ext cx="73152" cy="685800"/>
-          </a:xfrm>
-          <a:prstGeom prst="rect">
-            <a:avLst/>
-          </a:prstGeom>
-          <a:solidFill>
-            <a:srgbClr val="065A82"/>
-          </a:solidFill>
-          <a:ln w="12700">
-            <a:solidFill>
-              <a:srgbClr val="065A82"/>
-            </a:solidFill>
-            <a:prstDash val="solid"/>
-          </a:ln>
-        </p:spPr>
-      </p:sp>
-      <p:sp>
-        <p:nvSpPr>
-          <p:cNvPr id="18" name="Text 16"/>
-          <p:cNvSpPr/>
-          <p:nvPr/>
-        </p:nvSpPr>
-        <p:spPr>
-          <a:xfrm>
-            <a:off x="4800600" y="2267712"/>
-            <a:ext cx="3886200" cy="320040"/>
-          </a:xfrm>
-          <a:prstGeom prst="rect">
-            <a:avLst/>
-          </a:prstGeom>
-          <a:noFill/>
-          <a:ln/>
-        </p:spPr>
-        <p:txBody>
-          <a:bodyPr wrap="square" lIns="0" tIns="0" rIns="0" bIns="0" rtlCol="0" anchor="ctr"/>
-          <a:lstStyle/>
-          <a:p>
-            <a:pPr indent="0" marL="0">
-              <a:buNone/>
-            </a:pPr>
-            <a:r>
-              <a:rPr lang="en-US" sz="1300" b="1" dirty="0">
-                <a:solidFill>
-                  <a:srgbClr val="0B1B2B"/>
-                </a:solidFill>
-                <a:latin typeface="Helvetica Neue" pitchFamily="34" charset="0"/>
-                <a:ea typeface="Helvetica Neue" pitchFamily="34" charset="-122"/>
-                <a:cs typeface="Helvetica Neue" pitchFamily="34" charset="-120"/>
-              </a:rPr>
-              <a:t>Azure AI Speech</a:t>
-            </a:r>
-            <a:endParaRPr lang="en-US" sz="1300" dirty="0"/>
-          </a:p>
-        </p:txBody>
-      </p:sp>
-      <p:sp>
-        <p:nvSpPr>
-          <p:cNvPr id="19" name="Text 17"/>
-          <p:cNvSpPr/>
-          <p:nvPr/>
-        </p:nvSpPr>
-        <p:spPr>
-          <a:xfrm>
-            <a:off x="4800600" y="2578608"/>
-            <a:ext cx="3886200" cy="274320"/>
-          </a:xfrm>
-          <a:prstGeom prst="rect">
-            <a:avLst/>
-          </a:prstGeom>
-          <a:noFill/>
-          <a:ln/>
-        </p:spPr>
-        <p:txBody>
-          <a:bodyPr wrap="square" lIns="0" tIns="0" rIns="0" bIns="0" rtlCol="0" anchor="ctr"/>
-          <a:lstStyle/>
-          <a:p>
-            <a:pPr indent="0" marL="0">
-              <a:buNone/>
-            </a:pPr>
-            <a:r>
-              <a:rPr lang="en-US" sz="1100" dirty="0">
-                <a:solidFill>
-                  <a:srgbClr val="55667A"/>
-                </a:solidFill>
-                <a:latin typeface="Hiragino Sans" pitchFamily="34" charset="0"/>
-                <a:ea typeface="Hiragino Sans" pitchFamily="34" charset="-122"/>
-                <a:cs typeface="Hiragino Sans" pitchFamily="34" charset="-120"/>
-              </a:rPr>
-              <a:t>音声処理 (補助)</a:t>
-            </a:r>
-            <a:endParaRPr lang="en-US" sz="1100" dirty="0"/>
-          </a:p>
-        </p:txBody>
-      </p:sp>
-      <p:sp>
-        <p:nvSpPr>
-          <p:cNvPr id="20" name="Shape 18"/>
-          <p:cNvSpPr/>
-          <p:nvPr/>
-        </p:nvSpPr>
-        <p:spPr>
-          <a:xfrm>
-            <a:off x="365760" y="2971800"/>
-            <a:ext cx="4160520" cy="685800"/>
-          </a:xfrm>
-          <a:prstGeom prst="rect">
-            <a:avLst/>
-          </a:prstGeom>
-          <a:solidFill>
-            <a:srgbClr val="FFFFFF"/>
-          </a:solidFill>
-          <a:ln w="12700">
-            <a:solidFill>
-              <a:srgbClr val="D6E6F0"/>
-            </a:solidFill>
-            <a:prstDash val="solid"/>
-          </a:ln>
-        </p:spPr>
-      </p:sp>
-      <p:sp>
-        <p:nvSpPr>
-          <p:cNvPr id="21" name="Shape 19"/>
-          <p:cNvSpPr/>
-          <p:nvPr/>
-        </p:nvSpPr>
-        <p:spPr>
-          <a:xfrm>
-            <a:off x="365760" y="2971800"/>
-            <a:ext cx="73152" cy="685800"/>
-          </a:xfrm>
-          <a:prstGeom prst="rect">
-            <a:avLst/>
-          </a:prstGeom>
-          <a:solidFill>
-            <a:srgbClr val="065A82"/>
-          </a:solidFill>
-          <a:ln w="12700">
-            <a:solidFill>
-              <a:srgbClr val="065A82"/>
-            </a:solidFill>
-            <a:prstDash val="solid"/>
-          </a:ln>
-        </p:spPr>
-      </p:sp>
-      <p:sp>
-        <p:nvSpPr>
-          <p:cNvPr id="22" name="Text 20"/>
-          <p:cNvSpPr/>
-          <p:nvPr/>
-        </p:nvSpPr>
-        <p:spPr>
-          <a:xfrm>
-            <a:off x="548640" y="3044952"/>
-            <a:ext cx="3886200" cy="320040"/>
-          </a:xfrm>
-          <a:prstGeom prst="rect">
-            <a:avLst/>
-          </a:prstGeom>
-          <a:noFill/>
-          <a:ln/>
-        </p:spPr>
-        <p:txBody>
-          <a:bodyPr wrap="square" lIns="0" tIns="0" rIns="0" bIns="0" rtlCol="0" anchor="ctr"/>
-          <a:lstStyle/>
-          <a:p>
-            <a:pPr indent="0" marL="0">
-              <a:buNone/>
-            </a:pPr>
-            <a:r>
-              <a:rPr lang="en-US" sz="1300" b="1" dirty="0">
-                <a:solidFill>
-                  <a:srgbClr val="0B1B2B"/>
-                </a:solidFill>
-                <a:latin typeface="Helvetica Neue" pitchFamily="34" charset="0"/>
-                <a:ea typeface="Helvetica Neue" pitchFamily="34" charset="-122"/>
-                <a:cs typeface="Helvetica Neue" pitchFamily="34" charset="-120"/>
-              </a:rPr>
-              <a:t>Azure Cosmos DB</a:t>
-            </a:r>
-            <a:endParaRPr lang="en-US" sz="1300" dirty="0"/>
-          </a:p>
-        </p:txBody>
-      </p:sp>
-      <p:sp>
-        <p:nvSpPr>
-          <p:cNvPr id="23" name="Text 21"/>
-          <p:cNvSpPr/>
-          <p:nvPr/>
-        </p:nvSpPr>
-        <p:spPr>
-          <a:xfrm>
-            <a:off x="548640" y="3355848"/>
-            <a:ext cx="3886200" cy="274320"/>
-          </a:xfrm>
-          <a:prstGeom prst="rect">
-            <a:avLst/>
-          </a:prstGeom>
-          <a:noFill/>
-          <a:ln/>
-        </p:spPr>
-        <p:txBody>
-          <a:bodyPr wrap="square" lIns="0" tIns="0" rIns="0" bIns="0" rtlCol="0" anchor="ctr"/>
-          <a:lstStyle/>
-          <a:p>
-            <a:pPr indent="0" marL="0">
-              <a:buNone/>
-            </a:pPr>
-            <a:r>
-              <a:rPr lang="en-US" sz="1100" dirty="0">
-                <a:solidFill>
-                  <a:srgbClr val="55667A"/>
-                </a:solidFill>
-                <a:latin typeface="Hiragino Sans" pitchFamily="34" charset="0"/>
-                <a:ea typeface="Hiragino Sans" pitchFamily="34" charset="-122"/>
-                <a:cs typeface="Hiragino Sans" pitchFamily="34" charset="-120"/>
-              </a:rPr>
-              <a:t>セッション / 議事録の永続化 (autoscale)</a:t>
-            </a:r>
-            <a:endParaRPr lang="en-US" sz="1100" dirty="0"/>
-          </a:p>
-        </p:txBody>
-      </p:sp>
-      <p:sp>
-        <p:nvSpPr>
-          <p:cNvPr id="24" name="Shape 22"/>
-          <p:cNvSpPr/>
-          <p:nvPr/>
-        </p:nvSpPr>
-        <p:spPr>
-          <a:xfrm>
-            <a:off x="4617720" y="2971800"/>
-            <a:ext cx="4160520" cy="685800"/>
-          </a:xfrm>
-          <a:prstGeom prst="rect">
-            <a:avLst/>
-          </a:prstGeom>
-          <a:solidFill>
-            <a:srgbClr val="FFFFFF"/>
-          </a:solidFill>
-          <a:ln w="12700">
-            <a:solidFill>
-              <a:srgbClr val="D6E6F0"/>
-            </a:solidFill>
-            <a:prstDash val="solid"/>
-          </a:ln>
-        </p:spPr>
-      </p:sp>
-      <p:sp>
-        <p:nvSpPr>
-          <p:cNvPr id="25" name="Shape 23"/>
-          <p:cNvSpPr/>
-          <p:nvPr/>
-        </p:nvSpPr>
-        <p:spPr>
-          <a:xfrm>
-            <a:off x="4617720" y="2971800"/>
-            <a:ext cx="73152" cy="685800"/>
-          </a:xfrm>
-          <a:prstGeom prst="rect">
-            <a:avLst/>
-          </a:prstGeom>
-          <a:solidFill>
-            <a:srgbClr val="065A82"/>
-          </a:solidFill>
-          <a:ln w="12700">
-            <a:solidFill>
-              <a:srgbClr val="065A82"/>
-            </a:solidFill>
-            <a:prstDash val="solid"/>
-          </a:ln>
-        </p:spPr>
-      </p:sp>
-      <p:sp>
-        <p:nvSpPr>
-          <p:cNvPr id="26" name="Text 24"/>
-          <p:cNvSpPr/>
-          <p:nvPr/>
-        </p:nvSpPr>
-        <p:spPr>
-          <a:xfrm>
-            <a:off x="4800600" y="3044952"/>
-            <a:ext cx="3886200" cy="320040"/>
-          </a:xfrm>
-          <a:prstGeom prst="rect">
-            <a:avLst/>
-          </a:prstGeom>
-          <a:noFill/>
-          <a:ln/>
-        </p:spPr>
-        <p:txBody>
-          <a:bodyPr wrap="square" lIns="0" tIns="0" rIns="0" bIns="0" rtlCol="0" anchor="ctr"/>
-          <a:lstStyle/>
-          <a:p>
-            <a:pPr indent="0" marL="0">
-              <a:buNone/>
-            </a:pPr>
-            <a:r>
-              <a:rPr lang="en-US" sz="1300" b="1" dirty="0">
-                <a:solidFill>
-                  <a:srgbClr val="0B1B2B"/>
-                </a:solidFill>
-                <a:latin typeface="Helvetica Neue" pitchFamily="34" charset="0"/>
-                <a:ea typeface="Helvetica Neue" pitchFamily="34" charset="-122"/>
-                <a:cs typeface="Helvetica Neue" pitchFamily="34" charset="-120"/>
-              </a:rPr>
-              <a:t>Azure Key Vault</a:t>
-            </a:r>
-            <a:endParaRPr lang="en-US" sz="1300" dirty="0"/>
-          </a:p>
-        </p:txBody>
-      </p:sp>
-      <p:sp>
-        <p:nvSpPr>
-          <p:cNvPr id="27" name="Text 25"/>
-          <p:cNvSpPr/>
-          <p:nvPr/>
-        </p:nvSpPr>
-        <p:spPr>
-          <a:xfrm>
-            <a:off x="4800600" y="3355848"/>
-            <a:ext cx="3886200" cy="274320"/>
-          </a:xfrm>
-          <a:prstGeom prst="rect">
-            <a:avLst/>
-          </a:prstGeom>
-          <a:noFill/>
-          <a:ln/>
-        </p:spPr>
-        <p:txBody>
-          <a:bodyPr wrap="square" lIns="0" tIns="0" rIns="0" bIns="0" rtlCol="0" anchor="ctr"/>
-          <a:lstStyle/>
-          <a:p>
-            <a:pPr indent="0" marL="0">
-              <a:buNone/>
-            </a:pPr>
-            <a:r>
-              <a:rPr lang="en-US" sz="1100" dirty="0">
-                <a:solidFill>
-                  <a:srgbClr val="55667A"/>
-                </a:solidFill>
-                <a:latin typeface="Hiragino Sans" pitchFamily="34" charset="0"/>
-                <a:ea typeface="Hiragino Sans" pitchFamily="34" charset="-122"/>
-                <a:cs typeface="Hiragino Sans" pitchFamily="34" charset="-120"/>
-              </a:rPr>
-              <a:t>シークレット管理</a:t>
-            </a:r>
-            <a:endParaRPr lang="en-US" sz="1100" dirty="0"/>
-          </a:p>
-        </p:txBody>
-      </p:sp>
-      <p:sp>
-        <p:nvSpPr>
-          <p:cNvPr id="28" name="Shape 26"/>
-          <p:cNvSpPr/>
-          <p:nvPr/>
-        </p:nvSpPr>
-        <p:spPr>
-          <a:xfrm>
-            <a:off x="365760" y="3749040"/>
-            <a:ext cx="4160520" cy="685800"/>
-          </a:xfrm>
-          <a:prstGeom prst="rect">
-            <a:avLst/>
-          </a:prstGeom>
-          <a:solidFill>
-            <a:srgbClr val="FFFFFF"/>
-          </a:solidFill>
-          <a:ln w="12700">
-            <a:solidFill>
-              <a:srgbClr val="D6E6F0"/>
-            </a:solidFill>
-            <a:prstDash val="solid"/>
-          </a:ln>
-        </p:spPr>
-      </p:sp>
-      <p:sp>
-        <p:nvSpPr>
-          <p:cNvPr id="29" name="Shape 27"/>
-          <p:cNvSpPr/>
-          <p:nvPr/>
-        </p:nvSpPr>
-        <p:spPr>
-          <a:xfrm>
-            <a:off x="365760" y="3749040"/>
-            <a:ext cx="73152" cy="685800"/>
-          </a:xfrm>
-          <a:prstGeom prst="rect">
-            <a:avLst/>
-          </a:prstGeom>
-          <a:solidFill>
-            <a:srgbClr val="065A82"/>
-          </a:solidFill>
-          <a:ln w="12700">
-            <a:solidFill>
-              <a:srgbClr val="065A82"/>
-            </a:solidFill>
-            <a:prstDash val="solid"/>
-          </a:ln>
-        </p:spPr>
-      </p:sp>
-      <p:sp>
-        <p:nvSpPr>
-          <p:cNvPr id="30" name="Text 28"/>
-          <p:cNvSpPr/>
-          <p:nvPr/>
-        </p:nvSpPr>
-        <p:spPr>
-          <a:xfrm>
-            <a:off x="548640" y="3822192"/>
-            <a:ext cx="3886200" cy="320040"/>
-          </a:xfrm>
-          <a:prstGeom prst="rect">
-            <a:avLst/>
-          </a:prstGeom>
-          <a:noFill/>
-          <a:ln/>
-        </p:spPr>
-        <p:txBody>
-          <a:bodyPr wrap="square" lIns="0" tIns="0" rIns="0" bIns="0" rtlCol="0" anchor="ctr"/>
-          <a:lstStyle/>
-          <a:p>
-            <a:pPr indent="0" marL="0">
-              <a:buNone/>
-            </a:pPr>
-            <a:r>
-              <a:rPr lang="en-US" sz="1300" b="1" dirty="0">
-                <a:solidFill>
-                  <a:srgbClr val="0B1B2B"/>
-                </a:solidFill>
-                <a:latin typeface="Helvetica Neue" pitchFamily="34" charset="0"/>
-                <a:ea typeface="Helvetica Neue" pitchFamily="34" charset="-122"/>
-                <a:cs typeface="Helvetica Neue" pitchFamily="34" charset="-120"/>
-              </a:rPr>
-              <a:t>Semantic Kernel</a:t>
-            </a:r>
-            <a:endParaRPr lang="en-US" sz="1300" dirty="0"/>
-          </a:p>
-        </p:txBody>
-      </p:sp>
-      <p:sp>
-        <p:nvSpPr>
-          <p:cNvPr id="31" name="Text 29"/>
-          <p:cNvSpPr/>
-          <p:nvPr/>
-        </p:nvSpPr>
-        <p:spPr>
-          <a:xfrm>
-            <a:off x="548640" y="4133088"/>
-            <a:ext cx="3886200" cy="274320"/>
-          </a:xfrm>
-          <a:prstGeom prst="rect">
-            <a:avLst/>
-          </a:prstGeom>
-          <a:noFill/>
-          <a:ln/>
-        </p:spPr>
-        <p:txBody>
-          <a:bodyPr wrap="square" lIns="0" tIns="0" rIns="0" bIns="0" rtlCol="0" anchor="ctr"/>
-          <a:lstStyle/>
-          <a:p>
-            <a:pPr indent="0" marL="0">
-              <a:buNone/>
-            </a:pPr>
-            <a:r>
-              <a:rPr lang="en-US" sz="1100" dirty="0">
-                <a:solidFill>
-                  <a:srgbClr val="55667A"/>
-                </a:solidFill>
-                <a:latin typeface="Hiragino Sans" pitchFamily="34" charset="0"/>
-                <a:ea typeface="Hiragino Sans" pitchFamily="34" charset="-122"/>
-                <a:cs typeface="Hiragino Sans" pitchFamily="34" charset="-120"/>
-              </a:rPr>
-              <a:t>Intent / RAG / Answer プラグイン構成</a:t>
-            </a:r>
-            <a:endParaRPr lang="en-US" sz="1100" dirty="0"/>
-          </a:p>
-        </p:txBody>
-      </p:sp>
-      <p:sp>
-        <p:nvSpPr>
-          <p:cNvPr id="32" name="Shape 30"/>
-          <p:cNvSpPr/>
-          <p:nvPr/>
-        </p:nvSpPr>
-        <p:spPr>
-          <a:xfrm>
-            <a:off x="4617720" y="3749040"/>
-            <a:ext cx="4160520" cy="685800"/>
-          </a:xfrm>
-          <a:prstGeom prst="rect">
-            <a:avLst/>
-          </a:prstGeom>
-          <a:solidFill>
-            <a:srgbClr val="FFFFFF"/>
-          </a:solidFill>
-          <a:ln w="12700">
-            <a:solidFill>
-              <a:srgbClr val="D6E6F0"/>
-            </a:solidFill>
-            <a:prstDash val="solid"/>
-          </a:ln>
-        </p:spPr>
-      </p:sp>
-      <p:sp>
-        <p:nvSpPr>
-          <p:cNvPr id="33" name="Shape 31"/>
-          <p:cNvSpPr/>
-          <p:nvPr/>
-        </p:nvSpPr>
-        <p:spPr>
-          <a:xfrm>
-            <a:off x="4617720" y="3749040"/>
-            <a:ext cx="73152" cy="685800"/>
-          </a:xfrm>
-          <a:prstGeom prst="rect">
-            <a:avLst/>
-          </a:prstGeom>
-          <a:solidFill>
-            <a:srgbClr val="065A82"/>
-          </a:solidFill>
-          <a:ln w="12700">
-            <a:solidFill>
-              <a:srgbClr val="065A82"/>
-            </a:solidFill>
-            <a:prstDash val="solid"/>
-          </a:ln>
-        </p:spPr>
-      </p:sp>
-      <p:sp>
-        <p:nvSpPr>
-          <p:cNvPr id="34" name="Text 32"/>
-          <p:cNvSpPr/>
-          <p:nvPr/>
-        </p:nvSpPr>
-        <p:spPr>
-          <a:xfrm>
-            <a:off x="4800600" y="3822192"/>
-            <a:ext cx="3886200" cy="320040"/>
-          </a:xfrm>
-          <a:prstGeom prst="rect">
-            <a:avLst/>
-          </a:prstGeom>
-          <a:noFill/>
-          <a:ln/>
-        </p:spPr>
-        <p:txBody>
-          <a:bodyPr wrap="square" lIns="0" tIns="0" rIns="0" bIns="0" rtlCol="0" anchor="ctr"/>
-          <a:lstStyle/>
-          <a:p>
-            <a:pPr indent="0" marL="0">
-              <a:buNone/>
-            </a:pPr>
-            <a:r>
-              <a:rPr lang="en-US" sz="1300" b="1" dirty="0">
-                <a:solidFill>
-                  <a:srgbClr val="0B1B2B"/>
-                </a:solidFill>
-                <a:latin typeface="Helvetica Neue" pitchFamily="34" charset="0"/>
-                <a:ea typeface="Helvetica Neue" pitchFamily="34" charset="-122"/>
-                <a:cs typeface="Helvetica Neue" pitchFamily="34" charset="-120"/>
-              </a:rPr>
-              <a:t>Bot Framework + Teams</a:t>
-            </a:r>
-            <a:endParaRPr lang="en-US" sz="1300" dirty="0"/>
-          </a:p>
-        </p:txBody>
-      </p:sp>
-      <p:sp>
-        <p:nvSpPr>
-          <p:cNvPr id="35" name="Text 33"/>
-          <p:cNvSpPr/>
-          <p:nvPr/>
-        </p:nvSpPr>
-        <p:spPr>
-          <a:xfrm>
-            <a:off x="4800600" y="4133088"/>
-            <a:ext cx="3886200" cy="274320"/>
-          </a:xfrm>
-          <a:prstGeom prst="rect">
-            <a:avLst/>
-          </a:prstGeom>
-          <a:noFill/>
-          <a:ln/>
-        </p:spPr>
-        <p:txBody>
-          <a:bodyPr wrap="square" lIns="0" tIns="0" rIns="0" bIns="0" rtlCol="0" anchor="ctr"/>
-          <a:lstStyle/>
-          <a:p>
-            <a:pPr indent="0" marL="0">
-              <a:buNone/>
-            </a:pPr>
-            <a:r>
-              <a:rPr lang="en-US" sz="1100" dirty="0">
-                <a:solidFill>
-                  <a:srgbClr val="55667A"/>
-                </a:solidFill>
-                <a:latin typeface="Hiragino Sans" pitchFamily="34" charset="0"/>
-                <a:ea typeface="Hiragino Sans" pitchFamily="34" charset="-122"/>
-                <a:cs typeface="Hiragino Sans" pitchFamily="34" charset="-120"/>
-              </a:rPr>
-              <a:t>会議チャットへの proactive 投稿</a:t>
-            </a:r>
-            <a:endParaRPr lang="en-US" sz="1100" dirty="0"/>
-          </a:p>
-        </p:txBody>
-      </p:sp>
-      <p:sp>
-        <p:nvSpPr>
-          <p:cNvPr id="36" name="Text 34"/>
-          <p:cNvSpPr/>
-          <p:nvPr/>
-        </p:nvSpPr>
-        <p:spPr>
-          <a:xfrm>
-            <a:off x="365760" y="4800600"/>
-            <a:ext cx="5486400" cy="274320"/>
-          </a:xfrm>
-          <a:prstGeom prst="rect">
-            <a:avLst/>
-          </a:prstGeom>
-          <a:noFill/>
-          <a:ln/>
-        </p:spPr>
-        <p:txBody>
-          <a:bodyPr wrap="square" lIns="0" tIns="0" rIns="0" bIns="0" rtlCol="0" anchor="ctr"/>
-          <a:lstStyle/>
-          <a:p>
-            <a:pPr indent="0" marL="0">
-              <a:buNone/>
-            </a:pPr>
-            <a:r>
-              <a:rPr lang="en-US" sz="900" b="1" dirty="0">
-                <a:solidFill>
-                  <a:srgbClr val="55667A"/>
-                </a:solidFill>
-                <a:latin typeface="Helvetica Neue" pitchFamily="34" charset="0"/>
-                <a:ea typeface="Helvetica Neue" pitchFamily="34" charset="-122"/>
-                <a:cs typeface="Helvetica Neue" pitchFamily="34" charset="-120"/>
-              </a:rPr>
-              <a:t>MOCHI-kiki</a:t>
-            </a:r>
-            <a:pPr indent="0" marL="0">
-              <a:buNone/>
-            </a:pPr>
-            <a:r>
-              <a:rPr lang="en-US" sz="900" dirty="0">
-                <a:solidFill>
-                  <a:srgbClr val="55667A"/>
-                </a:solidFill>
-                <a:latin typeface="Helvetica Neue" pitchFamily="34" charset="0"/>
-                <a:ea typeface="Helvetica Neue" pitchFamily="34" charset="-122"/>
-                <a:cs typeface="Helvetica Neue" pitchFamily="34" charset="-120"/>
-              </a:rPr>
-              <a:t>  /  Microsoft Agent Hackathon 2026</a:t>
-            </a:r>
-            <a:endParaRPr lang="en-US" sz="900" dirty="0"/>
-          </a:p>
-        </p:txBody>
-      </p:sp>
-      <p:sp>
-        <p:nvSpPr>
-          <p:cNvPr id="37" name="Text 35"/>
-          <p:cNvSpPr/>
-          <p:nvPr/>
-        </p:nvSpPr>
-        <p:spPr>
-          <a:xfrm>
-            <a:off x="8229600" y="4800600"/>
-            <a:ext cx="548640" cy="274320"/>
-          </a:xfrm>
-          <a:prstGeom prst="rect">
-            <a:avLst/>
-          </a:prstGeom>
-          <a:noFill/>
-          <a:ln/>
-        </p:spPr>
-        <p:txBody>
-          <a:bodyPr wrap="square" lIns="0" tIns="0" rIns="0" bIns="0" rtlCol="0" anchor="ctr"/>
-          <a:lstStyle/>
-          <a:p>
-            <a:pPr algn="r" indent="0" marL="0">
-              <a:buNone/>
-            </a:pPr>
-            <a:r>
-              <a:rPr lang="en-US" sz="900" dirty="0">
-                <a:solidFill>
-                  <a:srgbClr val="55667A"/>
-                </a:solidFill>
-                <a:latin typeface="Helvetica Neue" pitchFamily="34" charset="0"/>
-                <a:ea typeface="Helvetica Neue" pitchFamily="34" charset="-122"/>
-                <a:cs typeface="Helvetica Neue" pitchFamily="34" charset="-120"/>
-              </a:rPr>
-              <a:t>11 / 12</a:t>
+              <a:t>11 / 14</a:t>
             </a:r>
             <a:endParaRPr lang="en-US" sz="900" dirty="0"/>
           </a:p>
@@ -3984,6 +2897,1794 @@
 <file path=ppt/slides/slide12.xml><?xml version="1.0" encoding="utf-8"?>
 <p:sld xmlns:a="http://schemas.openxmlformats.org/drawingml/2006/main" xmlns:r="http://schemas.openxmlformats.org/officeDocument/2006/relationships" xmlns:p="http://schemas.openxmlformats.org/presentationml/2006/main">
   <p:cSld name="Slide 12">
+    <p:bg>
+      <p:bgPr>
+        <a:solidFill>
+          <a:srgbClr val="F6F8FA"/>
+        </a:solidFill>
+      </p:bgPr>
+    </p:bg>
+    <p:spTree>
+      <p:nvGrpSpPr>
+        <p:cNvPr id="1" name=""/>
+        <p:cNvGrpSpPr/>
+        <p:nvPr/>
+      </p:nvGrpSpPr>
+      <p:grpSpPr>
+        <a:xfrm>
+          <a:off x="0" y="0"/>
+          <a:ext cx="0" cy="0"/>
+          <a:chOff x="0" y="0"/>
+          <a:chExt cx="0" cy="0"/>
+        </a:xfrm>
+      </p:grpSpPr>
+      <p:sp>
+        <p:nvSpPr>
+          <p:cNvPr id="2" name="Text 0"/>
+          <p:cNvSpPr/>
+          <p:nvPr/>
+        </p:nvSpPr>
+        <p:spPr>
+          <a:xfrm>
+            <a:off x="365760" y="274320"/>
+            <a:ext cx="5486400" cy="274320"/>
+          </a:xfrm>
+          <a:prstGeom prst="rect">
+            <a:avLst/>
+          </a:prstGeom>
+          <a:noFill/>
+          <a:ln/>
+        </p:spPr>
+        <p:txBody>
+          <a:bodyPr wrap="square" lIns="0" tIns="0" rIns="0" bIns="0" rtlCol="0" anchor="ctr"/>
+          <a:lstStyle/>
+          <a:p>
+            <a:pPr indent="0" marL="0">
+              <a:buNone/>
+            </a:pPr>
+            <a:r>
+              <a:rPr lang="en-US" sz="1100" b="1" spc="400" kern="0" dirty="0">
+                <a:solidFill>
+                  <a:srgbClr val="D97706"/>
+                </a:solidFill>
+                <a:latin typeface="Helvetica Neue" pitchFamily="34" charset="0"/>
+                <a:ea typeface="Helvetica Neue" pitchFamily="34" charset="-122"/>
+                <a:cs typeface="Helvetica Neue" pitchFamily="34" charset="-120"/>
+              </a:rPr>
+              <a:t>06  /  KNOWN ISSUE</a:t>
+            </a:r>
+            <a:endParaRPr lang="en-US" sz="1100" dirty="0"/>
+          </a:p>
+        </p:txBody>
+      </p:sp>
+      <p:sp>
+        <p:nvSpPr>
+          <p:cNvPr id="3" name="Text 1"/>
+          <p:cNvSpPr/>
+          <p:nvPr/>
+        </p:nvSpPr>
+        <p:spPr>
+          <a:xfrm>
+            <a:off x="365760" y="685800"/>
+            <a:ext cx="8412480" cy="640080"/>
+          </a:xfrm>
+          <a:prstGeom prst="rect">
+            <a:avLst/>
+          </a:prstGeom>
+          <a:noFill/>
+          <a:ln/>
+        </p:spPr>
+        <p:txBody>
+          <a:bodyPr wrap="square" lIns="0" tIns="0" rIns="0" bIns="0" rtlCol="0" anchor="ctr"/>
+          <a:lstStyle/>
+          <a:p>
+            <a:pPr indent="0" marL="0">
+              <a:buNone/>
+            </a:pPr>
+            <a:r>
+              <a:rPr lang="en-US" sz="2800" b="1" dirty="0">
+                <a:solidFill>
+                  <a:srgbClr val="0B1B2B"/>
+                </a:solidFill>
+                <a:latin typeface="Hiragino Sans" pitchFamily="34" charset="0"/>
+                <a:ea typeface="Hiragino Sans" pitchFamily="34" charset="-122"/>
+                <a:cs typeface="Hiragino Sans" pitchFamily="34" charset="-120"/>
+              </a:rPr>
+              <a:t>現状の課題  —  補完投稿のレイテンシ</a:t>
+            </a:r>
+            <a:endParaRPr lang="en-US" sz="2800" dirty="0"/>
+          </a:p>
+        </p:txBody>
+      </p:sp>
+      <p:sp>
+        <p:nvSpPr>
+          <p:cNvPr id="4" name="Shape 2"/>
+          <p:cNvSpPr/>
+          <p:nvPr/>
+        </p:nvSpPr>
+        <p:spPr>
+          <a:xfrm>
+            <a:off x="365760" y="1417320"/>
+            <a:ext cx="8412480" cy="777240"/>
+          </a:xfrm>
+          <a:prstGeom prst="rect">
+            <a:avLst/>
+          </a:prstGeom>
+          <a:solidFill>
+            <a:srgbClr val="FEF3C7"/>
+          </a:solidFill>
+          <a:ln w="12700">
+            <a:solidFill>
+              <a:srgbClr val="D97706"/>
+            </a:solidFill>
+            <a:prstDash val="solid"/>
+          </a:ln>
+        </p:spPr>
+      </p:sp>
+      <p:sp>
+        <p:nvSpPr>
+          <p:cNvPr id="5" name="Shape 3"/>
+          <p:cNvSpPr/>
+          <p:nvPr/>
+        </p:nvSpPr>
+        <p:spPr>
+          <a:xfrm>
+            <a:off x="365760" y="1417320"/>
+            <a:ext cx="73152" cy="777240"/>
+          </a:xfrm>
+          <a:prstGeom prst="rect">
+            <a:avLst/>
+          </a:prstGeom>
+          <a:solidFill>
+            <a:srgbClr val="D97706"/>
+          </a:solidFill>
+          <a:ln w="12700">
+            <a:solidFill>
+              <a:srgbClr val="D97706"/>
+            </a:solidFill>
+            <a:prstDash val="solid"/>
+          </a:ln>
+        </p:spPr>
+      </p:sp>
+      <p:sp>
+        <p:nvSpPr>
+          <p:cNvPr id="6" name="Text 4"/>
+          <p:cNvSpPr/>
+          <p:nvPr/>
+        </p:nvSpPr>
+        <p:spPr>
+          <a:xfrm>
+            <a:off x="640080" y="1417320"/>
+            <a:ext cx="8046720" cy="777240"/>
+          </a:xfrm>
+          <a:prstGeom prst="rect">
+            <a:avLst/>
+          </a:prstGeom>
+          <a:noFill/>
+          <a:ln/>
+        </p:spPr>
+        <p:txBody>
+          <a:bodyPr wrap="square" lIns="0" tIns="0" rIns="0" bIns="0" rtlCol="0" anchor="ctr"/>
+          <a:lstStyle/>
+          <a:p>
+            <a:pPr indent="0" marL="0">
+              <a:buNone/>
+            </a:pPr>
+            <a:r>
+              <a:rPr lang="en-US" sz="1400" b="1" dirty="0">
+                <a:solidFill>
+                  <a:srgbClr val="0B1B2B"/>
+                </a:solidFill>
+                <a:latin typeface="Hiragino Sans" pitchFamily="34" charset="0"/>
+                <a:ea typeface="Hiragino Sans" pitchFamily="34" charset="-122"/>
+                <a:cs typeface="Hiragino Sans" pitchFamily="34" charset="-120"/>
+              </a:rPr>
+              <a:t>発話から投稿まで数十秒かかり、即答は MVP では未達。後追いの補足にとどまっている。</a:t>
+            </a:r>
+            <a:endParaRPr lang="en-US" sz="1400" dirty="0"/>
+          </a:p>
+        </p:txBody>
+      </p:sp>
+      <p:sp>
+        <p:nvSpPr>
+          <p:cNvPr id="7" name="Shape 5"/>
+          <p:cNvSpPr/>
+          <p:nvPr/>
+        </p:nvSpPr>
+        <p:spPr>
+          <a:xfrm>
+            <a:off x="365760" y="2423160"/>
+            <a:ext cx="4114800" cy="2103120"/>
+          </a:xfrm>
+          <a:prstGeom prst="rect">
+            <a:avLst/>
+          </a:prstGeom>
+          <a:solidFill>
+            <a:srgbClr val="FFFFFF"/>
+          </a:solidFill>
+          <a:ln w="12700">
+            <a:solidFill>
+              <a:srgbClr val="D6E6F0"/>
+            </a:solidFill>
+            <a:prstDash val="solid"/>
+          </a:ln>
+        </p:spPr>
+      </p:sp>
+      <p:sp>
+        <p:nvSpPr>
+          <p:cNvPr id="8" name="Text 6"/>
+          <p:cNvSpPr/>
+          <p:nvPr/>
+        </p:nvSpPr>
+        <p:spPr>
+          <a:xfrm>
+            <a:off x="640080" y="2606040"/>
+            <a:ext cx="3749040" cy="320040"/>
+          </a:xfrm>
+          <a:prstGeom prst="rect">
+            <a:avLst/>
+          </a:prstGeom>
+          <a:noFill/>
+          <a:ln/>
+        </p:spPr>
+        <p:txBody>
+          <a:bodyPr wrap="square" lIns="0" tIns="0" rIns="0" bIns="0" rtlCol="0" anchor="ctr"/>
+          <a:lstStyle/>
+          <a:p>
+            <a:pPr indent="0" marL="0">
+              <a:buNone/>
+            </a:pPr>
+            <a:r>
+              <a:rPr lang="en-US" sz="1200" b="1" dirty="0">
+                <a:solidFill>
+                  <a:srgbClr val="D97706"/>
+                </a:solidFill>
+                <a:latin typeface="Helvetica Neue" pitchFamily="34" charset="0"/>
+                <a:ea typeface="Helvetica Neue" pitchFamily="34" charset="-122"/>
+                <a:cs typeface="Helvetica Neue" pitchFamily="34" charset="-120"/>
+              </a:rPr>
+              <a:t>原因</a:t>
+            </a:r>
+            <a:endParaRPr lang="en-US" sz="1200" dirty="0"/>
+          </a:p>
+        </p:txBody>
+      </p:sp>
+      <p:sp>
+        <p:nvSpPr>
+          <p:cNvPr id="9" name="Text 7"/>
+          <p:cNvSpPr/>
+          <p:nvPr/>
+        </p:nvSpPr>
+        <p:spPr>
+          <a:xfrm>
+            <a:off x="640080" y="2971800"/>
+            <a:ext cx="3749040" cy="1463040"/>
+          </a:xfrm>
+          <a:prstGeom prst="rect">
+            <a:avLst/>
+          </a:prstGeom>
+          <a:noFill/>
+          <a:ln/>
+        </p:spPr>
+        <p:txBody>
+          <a:bodyPr wrap="square" rtlCol="0" anchor="t"/>
+          <a:lstStyle/>
+          <a:p>
+            <a:pPr marL="342900" indent="-342900">
+              <a:spcAft>
+                <a:spcPts val="1000"/>
+              </a:spcAft>
+              <a:buSzPct val="100000"/>
+              <a:buChar char="•"/>
+            </a:pPr>
+            <a:r>
+              <a:rPr lang="en-US" sz="1200" dirty="0">
+                <a:solidFill>
+                  <a:srgbClr val="0B1B2B"/>
+                </a:solidFill>
+                <a:latin typeface="Hiragino Sans" pitchFamily="34" charset="0"/>
+                <a:ea typeface="Hiragino Sans" pitchFamily="34" charset="-122"/>
+                <a:cs typeface="Hiragino Sans" pitchFamily="34" charset="-120"/>
+              </a:rPr>
+              <a:t>Recall.ai の日本語 STT は精度モード固定 (prioritize_accuracy)</a:t>
+            </a:r>
+            <a:endParaRPr lang="en-US" sz="1200" dirty="0"/>
+          </a:p>
+          <a:p>
+            <a:pPr marL="342900" indent="-342900">
+              <a:spcAft>
+                <a:spcPts val="1000"/>
+              </a:spcAft>
+              <a:buSzPct val="100000"/>
+              <a:buChar char="•"/>
+            </a:pPr>
+            <a:r>
+              <a:rPr lang="en-US" sz="1200" dirty="0">
+                <a:solidFill>
+                  <a:srgbClr val="0B1B2B"/>
+                </a:solidFill>
+                <a:latin typeface="Hiragino Sans" pitchFamily="34" charset="0"/>
+                <a:ea typeface="Hiragino Sans" pitchFamily="34" charset="-122"/>
+                <a:cs typeface="Hiragino Sans" pitchFamily="34" charset="-120"/>
+              </a:rPr>
+              <a:t>発話塊が一区切りつくまで貯めてから返すため、STT だけで十数〜数十秒</a:t>
+            </a:r>
+            <a:endParaRPr lang="en-US" sz="1200" dirty="0"/>
+          </a:p>
+          <a:p>
+            <a:pPr marL="342900" indent="-342900">
+              <a:buSzPct val="100000"/>
+              <a:buChar char="•"/>
+            </a:pPr>
+            <a:r>
+              <a:rPr lang="en-US" sz="1200" dirty="0">
+                <a:solidFill>
+                  <a:srgbClr val="0B1B2B"/>
+                </a:solidFill>
+                <a:latin typeface="Hiragino Sans" pitchFamily="34" charset="0"/>
+                <a:ea typeface="Hiragino Sans" pitchFamily="34" charset="-122"/>
+                <a:cs typeface="Hiragino Sans" pitchFamily="34" charset="-120"/>
+              </a:rPr>
+              <a:t>日本語では prioritize_low_latency が選べない (英語専用)</a:t>
+            </a:r>
+            <a:endParaRPr lang="en-US" sz="1200" dirty="0"/>
+          </a:p>
+        </p:txBody>
+      </p:sp>
+      <p:sp>
+        <p:nvSpPr>
+          <p:cNvPr id="10" name="Shape 8"/>
+          <p:cNvSpPr/>
+          <p:nvPr/>
+        </p:nvSpPr>
+        <p:spPr>
+          <a:xfrm>
+            <a:off x="4663440" y="2423160"/>
+            <a:ext cx="4114800" cy="2103120"/>
+          </a:xfrm>
+          <a:prstGeom prst="rect">
+            <a:avLst/>
+          </a:prstGeom>
+          <a:solidFill>
+            <a:srgbClr val="FFFFFF"/>
+          </a:solidFill>
+          <a:ln w="12700">
+            <a:solidFill>
+              <a:srgbClr val="D6E6F0"/>
+            </a:solidFill>
+            <a:prstDash val="solid"/>
+          </a:ln>
+        </p:spPr>
+      </p:sp>
+      <p:sp>
+        <p:nvSpPr>
+          <p:cNvPr id="11" name="Text 9"/>
+          <p:cNvSpPr/>
+          <p:nvPr/>
+        </p:nvSpPr>
+        <p:spPr>
+          <a:xfrm>
+            <a:off x="4937760" y="2606040"/>
+            <a:ext cx="3749040" cy="320040"/>
+          </a:xfrm>
+          <a:prstGeom prst="rect">
+            <a:avLst/>
+          </a:prstGeom>
+          <a:noFill/>
+          <a:ln/>
+        </p:spPr>
+        <p:txBody>
+          <a:bodyPr wrap="square" lIns="0" tIns="0" rIns="0" bIns="0" rtlCol="0" anchor="ctr"/>
+          <a:lstStyle/>
+          <a:p>
+            <a:pPr indent="0" marL="0">
+              <a:buNone/>
+            </a:pPr>
+            <a:r>
+              <a:rPr lang="en-US" sz="1200" b="1" dirty="0">
+                <a:solidFill>
+                  <a:srgbClr val="065A82"/>
+                </a:solidFill>
+                <a:latin typeface="Helvetica Neue" pitchFamily="34" charset="0"/>
+                <a:ea typeface="Helvetica Neue" pitchFamily="34" charset="-122"/>
+                <a:cs typeface="Helvetica Neue" pitchFamily="34" charset="-120"/>
+              </a:rPr>
+              <a:t>残課題</a:t>
+            </a:r>
+            <a:endParaRPr lang="en-US" sz="1200" dirty="0"/>
+          </a:p>
+        </p:txBody>
+      </p:sp>
+      <p:sp>
+        <p:nvSpPr>
+          <p:cNvPr id="12" name="Text 10"/>
+          <p:cNvSpPr/>
+          <p:nvPr/>
+        </p:nvSpPr>
+        <p:spPr>
+          <a:xfrm>
+            <a:off x="4937760" y="2971800"/>
+            <a:ext cx="3749040" cy="1463040"/>
+          </a:xfrm>
+          <a:prstGeom prst="rect">
+            <a:avLst/>
+          </a:prstGeom>
+          <a:noFill/>
+          <a:ln/>
+        </p:spPr>
+        <p:txBody>
+          <a:bodyPr wrap="square" rtlCol="0" anchor="t"/>
+          <a:lstStyle/>
+          <a:p>
+            <a:pPr marL="342900" indent="-342900">
+              <a:spcAft>
+                <a:spcPts val="1000"/>
+              </a:spcAft>
+              <a:buSzPct val="100000"/>
+              <a:buChar char="•"/>
+            </a:pPr>
+            <a:r>
+              <a:rPr lang="en-US" sz="1200" dirty="0">
+                <a:solidFill>
+                  <a:srgbClr val="0B1B2B"/>
+                </a:solidFill>
+                <a:latin typeface="Hiragino Sans" pitchFamily="34" charset="0"/>
+                <a:ea typeface="Hiragino Sans" pitchFamily="34" charset="-122"/>
+                <a:cs typeface="Hiragino Sans" pitchFamily="34" charset="-120"/>
+              </a:rPr>
+              <a:t>Recall.ai を外し、低遅延な STT に置き換える検証</a:t>
+            </a:r>
+            <a:endParaRPr lang="en-US" sz="1200" dirty="0"/>
+          </a:p>
+          <a:p>
+            <a:pPr marL="342900" indent="-342900">
+              <a:buSzPct val="100000"/>
+              <a:buChar char="•"/>
+            </a:pPr>
+            <a:r>
+              <a:rPr lang="en-US" sz="1200" dirty="0">
+                <a:solidFill>
+                  <a:srgbClr val="0B1B2B"/>
+                </a:solidFill>
+                <a:latin typeface="Hiragino Sans" pitchFamily="34" charset="0"/>
+                <a:ea typeface="Hiragino Sans" pitchFamily="34" charset="-122"/>
+                <a:cs typeface="Hiragino Sans" pitchFamily="34" charset="-120"/>
+              </a:rPr>
+              <a:t>Recall.ai 単体では、現実的な Teams 音声取得と即答が両立しない</a:t>
+            </a:r>
+            <a:endParaRPr lang="en-US" sz="1200" dirty="0"/>
+          </a:p>
+        </p:txBody>
+      </p:sp>
+      <p:sp>
+        <p:nvSpPr>
+          <p:cNvPr id="13" name="Text 11"/>
+          <p:cNvSpPr/>
+          <p:nvPr/>
+        </p:nvSpPr>
+        <p:spPr>
+          <a:xfrm>
+            <a:off x="365760" y="4800600"/>
+            <a:ext cx="5486400" cy="274320"/>
+          </a:xfrm>
+          <a:prstGeom prst="rect">
+            <a:avLst/>
+          </a:prstGeom>
+          <a:noFill/>
+          <a:ln/>
+        </p:spPr>
+        <p:txBody>
+          <a:bodyPr wrap="square" lIns="0" tIns="0" rIns="0" bIns="0" rtlCol="0" anchor="ctr"/>
+          <a:lstStyle/>
+          <a:p>
+            <a:pPr indent="0" marL="0">
+              <a:buNone/>
+            </a:pPr>
+            <a:r>
+              <a:rPr lang="en-US" sz="900" b="1" dirty="0">
+                <a:solidFill>
+                  <a:srgbClr val="55667A"/>
+                </a:solidFill>
+                <a:latin typeface="Helvetica Neue" pitchFamily="34" charset="0"/>
+                <a:ea typeface="Helvetica Neue" pitchFamily="34" charset="-122"/>
+                <a:cs typeface="Helvetica Neue" pitchFamily="34" charset="-120"/>
+              </a:rPr>
+              <a:t>MOCHI-kiki</a:t>
+            </a:r>
+            <a:pPr indent="0" marL="0">
+              <a:buNone/>
+            </a:pPr>
+            <a:r>
+              <a:rPr lang="en-US" sz="900" dirty="0">
+                <a:solidFill>
+                  <a:srgbClr val="55667A"/>
+                </a:solidFill>
+                <a:latin typeface="Helvetica Neue" pitchFamily="34" charset="0"/>
+                <a:ea typeface="Helvetica Neue" pitchFamily="34" charset="-122"/>
+                <a:cs typeface="Helvetica Neue" pitchFamily="34" charset="-120"/>
+              </a:rPr>
+              <a:t>  /  Microsoft Agent Hackathon 2026</a:t>
+            </a:r>
+            <a:endParaRPr lang="en-US" sz="900" dirty="0"/>
+          </a:p>
+        </p:txBody>
+      </p:sp>
+      <p:sp>
+        <p:nvSpPr>
+          <p:cNvPr id="14" name="Text 12"/>
+          <p:cNvSpPr/>
+          <p:nvPr/>
+        </p:nvSpPr>
+        <p:spPr>
+          <a:xfrm>
+            <a:off x="8229600" y="4800600"/>
+            <a:ext cx="548640" cy="274320"/>
+          </a:xfrm>
+          <a:prstGeom prst="rect">
+            <a:avLst/>
+          </a:prstGeom>
+          <a:noFill/>
+          <a:ln/>
+        </p:spPr>
+        <p:txBody>
+          <a:bodyPr wrap="square" lIns="0" tIns="0" rIns="0" bIns="0" rtlCol="0" anchor="ctr"/>
+          <a:lstStyle/>
+          <a:p>
+            <a:pPr algn="r" indent="0" marL="0">
+              <a:buNone/>
+            </a:pPr>
+            <a:r>
+              <a:rPr lang="en-US" sz="900" dirty="0">
+                <a:solidFill>
+                  <a:srgbClr val="55667A"/>
+                </a:solidFill>
+                <a:latin typeface="Helvetica Neue" pitchFamily="34" charset="0"/>
+                <a:ea typeface="Helvetica Neue" pitchFamily="34" charset="-122"/>
+                <a:cs typeface="Helvetica Neue" pitchFamily="34" charset="-120"/>
+              </a:rPr>
+              <a:t>12 / 14</a:t>
+            </a:r>
+            <a:endParaRPr lang="en-US" sz="900" dirty="0"/>
+          </a:p>
+        </p:txBody>
+      </p:sp>
+    </p:spTree>
+  </p:cSld>
+  <p:clrMapOvr>
+    <a:masterClrMapping/>
+  </p:clrMapOvr>
+</p:sld>
+</file>
+
+<file path=ppt/slides/slide13.xml><?xml version="1.0" encoding="utf-8"?>
+<p:sld xmlns:a="http://schemas.openxmlformats.org/drawingml/2006/main" xmlns:r="http://schemas.openxmlformats.org/officeDocument/2006/relationships" xmlns:p="http://schemas.openxmlformats.org/presentationml/2006/main">
+  <p:cSld name="Slide 13">
+    <p:bg>
+      <p:bgPr>
+        <a:solidFill>
+          <a:srgbClr val="F6F8FA"/>
+        </a:solidFill>
+      </p:bgPr>
+    </p:bg>
+    <p:spTree>
+      <p:nvGrpSpPr>
+        <p:cNvPr id="1" name=""/>
+        <p:cNvGrpSpPr/>
+        <p:nvPr/>
+      </p:nvGrpSpPr>
+      <p:grpSpPr>
+        <a:xfrm>
+          <a:off x="0" y="0"/>
+          <a:ext cx="0" cy="0"/>
+          <a:chOff x="0" y="0"/>
+          <a:chExt cx="0" cy="0"/>
+        </a:xfrm>
+      </p:grpSpPr>
+      <p:sp>
+        <p:nvSpPr>
+          <p:cNvPr id="2" name="Text 0"/>
+          <p:cNvSpPr/>
+          <p:nvPr/>
+        </p:nvSpPr>
+        <p:spPr>
+          <a:xfrm>
+            <a:off x="365760" y="274320"/>
+            <a:ext cx="5486400" cy="274320"/>
+          </a:xfrm>
+          <a:prstGeom prst="rect">
+            <a:avLst/>
+          </a:prstGeom>
+          <a:noFill/>
+          <a:ln/>
+        </p:spPr>
+        <p:txBody>
+          <a:bodyPr wrap="square" lIns="0" tIns="0" rIns="0" bIns="0" rtlCol="0" anchor="ctr"/>
+          <a:lstStyle/>
+          <a:p>
+            <a:pPr indent="0" marL="0">
+              <a:buNone/>
+            </a:pPr>
+            <a:r>
+              <a:rPr lang="en-US" sz="1100" b="1" spc="400" kern="0" dirty="0">
+                <a:solidFill>
+                  <a:srgbClr val="065A82"/>
+                </a:solidFill>
+                <a:latin typeface="Helvetica Neue" pitchFamily="34" charset="0"/>
+                <a:ea typeface="Helvetica Neue" pitchFamily="34" charset="-122"/>
+                <a:cs typeface="Helvetica Neue" pitchFamily="34" charset="-120"/>
+              </a:rPr>
+              <a:t>07  /  STACK</a:t>
+            </a:r>
+            <a:endParaRPr lang="en-US" sz="1100" dirty="0"/>
+          </a:p>
+        </p:txBody>
+      </p:sp>
+      <p:sp>
+        <p:nvSpPr>
+          <p:cNvPr id="3" name="Text 1"/>
+          <p:cNvSpPr/>
+          <p:nvPr/>
+        </p:nvSpPr>
+        <p:spPr>
+          <a:xfrm>
+            <a:off x="365760" y="685800"/>
+            <a:ext cx="8412480" cy="640080"/>
+          </a:xfrm>
+          <a:prstGeom prst="rect">
+            <a:avLst/>
+          </a:prstGeom>
+          <a:noFill/>
+          <a:ln/>
+        </p:spPr>
+        <p:txBody>
+          <a:bodyPr wrap="square" lIns="0" tIns="0" rIns="0" bIns="0" rtlCol="0" anchor="ctr"/>
+          <a:lstStyle/>
+          <a:p>
+            <a:pPr indent="0" marL="0">
+              <a:buNone/>
+            </a:pPr>
+            <a:r>
+              <a:rPr lang="en-US" sz="3000" b="1" dirty="0">
+                <a:solidFill>
+                  <a:srgbClr val="0B1B2B"/>
+                </a:solidFill>
+                <a:latin typeface="Hiragino Sans" pitchFamily="34" charset="0"/>
+                <a:ea typeface="Hiragino Sans" pitchFamily="34" charset="-122"/>
+                <a:cs typeface="Hiragino Sans" pitchFamily="34" charset="-120"/>
+              </a:rPr>
+              <a:t>使用した Microsoft 技術</a:t>
+            </a:r>
+            <a:endParaRPr lang="en-US" sz="3000" dirty="0"/>
+          </a:p>
+        </p:txBody>
+      </p:sp>
+      <p:sp>
+        <p:nvSpPr>
+          <p:cNvPr id="4" name="Shape 2"/>
+          <p:cNvSpPr/>
+          <p:nvPr/>
+        </p:nvSpPr>
+        <p:spPr>
+          <a:xfrm>
+            <a:off x="365760" y="1417320"/>
+            <a:ext cx="4160520" cy="685800"/>
+          </a:xfrm>
+          <a:prstGeom prst="rect">
+            <a:avLst/>
+          </a:prstGeom>
+          <a:solidFill>
+            <a:srgbClr val="FFFFFF"/>
+          </a:solidFill>
+          <a:ln w="12700">
+            <a:solidFill>
+              <a:srgbClr val="D6E6F0"/>
+            </a:solidFill>
+            <a:prstDash val="solid"/>
+          </a:ln>
+        </p:spPr>
+      </p:sp>
+      <p:sp>
+        <p:nvSpPr>
+          <p:cNvPr id="5" name="Shape 3"/>
+          <p:cNvSpPr/>
+          <p:nvPr/>
+        </p:nvSpPr>
+        <p:spPr>
+          <a:xfrm>
+            <a:off x="365760" y="1417320"/>
+            <a:ext cx="73152" cy="685800"/>
+          </a:xfrm>
+          <a:prstGeom prst="rect">
+            <a:avLst/>
+          </a:prstGeom>
+          <a:solidFill>
+            <a:srgbClr val="065A82"/>
+          </a:solidFill>
+          <a:ln w="12700">
+            <a:solidFill>
+              <a:srgbClr val="065A82"/>
+            </a:solidFill>
+            <a:prstDash val="solid"/>
+          </a:ln>
+        </p:spPr>
+      </p:sp>
+      <p:sp>
+        <p:nvSpPr>
+          <p:cNvPr id="6" name="Text 4"/>
+          <p:cNvSpPr/>
+          <p:nvPr/>
+        </p:nvSpPr>
+        <p:spPr>
+          <a:xfrm>
+            <a:off x="548640" y="1490472"/>
+            <a:ext cx="3886200" cy="320040"/>
+          </a:xfrm>
+          <a:prstGeom prst="rect">
+            <a:avLst/>
+          </a:prstGeom>
+          <a:noFill/>
+          <a:ln/>
+        </p:spPr>
+        <p:txBody>
+          <a:bodyPr wrap="square" lIns="0" tIns="0" rIns="0" bIns="0" rtlCol="0" anchor="ctr"/>
+          <a:lstStyle/>
+          <a:p>
+            <a:pPr indent="0" marL="0">
+              <a:buNone/>
+            </a:pPr>
+            <a:r>
+              <a:rPr lang="en-US" sz="1300" b="1" dirty="0">
+                <a:solidFill>
+                  <a:srgbClr val="0B1B2B"/>
+                </a:solidFill>
+                <a:latin typeface="Helvetica Neue" pitchFamily="34" charset="0"/>
+                <a:ea typeface="Helvetica Neue" pitchFamily="34" charset="-122"/>
+                <a:cs typeface="Helvetica Neue" pitchFamily="34" charset="-120"/>
+              </a:rPr>
+              <a:t>Azure Container Apps</a:t>
+            </a:r>
+            <a:endParaRPr lang="en-US" sz="1300" dirty="0"/>
+          </a:p>
+        </p:txBody>
+      </p:sp>
+      <p:sp>
+        <p:nvSpPr>
+          <p:cNvPr id="7" name="Text 5"/>
+          <p:cNvSpPr/>
+          <p:nvPr/>
+        </p:nvSpPr>
+        <p:spPr>
+          <a:xfrm>
+            <a:off x="548640" y="1801368"/>
+            <a:ext cx="3886200" cy="274320"/>
+          </a:xfrm>
+          <a:prstGeom prst="rect">
+            <a:avLst/>
+          </a:prstGeom>
+          <a:noFill/>
+          <a:ln/>
+        </p:spPr>
+        <p:txBody>
+          <a:bodyPr wrap="square" lIns="0" tIns="0" rIns="0" bIns="0" rtlCol="0" anchor="ctr"/>
+          <a:lstStyle/>
+          <a:p>
+            <a:pPr indent="0" marL="0">
+              <a:buNone/>
+            </a:pPr>
+            <a:r>
+              <a:rPr lang="en-US" sz="1100" dirty="0">
+                <a:solidFill>
+                  <a:srgbClr val="55667A"/>
+                </a:solidFill>
+                <a:latin typeface="Hiragino Sans" pitchFamily="34" charset="0"/>
+                <a:ea typeface="Hiragino Sans" pitchFamily="34" charset="-122"/>
+                <a:cs typeface="Hiragino Sans" pitchFamily="34" charset="-120"/>
+              </a:rPr>
+              <a:t>Bot プロセス実行基盤 (必須要件 ①)</a:t>
+            </a:r>
+            <a:endParaRPr lang="en-US" sz="1100" dirty="0"/>
+          </a:p>
+        </p:txBody>
+      </p:sp>
+      <p:sp>
+        <p:nvSpPr>
+          <p:cNvPr id="8" name="Shape 6"/>
+          <p:cNvSpPr/>
+          <p:nvPr/>
+        </p:nvSpPr>
+        <p:spPr>
+          <a:xfrm>
+            <a:off x="4617720" y="1417320"/>
+            <a:ext cx="4160520" cy="685800"/>
+          </a:xfrm>
+          <a:prstGeom prst="rect">
+            <a:avLst/>
+          </a:prstGeom>
+          <a:solidFill>
+            <a:srgbClr val="FFFFFF"/>
+          </a:solidFill>
+          <a:ln w="12700">
+            <a:solidFill>
+              <a:srgbClr val="D6E6F0"/>
+            </a:solidFill>
+            <a:prstDash val="solid"/>
+          </a:ln>
+        </p:spPr>
+      </p:sp>
+      <p:sp>
+        <p:nvSpPr>
+          <p:cNvPr id="9" name="Shape 7"/>
+          <p:cNvSpPr/>
+          <p:nvPr/>
+        </p:nvSpPr>
+        <p:spPr>
+          <a:xfrm>
+            <a:off x="4617720" y="1417320"/>
+            <a:ext cx="73152" cy="685800"/>
+          </a:xfrm>
+          <a:prstGeom prst="rect">
+            <a:avLst/>
+          </a:prstGeom>
+          <a:solidFill>
+            <a:srgbClr val="065A82"/>
+          </a:solidFill>
+          <a:ln w="12700">
+            <a:solidFill>
+              <a:srgbClr val="065A82"/>
+            </a:solidFill>
+            <a:prstDash val="solid"/>
+          </a:ln>
+        </p:spPr>
+      </p:sp>
+      <p:sp>
+        <p:nvSpPr>
+          <p:cNvPr id="10" name="Text 8"/>
+          <p:cNvSpPr/>
+          <p:nvPr/>
+        </p:nvSpPr>
+        <p:spPr>
+          <a:xfrm>
+            <a:off x="4800600" y="1490472"/>
+            <a:ext cx="3886200" cy="320040"/>
+          </a:xfrm>
+          <a:prstGeom prst="rect">
+            <a:avLst/>
+          </a:prstGeom>
+          <a:noFill/>
+          <a:ln/>
+        </p:spPr>
+        <p:txBody>
+          <a:bodyPr wrap="square" lIns="0" tIns="0" rIns="0" bIns="0" rtlCol="0" anchor="ctr"/>
+          <a:lstStyle/>
+          <a:p>
+            <a:pPr indent="0" marL="0">
+              <a:buNone/>
+            </a:pPr>
+            <a:r>
+              <a:rPr lang="en-US" sz="1300" b="1" dirty="0">
+                <a:solidFill>
+                  <a:srgbClr val="0B1B2B"/>
+                </a:solidFill>
+                <a:latin typeface="Helvetica Neue" pitchFamily="34" charset="0"/>
+                <a:ea typeface="Helvetica Neue" pitchFamily="34" charset="-122"/>
+                <a:cs typeface="Helvetica Neue" pitchFamily="34" charset="-120"/>
+              </a:rPr>
+              <a:t>Azure OpenAI</a:t>
+            </a:r>
+            <a:endParaRPr lang="en-US" sz="1300" dirty="0"/>
+          </a:p>
+        </p:txBody>
+      </p:sp>
+      <p:sp>
+        <p:nvSpPr>
+          <p:cNvPr id="11" name="Text 9"/>
+          <p:cNvSpPr/>
+          <p:nvPr/>
+        </p:nvSpPr>
+        <p:spPr>
+          <a:xfrm>
+            <a:off x="4800600" y="1801368"/>
+            <a:ext cx="3886200" cy="274320"/>
+          </a:xfrm>
+          <a:prstGeom prst="rect">
+            <a:avLst/>
+          </a:prstGeom>
+          <a:noFill/>
+          <a:ln/>
+        </p:spPr>
+        <p:txBody>
+          <a:bodyPr wrap="square" lIns="0" tIns="0" rIns="0" bIns="0" rtlCol="0" anchor="ctr"/>
+          <a:lstStyle/>
+          <a:p>
+            <a:pPr indent="0" marL="0">
+              <a:buNone/>
+            </a:pPr>
+            <a:r>
+              <a:rPr lang="en-US" sz="1100" dirty="0">
+                <a:solidFill>
+                  <a:srgbClr val="55667A"/>
+                </a:solidFill>
+                <a:latin typeface="Hiragino Sans" pitchFamily="34" charset="0"/>
+                <a:ea typeface="Hiragino Sans" pitchFamily="34" charset="-122"/>
+                <a:cs typeface="Hiragino Sans" pitchFamily="34" charset="-120"/>
+              </a:rPr>
+              <a:t>GPT-4o + Embedding (必須要件 ②)</a:t>
+            </a:r>
+            <a:endParaRPr lang="en-US" sz="1100" dirty="0"/>
+          </a:p>
+        </p:txBody>
+      </p:sp>
+      <p:sp>
+        <p:nvSpPr>
+          <p:cNvPr id="12" name="Shape 10"/>
+          <p:cNvSpPr/>
+          <p:nvPr/>
+        </p:nvSpPr>
+        <p:spPr>
+          <a:xfrm>
+            <a:off x="365760" y="2194560"/>
+            <a:ext cx="4160520" cy="685800"/>
+          </a:xfrm>
+          <a:prstGeom prst="rect">
+            <a:avLst/>
+          </a:prstGeom>
+          <a:solidFill>
+            <a:srgbClr val="FFFFFF"/>
+          </a:solidFill>
+          <a:ln w="12700">
+            <a:solidFill>
+              <a:srgbClr val="D6E6F0"/>
+            </a:solidFill>
+            <a:prstDash val="solid"/>
+          </a:ln>
+        </p:spPr>
+      </p:sp>
+      <p:sp>
+        <p:nvSpPr>
+          <p:cNvPr id="13" name="Shape 11"/>
+          <p:cNvSpPr/>
+          <p:nvPr/>
+        </p:nvSpPr>
+        <p:spPr>
+          <a:xfrm>
+            <a:off x="365760" y="2194560"/>
+            <a:ext cx="73152" cy="685800"/>
+          </a:xfrm>
+          <a:prstGeom prst="rect">
+            <a:avLst/>
+          </a:prstGeom>
+          <a:solidFill>
+            <a:srgbClr val="065A82"/>
+          </a:solidFill>
+          <a:ln w="12700">
+            <a:solidFill>
+              <a:srgbClr val="065A82"/>
+            </a:solidFill>
+            <a:prstDash val="solid"/>
+          </a:ln>
+        </p:spPr>
+      </p:sp>
+      <p:sp>
+        <p:nvSpPr>
+          <p:cNvPr id="14" name="Text 12"/>
+          <p:cNvSpPr/>
+          <p:nvPr/>
+        </p:nvSpPr>
+        <p:spPr>
+          <a:xfrm>
+            <a:off x="548640" y="2267712"/>
+            <a:ext cx="3886200" cy="320040"/>
+          </a:xfrm>
+          <a:prstGeom prst="rect">
+            <a:avLst/>
+          </a:prstGeom>
+          <a:noFill/>
+          <a:ln/>
+        </p:spPr>
+        <p:txBody>
+          <a:bodyPr wrap="square" lIns="0" tIns="0" rIns="0" bIns="0" rtlCol="0" anchor="ctr"/>
+          <a:lstStyle/>
+          <a:p>
+            <a:pPr indent="0" marL="0">
+              <a:buNone/>
+            </a:pPr>
+            <a:r>
+              <a:rPr lang="en-US" sz="1300" b="1" dirty="0">
+                <a:solidFill>
+                  <a:srgbClr val="0B1B2B"/>
+                </a:solidFill>
+                <a:latin typeface="Helvetica Neue" pitchFamily="34" charset="0"/>
+                <a:ea typeface="Helvetica Neue" pitchFamily="34" charset="-122"/>
+                <a:cs typeface="Helvetica Neue" pitchFamily="34" charset="-120"/>
+              </a:rPr>
+              <a:t>Azure AI Search</a:t>
+            </a:r>
+            <a:endParaRPr lang="en-US" sz="1300" dirty="0"/>
+          </a:p>
+        </p:txBody>
+      </p:sp>
+      <p:sp>
+        <p:nvSpPr>
+          <p:cNvPr id="15" name="Text 13"/>
+          <p:cNvSpPr/>
+          <p:nvPr/>
+        </p:nvSpPr>
+        <p:spPr>
+          <a:xfrm>
+            <a:off x="548640" y="2578608"/>
+            <a:ext cx="3886200" cy="274320"/>
+          </a:xfrm>
+          <a:prstGeom prst="rect">
+            <a:avLst/>
+          </a:prstGeom>
+          <a:noFill/>
+          <a:ln/>
+        </p:spPr>
+        <p:txBody>
+          <a:bodyPr wrap="square" lIns="0" tIns="0" rIns="0" bIns="0" rtlCol="0" anchor="ctr"/>
+          <a:lstStyle/>
+          <a:p>
+            <a:pPr indent="0" marL="0">
+              <a:buNone/>
+            </a:pPr>
+            <a:r>
+              <a:rPr lang="en-US" sz="1100" dirty="0">
+                <a:solidFill>
+                  <a:srgbClr val="55667A"/>
+                </a:solidFill>
+                <a:latin typeface="Hiragino Sans" pitchFamily="34" charset="0"/>
+                <a:ea typeface="Hiragino Sans" pitchFamily="34" charset="-122"/>
+                <a:cs typeface="Hiragino Sans" pitchFamily="34" charset="-120"/>
+              </a:rPr>
+              <a:t>RAG ハイブリッド検索</a:t>
+            </a:r>
+            <a:endParaRPr lang="en-US" sz="1100" dirty="0"/>
+          </a:p>
+        </p:txBody>
+      </p:sp>
+      <p:sp>
+        <p:nvSpPr>
+          <p:cNvPr id="16" name="Shape 14"/>
+          <p:cNvSpPr/>
+          <p:nvPr/>
+        </p:nvSpPr>
+        <p:spPr>
+          <a:xfrm>
+            <a:off x="4617720" y="2194560"/>
+            <a:ext cx="4160520" cy="685800"/>
+          </a:xfrm>
+          <a:prstGeom prst="rect">
+            <a:avLst/>
+          </a:prstGeom>
+          <a:solidFill>
+            <a:srgbClr val="FFFFFF"/>
+          </a:solidFill>
+          <a:ln w="12700">
+            <a:solidFill>
+              <a:srgbClr val="D6E6F0"/>
+            </a:solidFill>
+            <a:prstDash val="solid"/>
+          </a:ln>
+        </p:spPr>
+      </p:sp>
+      <p:sp>
+        <p:nvSpPr>
+          <p:cNvPr id="17" name="Shape 15"/>
+          <p:cNvSpPr/>
+          <p:nvPr/>
+        </p:nvSpPr>
+        <p:spPr>
+          <a:xfrm>
+            <a:off x="4617720" y="2194560"/>
+            <a:ext cx="73152" cy="685800"/>
+          </a:xfrm>
+          <a:prstGeom prst="rect">
+            <a:avLst/>
+          </a:prstGeom>
+          <a:solidFill>
+            <a:srgbClr val="065A82"/>
+          </a:solidFill>
+          <a:ln w="12700">
+            <a:solidFill>
+              <a:srgbClr val="065A82"/>
+            </a:solidFill>
+            <a:prstDash val="solid"/>
+          </a:ln>
+        </p:spPr>
+      </p:sp>
+      <p:sp>
+        <p:nvSpPr>
+          <p:cNvPr id="18" name="Text 16"/>
+          <p:cNvSpPr/>
+          <p:nvPr/>
+        </p:nvSpPr>
+        <p:spPr>
+          <a:xfrm>
+            <a:off x="4800600" y="2267712"/>
+            <a:ext cx="3886200" cy="320040"/>
+          </a:xfrm>
+          <a:prstGeom prst="rect">
+            <a:avLst/>
+          </a:prstGeom>
+          <a:noFill/>
+          <a:ln/>
+        </p:spPr>
+        <p:txBody>
+          <a:bodyPr wrap="square" lIns="0" tIns="0" rIns="0" bIns="0" rtlCol="0" anchor="ctr"/>
+          <a:lstStyle/>
+          <a:p>
+            <a:pPr indent="0" marL="0">
+              <a:buNone/>
+            </a:pPr>
+            <a:r>
+              <a:rPr lang="en-US" sz="1300" b="1" dirty="0">
+                <a:solidFill>
+                  <a:srgbClr val="0B1B2B"/>
+                </a:solidFill>
+                <a:latin typeface="Helvetica Neue" pitchFamily="34" charset="0"/>
+                <a:ea typeface="Helvetica Neue" pitchFamily="34" charset="-122"/>
+                <a:cs typeface="Helvetica Neue" pitchFamily="34" charset="-120"/>
+              </a:rPr>
+              <a:t>Azure AI Speech</a:t>
+            </a:r>
+            <a:endParaRPr lang="en-US" sz="1300" dirty="0"/>
+          </a:p>
+        </p:txBody>
+      </p:sp>
+      <p:sp>
+        <p:nvSpPr>
+          <p:cNvPr id="19" name="Text 17"/>
+          <p:cNvSpPr/>
+          <p:nvPr/>
+        </p:nvSpPr>
+        <p:spPr>
+          <a:xfrm>
+            <a:off x="4800600" y="2578608"/>
+            <a:ext cx="3886200" cy="274320"/>
+          </a:xfrm>
+          <a:prstGeom prst="rect">
+            <a:avLst/>
+          </a:prstGeom>
+          <a:noFill/>
+          <a:ln/>
+        </p:spPr>
+        <p:txBody>
+          <a:bodyPr wrap="square" lIns="0" tIns="0" rIns="0" bIns="0" rtlCol="0" anchor="ctr"/>
+          <a:lstStyle/>
+          <a:p>
+            <a:pPr indent="0" marL="0">
+              <a:buNone/>
+            </a:pPr>
+            <a:r>
+              <a:rPr lang="en-US" sz="1100" dirty="0">
+                <a:solidFill>
+                  <a:srgbClr val="55667A"/>
+                </a:solidFill>
+                <a:latin typeface="Hiragino Sans" pitchFamily="34" charset="0"/>
+                <a:ea typeface="Hiragino Sans" pitchFamily="34" charset="-122"/>
+                <a:cs typeface="Hiragino Sans" pitchFamily="34" charset="-120"/>
+              </a:rPr>
+              <a:t>音声処理 (補助)</a:t>
+            </a:r>
+            <a:endParaRPr lang="en-US" sz="1100" dirty="0"/>
+          </a:p>
+        </p:txBody>
+      </p:sp>
+      <p:sp>
+        <p:nvSpPr>
+          <p:cNvPr id="20" name="Shape 18"/>
+          <p:cNvSpPr/>
+          <p:nvPr/>
+        </p:nvSpPr>
+        <p:spPr>
+          <a:xfrm>
+            <a:off x="365760" y="2971800"/>
+            <a:ext cx="4160520" cy="685800"/>
+          </a:xfrm>
+          <a:prstGeom prst="rect">
+            <a:avLst/>
+          </a:prstGeom>
+          <a:solidFill>
+            <a:srgbClr val="FFFFFF"/>
+          </a:solidFill>
+          <a:ln w="12700">
+            <a:solidFill>
+              <a:srgbClr val="D6E6F0"/>
+            </a:solidFill>
+            <a:prstDash val="solid"/>
+          </a:ln>
+        </p:spPr>
+      </p:sp>
+      <p:sp>
+        <p:nvSpPr>
+          <p:cNvPr id="21" name="Shape 19"/>
+          <p:cNvSpPr/>
+          <p:nvPr/>
+        </p:nvSpPr>
+        <p:spPr>
+          <a:xfrm>
+            <a:off x="365760" y="2971800"/>
+            <a:ext cx="73152" cy="685800"/>
+          </a:xfrm>
+          <a:prstGeom prst="rect">
+            <a:avLst/>
+          </a:prstGeom>
+          <a:solidFill>
+            <a:srgbClr val="065A82"/>
+          </a:solidFill>
+          <a:ln w="12700">
+            <a:solidFill>
+              <a:srgbClr val="065A82"/>
+            </a:solidFill>
+            <a:prstDash val="solid"/>
+          </a:ln>
+        </p:spPr>
+      </p:sp>
+      <p:sp>
+        <p:nvSpPr>
+          <p:cNvPr id="22" name="Text 20"/>
+          <p:cNvSpPr/>
+          <p:nvPr/>
+        </p:nvSpPr>
+        <p:spPr>
+          <a:xfrm>
+            <a:off x="548640" y="3044952"/>
+            <a:ext cx="3886200" cy="320040"/>
+          </a:xfrm>
+          <a:prstGeom prst="rect">
+            <a:avLst/>
+          </a:prstGeom>
+          <a:noFill/>
+          <a:ln/>
+        </p:spPr>
+        <p:txBody>
+          <a:bodyPr wrap="square" lIns="0" tIns="0" rIns="0" bIns="0" rtlCol="0" anchor="ctr"/>
+          <a:lstStyle/>
+          <a:p>
+            <a:pPr indent="0" marL="0">
+              <a:buNone/>
+            </a:pPr>
+            <a:r>
+              <a:rPr lang="en-US" sz="1300" b="1" dirty="0">
+                <a:solidFill>
+                  <a:srgbClr val="0B1B2B"/>
+                </a:solidFill>
+                <a:latin typeface="Helvetica Neue" pitchFamily="34" charset="0"/>
+                <a:ea typeface="Helvetica Neue" pitchFamily="34" charset="-122"/>
+                <a:cs typeface="Helvetica Neue" pitchFamily="34" charset="-120"/>
+              </a:rPr>
+              <a:t>Azure Cosmos DB</a:t>
+            </a:r>
+            <a:endParaRPr lang="en-US" sz="1300" dirty="0"/>
+          </a:p>
+        </p:txBody>
+      </p:sp>
+      <p:sp>
+        <p:nvSpPr>
+          <p:cNvPr id="23" name="Text 21"/>
+          <p:cNvSpPr/>
+          <p:nvPr/>
+        </p:nvSpPr>
+        <p:spPr>
+          <a:xfrm>
+            <a:off x="548640" y="3355848"/>
+            <a:ext cx="3886200" cy="274320"/>
+          </a:xfrm>
+          <a:prstGeom prst="rect">
+            <a:avLst/>
+          </a:prstGeom>
+          <a:noFill/>
+          <a:ln/>
+        </p:spPr>
+        <p:txBody>
+          <a:bodyPr wrap="square" lIns="0" tIns="0" rIns="0" bIns="0" rtlCol="0" anchor="ctr"/>
+          <a:lstStyle/>
+          <a:p>
+            <a:pPr indent="0" marL="0">
+              <a:buNone/>
+            </a:pPr>
+            <a:r>
+              <a:rPr lang="en-US" sz="1100" dirty="0">
+                <a:solidFill>
+                  <a:srgbClr val="55667A"/>
+                </a:solidFill>
+                <a:latin typeface="Hiragino Sans" pitchFamily="34" charset="0"/>
+                <a:ea typeface="Hiragino Sans" pitchFamily="34" charset="-122"/>
+                <a:cs typeface="Hiragino Sans" pitchFamily="34" charset="-120"/>
+              </a:rPr>
+              <a:t>セッション / 議事録の永続化 (autoscale)</a:t>
+            </a:r>
+            <a:endParaRPr lang="en-US" sz="1100" dirty="0"/>
+          </a:p>
+        </p:txBody>
+      </p:sp>
+      <p:sp>
+        <p:nvSpPr>
+          <p:cNvPr id="24" name="Shape 22"/>
+          <p:cNvSpPr/>
+          <p:nvPr/>
+        </p:nvSpPr>
+        <p:spPr>
+          <a:xfrm>
+            <a:off x="4617720" y="2971800"/>
+            <a:ext cx="4160520" cy="685800"/>
+          </a:xfrm>
+          <a:prstGeom prst="rect">
+            <a:avLst/>
+          </a:prstGeom>
+          <a:solidFill>
+            <a:srgbClr val="FFFFFF"/>
+          </a:solidFill>
+          <a:ln w="12700">
+            <a:solidFill>
+              <a:srgbClr val="D6E6F0"/>
+            </a:solidFill>
+            <a:prstDash val="solid"/>
+          </a:ln>
+        </p:spPr>
+      </p:sp>
+      <p:sp>
+        <p:nvSpPr>
+          <p:cNvPr id="25" name="Shape 23"/>
+          <p:cNvSpPr/>
+          <p:nvPr/>
+        </p:nvSpPr>
+        <p:spPr>
+          <a:xfrm>
+            <a:off x="4617720" y="2971800"/>
+            <a:ext cx="73152" cy="685800"/>
+          </a:xfrm>
+          <a:prstGeom prst="rect">
+            <a:avLst/>
+          </a:prstGeom>
+          <a:solidFill>
+            <a:srgbClr val="065A82"/>
+          </a:solidFill>
+          <a:ln w="12700">
+            <a:solidFill>
+              <a:srgbClr val="065A82"/>
+            </a:solidFill>
+            <a:prstDash val="solid"/>
+          </a:ln>
+        </p:spPr>
+      </p:sp>
+      <p:sp>
+        <p:nvSpPr>
+          <p:cNvPr id="26" name="Text 24"/>
+          <p:cNvSpPr/>
+          <p:nvPr/>
+        </p:nvSpPr>
+        <p:spPr>
+          <a:xfrm>
+            <a:off x="4800600" y="3044952"/>
+            <a:ext cx="3886200" cy="320040"/>
+          </a:xfrm>
+          <a:prstGeom prst="rect">
+            <a:avLst/>
+          </a:prstGeom>
+          <a:noFill/>
+          <a:ln/>
+        </p:spPr>
+        <p:txBody>
+          <a:bodyPr wrap="square" lIns="0" tIns="0" rIns="0" bIns="0" rtlCol="0" anchor="ctr"/>
+          <a:lstStyle/>
+          <a:p>
+            <a:pPr indent="0" marL="0">
+              <a:buNone/>
+            </a:pPr>
+            <a:r>
+              <a:rPr lang="en-US" sz="1300" b="1" dirty="0">
+                <a:solidFill>
+                  <a:srgbClr val="0B1B2B"/>
+                </a:solidFill>
+                <a:latin typeface="Helvetica Neue" pitchFamily="34" charset="0"/>
+                <a:ea typeface="Helvetica Neue" pitchFamily="34" charset="-122"/>
+                <a:cs typeface="Helvetica Neue" pitchFamily="34" charset="-120"/>
+              </a:rPr>
+              <a:t>Azure Key Vault</a:t>
+            </a:r>
+            <a:endParaRPr lang="en-US" sz="1300" dirty="0"/>
+          </a:p>
+        </p:txBody>
+      </p:sp>
+      <p:sp>
+        <p:nvSpPr>
+          <p:cNvPr id="27" name="Text 25"/>
+          <p:cNvSpPr/>
+          <p:nvPr/>
+        </p:nvSpPr>
+        <p:spPr>
+          <a:xfrm>
+            <a:off x="4800600" y="3355848"/>
+            <a:ext cx="3886200" cy="274320"/>
+          </a:xfrm>
+          <a:prstGeom prst="rect">
+            <a:avLst/>
+          </a:prstGeom>
+          <a:noFill/>
+          <a:ln/>
+        </p:spPr>
+        <p:txBody>
+          <a:bodyPr wrap="square" lIns="0" tIns="0" rIns="0" bIns="0" rtlCol="0" anchor="ctr"/>
+          <a:lstStyle/>
+          <a:p>
+            <a:pPr indent="0" marL="0">
+              <a:buNone/>
+            </a:pPr>
+            <a:r>
+              <a:rPr lang="en-US" sz="1100" dirty="0">
+                <a:solidFill>
+                  <a:srgbClr val="55667A"/>
+                </a:solidFill>
+                <a:latin typeface="Hiragino Sans" pitchFamily="34" charset="0"/>
+                <a:ea typeface="Hiragino Sans" pitchFamily="34" charset="-122"/>
+                <a:cs typeface="Hiragino Sans" pitchFamily="34" charset="-120"/>
+              </a:rPr>
+              <a:t>シークレット管理</a:t>
+            </a:r>
+            <a:endParaRPr lang="en-US" sz="1100" dirty="0"/>
+          </a:p>
+        </p:txBody>
+      </p:sp>
+      <p:sp>
+        <p:nvSpPr>
+          <p:cNvPr id="28" name="Shape 26"/>
+          <p:cNvSpPr/>
+          <p:nvPr/>
+        </p:nvSpPr>
+        <p:spPr>
+          <a:xfrm>
+            <a:off x="365760" y="3749040"/>
+            <a:ext cx="4160520" cy="685800"/>
+          </a:xfrm>
+          <a:prstGeom prst="rect">
+            <a:avLst/>
+          </a:prstGeom>
+          <a:solidFill>
+            <a:srgbClr val="FFFFFF"/>
+          </a:solidFill>
+          <a:ln w="12700">
+            <a:solidFill>
+              <a:srgbClr val="D6E6F0"/>
+            </a:solidFill>
+            <a:prstDash val="solid"/>
+          </a:ln>
+        </p:spPr>
+      </p:sp>
+      <p:sp>
+        <p:nvSpPr>
+          <p:cNvPr id="29" name="Shape 27"/>
+          <p:cNvSpPr/>
+          <p:nvPr/>
+        </p:nvSpPr>
+        <p:spPr>
+          <a:xfrm>
+            <a:off x="365760" y="3749040"/>
+            <a:ext cx="73152" cy="685800"/>
+          </a:xfrm>
+          <a:prstGeom prst="rect">
+            <a:avLst/>
+          </a:prstGeom>
+          <a:solidFill>
+            <a:srgbClr val="065A82"/>
+          </a:solidFill>
+          <a:ln w="12700">
+            <a:solidFill>
+              <a:srgbClr val="065A82"/>
+            </a:solidFill>
+            <a:prstDash val="solid"/>
+          </a:ln>
+        </p:spPr>
+      </p:sp>
+      <p:sp>
+        <p:nvSpPr>
+          <p:cNvPr id="30" name="Text 28"/>
+          <p:cNvSpPr/>
+          <p:nvPr/>
+        </p:nvSpPr>
+        <p:spPr>
+          <a:xfrm>
+            <a:off x="548640" y="3822192"/>
+            <a:ext cx="3886200" cy="320040"/>
+          </a:xfrm>
+          <a:prstGeom prst="rect">
+            <a:avLst/>
+          </a:prstGeom>
+          <a:noFill/>
+          <a:ln/>
+        </p:spPr>
+        <p:txBody>
+          <a:bodyPr wrap="square" lIns="0" tIns="0" rIns="0" bIns="0" rtlCol="0" anchor="ctr"/>
+          <a:lstStyle/>
+          <a:p>
+            <a:pPr indent="0" marL="0">
+              <a:buNone/>
+            </a:pPr>
+            <a:r>
+              <a:rPr lang="en-US" sz="1300" b="1" dirty="0">
+                <a:solidFill>
+                  <a:srgbClr val="0B1B2B"/>
+                </a:solidFill>
+                <a:latin typeface="Helvetica Neue" pitchFamily="34" charset="0"/>
+                <a:ea typeface="Helvetica Neue" pitchFamily="34" charset="-122"/>
+                <a:cs typeface="Helvetica Neue" pitchFamily="34" charset="-120"/>
+              </a:rPr>
+              <a:t>Semantic Kernel</a:t>
+            </a:r>
+            <a:endParaRPr lang="en-US" sz="1300" dirty="0"/>
+          </a:p>
+        </p:txBody>
+      </p:sp>
+      <p:sp>
+        <p:nvSpPr>
+          <p:cNvPr id="31" name="Text 29"/>
+          <p:cNvSpPr/>
+          <p:nvPr/>
+        </p:nvSpPr>
+        <p:spPr>
+          <a:xfrm>
+            <a:off x="548640" y="4133088"/>
+            <a:ext cx="3886200" cy="274320"/>
+          </a:xfrm>
+          <a:prstGeom prst="rect">
+            <a:avLst/>
+          </a:prstGeom>
+          <a:noFill/>
+          <a:ln/>
+        </p:spPr>
+        <p:txBody>
+          <a:bodyPr wrap="square" lIns="0" tIns="0" rIns="0" bIns="0" rtlCol="0" anchor="ctr"/>
+          <a:lstStyle/>
+          <a:p>
+            <a:pPr indent="0" marL="0">
+              <a:buNone/>
+            </a:pPr>
+            <a:r>
+              <a:rPr lang="en-US" sz="1100" dirty="0">
+                <a:solidFill>
+                  <a:srgbClr val="55667A"/>
+                </a:solidFill>
+                <a:latin typeface="Hiragino Sans" pitchFamily="34" charset="0"/>
+                <a:ea typeface="Hiragino Sans" pitchFamily="34" charset="-122"/>
+                <a:cs typeface="Hiragino Sans" pitchFamily="34" charset="-120"/>
+              </a:rPr>
+              <a:t>Intent / RAG / Answer プラグイン構成</a:t>
+            </a:r>
+            <a:endParaRPr lang="en-US" sz="1100" dirty="0"/>
+          </a:p>
+        </p:txBody>
+      </p:sp>
+      <p:sp>
+        <p:nvSpPr>
+          <p:cNvPr id="32" name="Shape 30"/>
+          <p:cNvSpPr/>
+          <p:nvPr/>
+        </p:nvSpPr>
+        <p:spPr>
+          <a:xfrm>
+            <a:off x="4617720" y="3749040"/>
+            <a:ext cx="4160520" cy="685800"/>
+          </a:xfrm>
+          <a:prstGeom prst="rect">
+            <a:avLst/>
+          </a:prstGeom>
+          <a:solidFill>
+            <a:srgbClr val="FFFFFF"/>
+          </a:solidFill>
+          <a:ln w="12700">
+            <a:solidFill>
+              <a:srgbClr val="D6E6F0"/>
+            </a:solidFill>
+            <a:prstDash val="solid"/>
+          </a:ln>
+        </p:spPr>
+      </p:sp>
+      <p:sp>
+        <p:nvSpPr>
+          <p:cNvPr id="33" name="Shape 31"/>
+          <p:cNvSpPr/>
+          <p:nvPr/>
+        </p:nvSpPr>
+        <p:spPr>
+          <a:xfrm>
+            <a:off x="4617720" y="3749040"/>
+            <a:ext cx="73152" cy="685800"/>
+          </a:xfrm>
+          <a:prstGeom prst="rect">
+            <a:avLst/>
+          </a:prstGeom>
+          <a:solidFill>
+            <a:srgbClr val="065A82"/>
+          </a:solidFill>
+          <a:ln w="12700">
+            <a:solidFill>
+              <a:srgbClr val="065A82"/>
+            </a:solidFill>
+            <a:prstDash val="solid"/>
+          </a:ln>
+        </p:spPr>
+      </p:sp>
+      <p:sp>
+        <p:nvSpPr>
+          <p:cNvPr id="34" name="Text 32"/>
+          <p:cNvSpPr/>
+          <p:nvPr/>
+        </p:nvSpPr>
+        <p:spPr>
+          <a:xfrm>
+            <a:off x="4800600" y="3822192"/>
+            <a:ext cx="3886200" cy="320040"/>
+          </a:xfrm>
+          <a:prstGeom prst="rect">
+            <a:avLst/>
+          </a:prstGeom>
+          <a:noFill/>
+          <a:ln/>
+        </p:spPr>
+        <p:txBody>
+          <a:bodyPr wrap="square" lIns="0" tIns="0" rIns="0" bIns="0" rtlCol="0" anchor="ctr"/>
+          <a:lstStyle/>
+          <a:p>
+            <a:pPr indent="0" marL="0">
+              <a:buNone/>
+            </a:pPr>
+            <a:r>
+              <a:rPr lang="en-US" sz="1300" b="1" dirty="0">
+                <a:solidFill>
+                  <a:srgbClr val="0B1B2B"/>
+                </a:solidFill>
+                <a:latin typeface="Helvetica Neue" pitchFamily="34" charset="0"/>
+                <a:ea typeface="Helvetica Neue" pitchFamily="34" charset="-122"/>
+                <a:cs typeface="Helvetica Neue" pitchFamily="34" charset="-120"/>
+              </a:rPr>
+              <a:t>Bot Framework + Teams</a:t>
+            </a:r>
+            <a:endParaRPr lang="en-US" sz="1300" dirty="0"/>
+          </a:p>
+        </p:txBody>
+      </p:sp>
+      <p:sp>
+        <p:nvSpPr>
+          <p:cNvPr id="35" name="Text 33"/>
+          <p:cNvSpPr/>
+          <p:nvPr/>
+        </p:nvSpPr>
+        <p:spPr>
+          <a:xfrm>
+            <a:off x="4800600" y="4133088"/>
+            <a:ext cx="3886200" cy="274320"/>
+          </a:xfrm>
+          <a:prstGeom prst="rect">
+            <a:avLst/>
+          </a:prstGeom>
+          <a:noFill/>
+          <a:ln/>
+        </p:spPr>
+        <p:txBody>
+          <a:bodyPr wrap="square" lIns="0" tIns="0" rIns="0" bIns="0" rtlCol="0" anchor="ctr"/>
+          <a:lstStyle/>
+          <a:p>
+            <a:pPr indent="0" marL="0">
+              <a:buNone/>
+            </a:pPr>
+            <a:r>
+              <a:rPr lang="en-US" sz="1100" dirty="0">
+                <a:solidFill>
+                  <a:srgbClr val="55667A"/>
+                </a:solidFill>
+                <a:latin typeface="Hiragino Sans" pitchFamily="34" charset="0"/>
+                <a:ea typeface="Hiragino Sans" pitchFamily="34" charset="-122"/>
+                <a:cs typeface="Hiragino Sans" pitchFamily="34" charset="-120"/>
+              </a:rPr>
+              <a:t>会議チャットへの proactive 投稿</a:t>
+            </a:r>
+            <a:endParaRPr lang="en-US" sz="1100" dirty="0"/>
+          </a:p>
+        </p:txBody>
+      </p:sp>
+      <p:sp>
+        <p:nvSpPr>
+          <p:cNvPr id="36" name="Text 34"/>
+          <p:cNvSpPr/>
+          <p:nvPr/>
+        </p:nvSpPr>
+        <p:spPr>
+          <a:xfrm>
+            <a:off x="365760" y="4800600"/>
+            <a:ext cx="5486400" cy="274320"/>
+          </a:xfrm>
+          <a:prstGeom prst="rect">
+            <a:avLst/>
+          </a:prstGeom>
+          <a:noFill/>
+          <a:ln/>
+        </p:spPr>
+        <p:txBody>
+          <a:bodyPr wrap="square" lIns="0" tIns="0" rIns="0" bIns="0" rtlCol="0" anchor="ctr"/>
+          <a:lstStyle/>
+          <a:p>
+            <a:pPr indent="0" marL="0">
+              <a:buNone/>
+            </a:pPr>
+            <a:r>
+              <a:rPr lang="en-US" sz="900" b="1" dirty="0">
+                <a:solidFill>
+                  <a:srgbClr val="55667A"/>
+                </a:solidFill>
+                <a:latin typeface="Helvetica Neue" pitchFamily="34" charset="0"/>
+                <a:ea typeface="Helvetica Neue" pitchFamily="34" charset="-122"/>
+                <a:cs typeface="Helvetica Neue" pitchFamily="34" charset="-120"/>
+              </a:rPr>
+              <a:t>MOCHI-kiki</a:t>
+            </a:r>
+            <a:pPr indent="0" marL="0">
+              <a:buNone/>
+            </a:pPr>
+            <a:r>
+              <a:rPr lang="en-US" sz="900" dirty="0">
+                <a:solidFill>
+                  <a:srgbClr val="55667A"/>
+                </a:solidFill>
+                <a:latin typeface="Helvetica Neue" pitchFamily="34" charset="0"/>
+                <a:ea typeface="Helvetica Neue" pitchFamily="34" charset="-122"/>
+                <a:cs typeface="Helvetica Neue" pitchFamily="34" charset="-120"/>
+              </a:rPr>
+              <a:t>  /  Microsoft Agent Hackathon 2026</a:t>
+            </a:r>
+            <a:endParaRPr lang="en-US" sz="900" dirty="0"/>
+          </a:p>
+        </p:txBody>
+      </p:sp>
+      <p:sp>
+        <p:nvSpPr>
+          <p:cNvPr id="37" name="Text 35"/>
+          <p:cNvSpPr/>
+          <p:nvPr/>
+        </p:nvSpPr>
+        <p:spPr>
+          <a:xfrm>
+            <a:off x="8229600" y="4800600"/>
+            <a:ext cx="548640" cy="274320"/>
+          </a:xfrm>
+          <a:prstGeom prst="rect">
+            <a:avLst/>
+          </a:prstGeom>
+          <a:noFill/>
+          <a:ln/>
+        </p:spPr>
+        <p:txBody>
+          <a:bodyPr wrap="square" lIns="0" tIns="0" rIns="0" bIns="0" rtlCol="0" anchor="ctr"/>
+          <a:lstStyle/>
+          <a:p>
+            <a:pPr algn="r" indent="0" marL="0">
+              <a:buNone/>
+            </a:pPr>
+            <a:r>
+              <a:rPr lang="en-US" sz="900" dirty="0">
+                <a:solidFill>
+                  <a:srgbClr val="55667A"/>
+                </a:solidFill>
+                <a:latin typeface="Helvetica Neue" pitchFamily="34" charset="0"/>
+                <a:ea typeface="Helvetica Neue" pitchFamily="34" charset="-122"/>
+                <a:cs typeface="Helvetica Neue" pitchFamily="34" charset="-120"/>
+              </a:rPr>
+              <a:t>13 / 14</a:t>
+            </a:r>
+            <a:endParaRPr lang="en-US" sz="900" dirty="0"/>
+          </a:p>
+        </p:txBody>
+      </p:sp>
+    </p:spTree>
+  </p:cSld>
+  <p:clrMapOvr>
+    <a:masterClrMapping/>
+  </p:clrMapOvr>
+</p:sld>
+</file>
+
+<file path=ppt/slides/slide14.xml><?xml version="1.0" encoding="utf-8"?>
+<p:sld xmlns:a="http://schemas.openxmlformats.org/drawingml/2006/main" xmlns:r="http://schemas.openxmlformats.org/officeDocument/2006/relationships" xmlns:p="http://schemas.openxmlformats.org/presentationml/2006/main">
+  <p:cSld name="Slide 14">
     <p:bg>
       <p:bgPr>
         <a:solidFill>
@@ -4958,7 +5659,7 @@
                 <a:ea typeface="Helvetica Neue" pitchFamily="34" charset="-122"/>
                 <a:cs typeface="Helvetica Neue" pitchFamily="34" charset="-120"/>
               </a:rPr>
-              <a:t>2 / 12</a:t>
+              <a:t>2 / 14</a:t>
             </a:r>
             <a:endParaRPr lang="en-US" sz="900" dirty="0"/>
           </a:p>
@@ -5483,7 +6184,7 @@
                 <a:ea typeface="Helvetica Neue" pitchFamily="34" charset="-122"/>
                 <a:cs typeface="Helvetica Neue" pitchFamily="34" charset="-120"/>
               </a:rPr>
-              <a:t>3 / 12</a:t>
+              <a:t>3 / 14</a:t>
             </a:r>
             <a:endParaRPr lang="en-US" sz="900" dirty="0"/>
           </a:p>
@@ -6836,7 +7537,7 @@
                 <a:ea typeface="Helvetica Neue" pitchFamily="34" charset="-122"/>
                 <a:cs typeface="Helvetica Neue" pitchFamily="34" charset="-120"/>
               </a:rPr>
-              <a:t>4 / 12</a:t>
+              <a:t>4 / 14</a:t>
             </a:r>
             <a:endParaRPr lang="en-US" sz="900" dirty="0"/>
           </a:p>
@@ -7873,7 +8574,7 @@
                 <a:ea typeface="Helvetica Neue" pitchFamily="34" charset="-122"/>
                 <a:cs typeface="Helvetica Neue" pitchFamily="34" charset="-120"/>
               </a:rPr>
-              <a:t>5 / 12</a:t>
+              <a:t>5 / 14</a:t>
             </a:r>
             <a:endParaRPr lang="en-US" sz="900" dirty="0"/>
           </a:p>
@@ -8081,7 +8782,7 @@
     <p:bg>
       <p:bgPr>
         <a:solidFill>
-          <a:srgbClr val="0A0A0A"/>
+          <a:srgbClr val="F6F8FA"/>
         </a:solidFill>
       </p:bgPr>
     </p:bg>
@@ -8101,160 +8802,233 @@
       </p:grpSpPr>
       <p:sp>
         <p:nvSpPr>
-          <p:cNvPr id="2" name="Shape 0"/>
-          <p:cNvSpPr/>
-          <p:nvPr/>
-        </p:nvSpPr>
-        <p:spPr>
-          <a:xfrm>
-            <a:off x="457200" y="365760"/>
-            <a:ext cx="8229600" cy="4023360"/>
-          </a:xfrm>
-          <a:prstGeom prst="rect">
-            <a:avLst/>
-          </a:prstGeom>
-          <a:solidFill>
-            <a:srgbClr val="1A1A1A"/>
-          </a:solidFill>
-          <a:ln w="12700">
-            <a:solidFill>
-              <a:srgbClr val="303030"/>
-            </a:solidFill>
-            <a:prstDash val="solid"/>
-          </a:ln>
-        </p:spPr>
-      </p:sp>
-      <p:sp>
-        <p:nvSpPr>
-          <p:cNvPr id="3" name="Text 1"/>
-          <p:cNvSpPr/>
-          <p:nvPr/>
-        </p:nvSpPr>
-        <p:spPr>
-          <a:xfrm>
-            <a:off x="457200" y="2011680"/>
-            <a:ext cx="8229600" cy="548640"/>
-          </a:xfrm>
-          <a:prstGeom prst="rect">
-            <a:avLst/>
-          </a:prstGeom>
-          <a:noFill/>
-          <a:ln/>
-        </p:spPr>
-        <p:txBody>
-          <a:bodyPr wrap="square" lIns="0" tIns="0" rIns="0" bIns="0" rtlCol="0" anchor="ctr"/>
-          <a:lstStyle/>
-          <a:p>
-            <a:pPr algn="ctr" indent="0" marL="0">
-              <a:buNone/>
-            </a:pPr>
-            <a:r>
-              <a:rPr lang="en-US" sz="2200" b="1" dirty="0">
-                <a:solidFill>
-                  <a:srgbClr val="8A8A8A"/>
+          <p:cNvPr id="2" name="Text 0"/>
+          <p:cNvSpPr/>
+          <p:nvPr/>
+        </p:nvSpPr>
+        <p:spPr>
+          <a:xfrm>
+            <a:off x="365760" y="274320"/>
+            <a:ext cx="5486400" cy="274320"/>
+          </a:xfrm>
+          <a:prstGeom prst="rect">
+            <a:avLst/>
+          </a:prstGeom>
+          <a:noFill/>
+          <a:ln/>
+        </p:spPr>
+        <p:txBody>
+          <a:bodyPr wrap="square" lIns="0" tIns="0" rIns="0" bIns="0" rtlCol="0" anchor="ctr"/>
+          <a:lstStyle/>
+          <a:p>
+            <a:pPr indent="0" marL="0">
+              <a:buNone/>
+            </a:pPr>
+            <a:r>
+              <a:rPr lang="en-US" sz="1100" b="1" spc="400" kern="0" dirty="0">
+                <a:solidFill>
+                  <a:srgbClr val="065A82"/>
                 </a:solidFill>
                 <a:latin typeface="Helvetica Neue" pitchFamily="34" charset="0"/>
                 <a:ea typeface="Helvetica Neue" pitchFamily="34" charset="-122"/>
                 <a:cs typeface="Helvetica Neue" pitchFamily="34" charset="-120"/>
               </a:rPr>
-              <a:t>[ 画面録画 A を差し込む ]</a:t>
-            </a:r>
-            <a:endParaRPr lang="en-US" sz="2200" dirty="0"/>
-          </a:p>
-        </p:txBody>
-      </p:sp>
-      <p:sp>
-        <p:nvSpPr>
-          <p:cNvPr id="4" name="Text 2"/>
-          <p:cNvSpPr/>
-          <p:nvPr/>
-        </p:nvSpPr>
-        <p:spPr>
-          <a:xfrm>
-            <a:off x="457200" y="2743200"/>
-            <a:ext cx="8229600" cy="914400"/>
-          </a:xfrm>
-          <a:prstGeom prst="rect">
-            <a:avLst/>
-          </a:prstGeom>
-          <a:noFill/>
-          <a:ln/>
-        </p:spPr>
-        <p:txBody>
-          <a:bodyPr wrap="square" lIns="0" tIns="0" rIns="0" bIns="0" rtlCol="0" anchor="t"/>
-          <a:lstStyle/>
-          <a:p>
-            <a:pPr algn="ctr" indent="0" marL="0">
-              <a:buNone/>
-            </a:pPr>
-            <a:r>
-              <a:rPr lang="en-US" sz="1300" dirty="0">
-                <a:solidFill>
-                  <a:srgbClr val="8A8A8A"/>
+              <a:t>DEMO A</a:t>
+            </a:r>
+            <a:endParaRPr lang="en-US" sz="1100" dirty="0"/>
+          </a:p>
+        </p:txBody>
+      </p:sp>
+      <p:sp>
+        <p:nvSpPr>
+          <p:cNvPr id="3" name="Text 1"/>
+          <p:cNvSpPr/>
+          <p:nvPr/>
+        </p:nvSpPr>
+        <p:spPr>
+          <a:xfrm>
+            <a:off x="365760" y="640080"/>
+            <a:ext cx="8412480" cy="502920"/>
+          </a:xfrm>
+          <a:prstGeom prst="rect">
+            <a:avLst/>
+          </a:prstGeom>
+          <a:noFill/>
+          <a:ln/>
+        </p:spPr>
+        <p:txBody>
+          <a:bodyPr wrap="square" lIns="0" tIns="0" rIns="0" bIns="0" rtlCol="0" anchor="ctr"/>
+          <a:lstStyle/>
+          <a:p>
+            <a:pPr indent="0" marL="0">
+              <a:buNone/>
+            </a:pPr>
+            <a:r>
+              <a:rPr lang="en-US" sz="2400" b="1" dirty="0">
+                <a:solidFill>
+                  <a:srgbClr val="0B1B2B"/>
                 </a:solidFill>
                 <a:latin typeface="Hiragino Sans" pitchFamily="34" charset="0"/>
                 <a:ea typeface="Hiragino Sans" pitchFamily="34" charset="-122"/>
                 <a:cs typeface="Hiragino Sans" pitchFamily="34" charset="-120"/>
               </a:rPr>
-              <a:t>Teams 会議 (左) + チャット欄 (右) のスプリット。発話 → 数十秒で [仕様補完] 自動投稿。</a:t>
-            </a:r>
-            <a:endParaRPr lang="en-US" sz="1300" dirty="0"/>
-          </a:p>
-          <a:p>
-            <a:pPr algn="ctr" indent="0" marL="0">
-              <a:buNone/>
-            </a:pPr>
-            <a:r>
-              <a:rPr lang="en-US" sz="1300" dirty="0">
-                <a:solidFill>
-                  <a:srgbClr val="8A8A8A"/>
+              <a:t>会議チャットへの仕様補完投稿</a:t>
+            </a:r>
+            <a:endParaRPr lang="en-US" sz="2400" dirty="0"/>
+          </a:p>
+        </p:txBody>
+      </p:sp>
+      <p:sp>
+        <p:nvSpPr>
+          <p:cNvPr id="4" name="Text 2"/>
+          <p:cNvSpPr/>
+          <p:nvPr/>
+        </p:nvSpPr>
+        <p:spPr>
+          <a:xfrm>
+            <a:off x="365760" y="1143000"/>
+            <a:ext cx="8412480" cy="274320"/>
+          </a:xfrm>
+          <a:prstGeom prst="rect">
+            <a:avLst/>
+          </a:prstGeom>
+          <a:noFill/>
+          <a:ln/>
+        </p:spPr>
+        <p:txBody>
+          <a:bodyPr wrap="square" lIns="0" tIns="0" rIns="0" bIns="0" rtlCol="0" anchor="ctr"/>
+          <a:lstStyle/>
+          <a:p>
+            <a:pPr indent="0" marL="0">
+              <a:buNone/>
+            </a:pPr>
+            <a:r>
+              <a:rPr lang="en-US" sz="1200" dirty="0">
+                <a:solidFill>
+                  <a:srgbClr val="55667A"/>
                 </a:solidFill>
                 <a:latin typeface="Hiragino Sans" pitchFamily="34" charset="0"/>
                 <a:ea typeface="Hiragino Sans" pitchFamily="34" charset="-122"/>
                 <a:cs typeface="Hiragino Sans" pitchFamily="34" charset="-120"/>
               </a:rPr>
-              <a:t>実時間 ~25 秒は 4–6x 倍速 + テロップ「実測 ~25 秒」を重ねる。</a:t>
-            </a:r>
-            <a:endParaRPr lang="en-US" sz="1300" dirty="0"/>
-          </a:p>
-        </p:txBody>
-      </p:sp>
-      <p:sp>
-        <p:nvSpPr>
-          <p:cNvPr id="5" name="Text 3"/>
-          <p:cNvSpPr/>
-          <p:nvPr/>
-        </p:nvSpPr>
-        <p:spPr>
-          <a:xfrm>
-            <a:off x="457200" y="4572000"/>
-            <a:ext cx="8229600" cy="274320"/>
-          </a:xfrm>
-          <a:prstGeom prst="rect">
-            <a:avLst/>
-          </a:prstGeom>
-          <a:noFill/>
-          <a:ln/>
-        </p:spPr>
-        <p:txBody>
-          <a:bodyPr wrap="square" lIns="0" tIns="0" rIns="0" bIns="0" rtlCol="0" anchor="ctr"/>
-          <a:lstStyle/>
-          <a:p>
-            <a:pPr algn="ctr" indent="0" marL="0">
-              <a:buNone/>
-            </a:pPr>
-            <a:r>
-              <a:rPr lang="en-US" sz="1000" dirty="0">
-                <a:solidFill>
-                  <a:srgbClr val="6A6A6A"/>
+              <a:t>実 Teams 会議に MOCHI-kiki を入れて、発話を検知 → [仕様補完] プレフィックス付きで自動投稿</a:t>
+            </a:r>
+            <a:endParaRPr lang="en-US" sz="1200" dirty="0"/>
+          </a:p>
+        </p:txBody>
+      </p:sp>
+      <p:pic>
+        <p:nvPicPr>
+          <p:cNvPr id="5" name="Image 0" descr="assets/demo-a-chat.png">    </p:cNvPr>
+          <p:cNvPicPr>
+            <a:picLocks noChangeAspect="1"/>
+          </p:cNvPicPr>
+          <p:nvPr/>
+        </p:nvPicPr>
+        <p:blipFill>
+          <a:blip r:embed="rId1"/>
+          <a:srcRect l="0" r="0" t="0" b="0"/>
+          <a:stretch/>
+        </p:blipFill>
+        <p:spPr>
+          <a:xfrm>
+            <a:off x="1719072" y="1463040"/>
+            <a:ext cx="5705856" cy="3337560"/>
+          </a:xfrm>
+          <a:prstGeom prst="rect">
+            <a:avLst/>
+          </a:prstGeom>
+        </p:spPr>
+      </p:pic>
+      <p:sp>
+        <p:nvSpPr>
+          <p:cNvPr id="6" name="Text 3"/>
+          <p:cNvSpPr/>
+          <p:nvPr/>
+        </p:nvSpPr>
+        <p:spPr>
+          <a:xfrm>
+            <a:off x="365760" y="4800600"/>
+            <a:ext cx="5486400" cy="274320"/>
+          </a:xfrm>
+          <a:prstGeom prst="rect">
+            <a:avLst/>
+          </a:prstGeom>
+          <a:noFill/>
+          <a:ln/>
+        </p:spPr>
+        <p:txBody>
+          <a:bodyPr wrap="square" lIns="0" tIns="0" rIns="0" bIns="0" rtlCol="0" anchor="ctr"/>
+          <a:lstStyle/>
+          <a:p>
+            <a:pPr indent="0" marL="0">
+              <a:buNone/>
+            </a:pPr>
+            <a:r>
+              <a:rPr lang="en-US" sz="900" b="1" dirty="0">
+                <a:solidFill>
+                  <a:srgbClr val="55667A"/>
                 </a:solidFill>
                 <a:latin typeface="Helvetica Neue" pitchFamily="34" charset="0"/>
                 <a:ea typeface="Helvetica Neue" pitchFamily="34" charset="-122"/>
                 <a:cs typeface="Helvetica Neue" pitchFamily="34" charset="-120"/>
               </a:rPr>
-              <a:t>DEMO A  /  ~40 秒</a:t>
-            </a:r>
-            <a:endParaRPr lang="en-US" sz="1000" dirty="0"/>
+              <a:t>MOCHI-kiki</a:t>
+            </a:r>
+            <a:pPr indent="0" marL="0">
+              <a:buNone/>
+            </a:pPr>
+            <a:r>
+              <a:rPr lang="en-US" sz="900" dirty="0">
+                <a:solidFill>
+                  <a:srgbClr val="55667A"/>
+                </a:solidFill>
+                <a:latin typeface="Helvetica Neue" pitchFamily="34" charset="0"/>
+                <a:ea typeface="Helvetica Neue" pitchFamily="34" charset="-122"/>
+                <a:cs typeface="Helvetica Neue" pitchFamily="34" charset="-120"/>
+              </a:rPr>
+              <a:t>  /  Microsoft Agent Hackathon 2026</a:t>
+            </a:r>
+            <a:endParaRPr lang="en-US" sz="900" dirty="0"/>
+          </a:p>
+        </p:txBody>
+      </p:sp>
+      <p:sp>
+        <p:nvSpPr>
+          <p:cNvPr id="7" name="Text 4"/>
+          <p:cNvSpPr/>
+          <p:nvPr/>
+        </p:nvSpPr>
+        <p:spPr>
+          <a:xfrm>
+            <a:off x="8229600" y="4800600"/>
+            <a:ext cx="548640" cy="274320"/>
+          </a:xfrm>
+          <a:prstGeom prst="rect">
+            <a:avLst/>
+          </a:prstGeom>
+          <a:noFill/>
+          <a:ln/>
+        </p:spPr>
+        <p:txBody>
+          <a:bodyPr wrap="square" lIns="0" tIns="0" rIns="0" bIns="0" rtlCol="0" anchor="ctr"/>
+          <a:lstStyle/>
+          <a:p>
+            <a:pPr algn="r" indent="0" marL="0">
+              <a:buNone/>
+            </a:pPr>
+            <a:r>
+              <a:rPr lang="en-US" sz="900" dirty="0">
+                <a:solidFill>
+                  <a:srgbClr val="55667A"/>
+                </a:solidFill>
+                <a:latin typeface="Helvetica Neue" pitchFamily="34" charset="0"/>
+                <a:ea typeface="Helvetica Neue" pitchFamily="34" charset="-122"/>
+                <a:cs typeface="Helvetica Neue" pitchFamily="34" charset="-120"/>
+              </a:rPr>
+              <a:t>7 / 14</a:t>
+            </a:r>
+            <a:endParaRPr lang="en-US" sz="900" dirty="0"/>
           </a:p>
         </p:txBody>
       </p:sp>
@@ -9069,7 +9843,7 @@
                 <a:ea typeface="Helvetica Neue" pitchFamily="34" charset="-122"/>
                 <a:cs typeface="Helvetica Neue" pitchFamily="34" charset="-120"/>
               </a:rPr>
-              <a:t>8 / 12</a:t>
+              <a:t>8 / 14</a:t>
             </a:r>
             <a:endParaRPr lang="en-US" sz="900" dirty="0"/>
           </a:p>
@@ -9089,7 +9863,7 @@
     <p:bg>
       <p:bgPr>
         <a:solidFill>
-          <a:srgbClr val="0A0A0A"/>
+          <a:srgbClr val="F6F8FA"/>
         </a:solidFill>
       </p:bgPr>
     </p:bg>
@@ -9109,160 +9883,233 @@
       </p:grpSpPr>
       <p:sp>
         <p:nvSpPr>
-          <p:cNvPr id="2" name="Shape 0"/>
-          <p:cNvSpPr/>
-          <p:nvPr/>
-        </p:nvSpPr>
-        <p:spPr>
-          <a:xfrm>
-            <a:off x="457200" y="365760"/>
-            <a:ext cx="8229600" cy="4023360"/>
-          </a:xfrm>
-          <a:prstGeom prst="rect">
-            <a:avLst/>
-          </a:prstGeom>
-          <a:solidFill>
-            <a:srgbClr val="1A1A1A"/>
-          </a:solidFill>
-          <a:ln w="12700">
-            <a:solidFill>
-              <a:srgbClr val="303030"/>
-            </a:solidFill>
-            <a:prstDash val="solid"/>
-          </a:ln>
-        </p:spPr>
-      </p:sp>
-      <p:sp>
-        <p:nvSpPr>
-          <p:cNvPr id="3" name="Text 1"/>
-          <p:cNvSpPr/>
-          <p:nvPr/>
-        </p:nvSpPr>
-        <p:spPr>
-          <a:xfrm>
-            <a:off x="457200" y="2011680"/>
-            <a:ext cx="8229600" cy="548640"/>
-          </a:xfrm>
-          <a:prstGeom prst="rect">
-            <a:avLst/>
-          </a:prstGeom>
-          <a:noFill/>
-          <a:ln/>
-        </p:spPr>
-        <p:txBody>
-          <a:bodyPr wrap="square" lIns="0" tIns="0" rIns="0" bIns="0" rtlCol="0" anchor="ctr"/>
-          <a:lstStyle/>
-          <a:p>
-            <a:pPr algn="ctr" indent="0" marL="0">
-              <a:buNone/>
-            </a:pPr>
-            <a:r>
-              <a:rPr lang="en-US" sz="2200" b="1" dirty="0">
-                <a:solidFill>
-                  <a:srgbClr val="8A8A8A"/>
+          <p:cNvPr id="2" name="Text 0"/>
+          <p:cNvSpPr/>
+          <p:nvPr/>
+        </p:nvSpPr>
+        <p:spPr>
+          <a:xfrm>
+            <a:off x="365760" y="274320"/>
+            <a:ext cx="5486400" cy="274320"/>
+          </a:xfrm>
+          <a:prstGeom prst="rect">
+            <a:avLst/>
+          </a:prstGeom>
+          <a:noFill/>
+          <a:ln/>
+        </p:spPr>
+        <p:txBody>
+          <a:bodyPr wrap="square" lIns="0" tIns="0" rIns="0" bIns="0" rtlCol="0" anchor="ctr"/>
+          <a:lstStyle/>
+          <a:p>
+            <a:pPr indent="0" marL="0">
+              <a:buNone/>
+            </a:pPr>
+            <a:r>
+              <a:rPr lang="en-US" sz="1100" b="1" spc="400" kern="0" dirty="0">
+                <a:solidFill>
+                  <a:srgbClr val="065A82"/>
                 </a:solidFill>
                 <a:latin typeface="Helvetica Neue" pitchFamily="34" charset="0"/>
                 <a:ea typeface="Helvetica Neue" pitchFamily="34" charset="-122"/>
                 <a:cs typeface="Helvetica Neue" pitchFamily="34" charset="-120"/>
               </a:rPr>
-              <a:t>[ 画面録画 B を差し込む ]</a:t>
-            </a:r>
-            <a:endParaRPr lang="en-US" sz="2200" dirty="0"/>
-          </a:p>
-        </p:txBody>
-      </p:sp>
-      <p:sp>
-        <p:nvSpPr>
-          <p:cNvPr id="4" name="Text 2"/>
-          <p:cNvSpPr/>
-          <p:nvPr/>
-        </p:nvSpPr>
-        <p:spPr>
-          <a:xfrm>
-            <a:off x="457200" y="2743200"/>
-            <a:ext cx="8229600" cy="914400"/>
-          </a:xfrm>
-          <a:prstGeom prst="rect">
-            <a:avLst/>
-          </a:prstGeom>
-          <a:noFill/>
-          <a:ln/>
-        </p:spPr>
-        <p:txBody>
-          <a:bodyPr wrap="square" lIns="0" tIns="0" rIns="0" bIns="0" rtlCol="0" anchor="t"/>
-          <a:lstStyle/>
-          <a:p>
-            <a:pPr algn="ctr" indent="0" marL="0">
-              <a:buNone/>
-            </a:pPr>
-            <a:r>
-              <a:rPr lang="en-US" sz="1300" dirty="0">
-                <a:solidFill>
-                  <a:srgbClr val="8A8A8A"/>
+              <a:t>DEMO B  /  1 of 3</a:t>
+            </a:r>
+            <a:endParaRPr lang="en-US" sz="1100" dirty="0"/>
+          </a:p>
+        </p:txBody>
+      </p:sp>
+      <p:sp>
+        <p:nvSpPr>
+          <p:cNvPr id="3" name="Text 1"/>
+          <p:cNvSpPr/>
+          <p:nvPr/>
+        </p:nvSpPr>
+        <p:spPr>
+          <a:xfrm>
+            <a:off x="365760" y="640080"/>
+            <a:ext cx="8412480" cy="502920"/>
+          </a:xfrm>
+          <a:prstGeom prst="rect">
+            <a:avLst/>
+          </a:prstGeom>
+          <a:noFill/>
+          <a:ln/>
+        </p:spPr>
+        <p:txBody>
+          <a:bodyPr wrap="square" lIns="0" tIns="0" rIns="0" bIns="0" rtlCol="0" anchor="ctr"/>
+          <a:lstStyle/>
+          <a:p>
+            <a:pPr indent="0" marL="0">
+              <a:buNone/>
+            </a:pPr>
+            <a:r>
+              <a:rPr lang="en-US" sz="2400" b="1" dirty="0">
+                <a:solidFill>
+                  <a:srgbClr val="0B1B2B"/>
                 </a:solidFill>
                 <a:latin typeface="Hiragino Sans" pitchFamily="34" charset="0"/>
                 <a:ea typeface="Hiragino Sans" pitchFamily="34" charset="-122"/>
                 <a:cs typeface="Hiragino Sans" pitchFamily="34" charset="-120"/>
               </a:rPr>
-              <a:t>管理コンソール /meeting?id=... の 3 ビューを順に映す。</a:t>
-            </a:r>
-            <a:endParaRPr lang="en-US" sz="1300" dirty="0"/>
-          </a:p>
-          <a:p>
-            <a:pPr algn="ctr" indent="0" marL="0">
-              <a:buNone/>
-            </a:pPr>
-            <a:r>
-              <a:rPr lang="en-US" sz="1300" dirty="0">
-                <a:solidFill>
-                  <a:srgbClr val="8A8A8A"/>
+              <a:t>ライブ議事録ビュー  —  議事録</a:t>
+            </a:r>
+            <a:endParaRPr lang="en-US" sz="2400" dirty="0"/>
+          </a:p>
+        </p:txBody>
+      </p:sp>
+      <p:sp>
+        <p:nvSpPr>
+          <p:cNvPr id="4" name="Text 2"/>
+          <p:cNvSpPr/>
+          <p:nvPr/>
+        </p:nvSpPr>
+        <p:spPr>
+          <a:xfrm>
+            <a:off x="365760" y="1143000"/>
+            <a:ext cx="8412480" cy="274320"/>
+          </a:xfrm>
+          <a:prstGeom prst="rect">
+            <a:avLst/>
+          </a:prstGeom>
+          <a:noFill/>
+          <a:ln/>
+        </p:spPr>
+        <p:txBody>
+          <a:bodyPr wrap="square" lIns="0" tIns="0" rIns="0" bIns="0" rtlCol="0" anchor="ctr"/>
+          <a:lstStyle/>
+          <a:p>
+            <a:pPr indent="0" marL="0">
+              <a:buNone/>
+            </a:pPr>
+            <a:r>
+              <a:rPr lang="en-US" sz="1200" dirty="0">
+                <a:solidFill>
+                  <a:srgbClr val="55667A"/>
                 </a:solidFill>
                 <a:latin typeface="Hiragino Sans" pitchFamily="34" charset="0"/>
                 <a:ea typeface="Hiragino Sans" pitchFamily="34" charset="-122"/>
                 <a:cs typeface="Hiragino Sans" pitchFamily="34" charset="-120"/>
               </a:rPr>
-              <a:t>議事録 → タイムライン → 文字起こし。更新間隔の差をテロップで補足。</a:t>
-            </a:r>
-            <a:endParaRPr lang="en-US" sz="1300" dirty="0"/>
-          </a:p>
-        </p:txBody>
-      </p:sp>
-      <p:sp>
-        <p:nvSpPr>
-          <p:cNvPr id="5" name="Text 3"/>
-          <p:cNvSpPr/>
-          <p:nvPr/>
-        </p:nvSpPr>
-        <p:spPr>
-          <a:xfrm>
-            <a:off x="457200" y="4572000"/>
-            <a:ext cx="8229600" cy="274320"/>
-          </a:xfrm>
-          <a:prstGeom prst="rect">
-            <a:avLst/>
-          </a:prstGeom>
-          <a:noFill/>
-          <a:ln/>
-        </p:spPr>
-        <p:txBody>
-          <a:bodyPr wrap="square" lIns="0" tIns="0" rIns="0" bIns="0" rtlCol="0" anchor="ctr"/>
-          <a:lstStyle/>
-          <a:p>
-            <a:pPr algn="ctr" indent="0" marL="0">
-              <a:buNone/>
-            </a:pPr>
-            <a:r>
-              <a:rPr lang="en-US" sz="1000" dirty="0">
-                <a:solidFill>
-                  <a:srgbClr val="6A6A6A"/>
+              <a:t>90 秒ごとに「議題 / 決定事項 / TODO / 質疑応答」を構造化 Markdown で全文再生成</a:t>
+            </a:r>
+            <a:endParaRPr lang="en-US" sz="1200" dirty="0"/>
+          </a:p>
+        </p:txBody>
+      </p:sp>
+      <p:pic>
+        <p:nvPicPr>
+          <p:cNvPr id="5" name="Image 0" descr="assets/demo-b-minutes.png">    </p:cNvPr>
+          <p:cNvPicPr>
+            <a:picLocks noChangeAspect="1"/>
+          </p:cNvPicPr>
+          <p:nvPr/>
+        </p:nvPicPr>
+        <p:blipFill>
+          <a:blip r:embed="rId1"/>
+          <a:srcRect l="0" r="0" t="0" b="0"/>
+          <a:stretch/>
+        </p:blipFill>
+        <p:spPr>
+          <a:xfrm>
+            <a:off x="1417320" y="1463040"/>
+            <a:ext cx="6309360" cy="3337560"/>
+          </a:xfrm>
+          <a:prstGeom prst="rect">
+            <a:avLst/>
+          </a:prstGeom>
+        </p:spPr>
+      </p:pic>
+      <p:sp>
+        <p:nvSpPr>
+          <p:cNvPr id="6" name="Text 3"/>
+          <p:cNvSpPr/>
+          <p:nvPr/>
+        </p:nvSpPr>
+        <p:spPr>
+          <a:xfrm>
+            <a:off x="365760" y="4800600"/>
+            <a:ext cx="5486400" cy="274320"/>
+          </a:xfrm>
+          <a:prstGeom prst="rect">
+            <a:avLst/>
+          </a:prstGeom>
+          <a:noFill/>
+          <a:ln/>
+        </p:spPr>
+        <p:txBody>
+          <a:bodyPr wrap="square" lIns="0" tIns="0" rIns="0" bIns="0" rtlCol="0" anchor="ctr"/>
+          <a:lstStyle/>
+          <a:p>
+            <a:pPr indent="0" marL="0">
+              <a:buNone/>
+            </a:pPr>
+            <a:r>
+              <a:rPr lang="en-US" sz="900" b="1" dirty="0">
+                <a:solidFill>
+                  <a:srgbClr val="55667A"/>
                 </a:solidFill>
                 <a:latin typeface="Helvetica Neue" pitchFamily="34" charset="0"/>
                 <a:ea typeface="Helvetica Neue" pitchFamily="34" charset="-122"/>
                 <a:cs typeface="Helvetica Neue" pitchFamily="34" charset="-120"/>
               </a:rPr>
-              <a:t>DEMO B  /  ~25 秒</a:t>
-            </a:r>
-            <a:endParaRPr lang="en-US" sz="1000" dirty="0"/>
+              <a:t>MOCHI-kiki</a:t>
+            </a:r>
+            <a:pPr indent="0" marL="0">
+              <a:buNone/>
+            </a:pPr>
+            <a:r>
+              <a:rPr lang="en-US" sz="900" dirty="0">
+                <a:solidFill>
+                  <a:srgbClr val="55667A"/>
+                </a:solidFill>
+                <a:latin typeface="Helvetica Neue" pitchFamily="34" charset="0"/>
+                <a:ea typeface="Helvetica Neue" pitchFamily="34" charset="-122"/>
+                <a:cs typeface="Helvetica Neue" pitchFamily="34" charset="-120"/>
+              </a:rPr>
+              <a:t>  /  Microsoft Agent Hackathon 2026</a:t>
+            </a:r>
+            <a:endParaRPr lang="en-US" sz="900" dirty="0"/>
+          </a:p>
+        </p:txBody>
+      </p:sp>
+      <p:sp>
+        <p:nvSpPr>
+          <p:cNvPr id="7" name="Text 4"/>
+          <p:cNvSpPr/>
+          <p:nvPr/>
+        </p:nvSpPr>
+        <p:spPr>
+          <a:xfrm>
+            <a:off x="8229600" y="4800600"/>
+            <a:ext cx="548640" cy="274320"/>
+          </a:xfrm>
+          <a:prstGeom prst="rect">
+            <a:avLst/>
+          </a:prstGeom>
+          <a:noFill/>
+          <a:ln/>
+        </p:spPr>
+        <p:txBody>
+          <a:bodyPr wrap="square" lIns="0" tIns="0" rIns="0" bIns="0" rtlCol="0" anchor="ctr"/>
+          <a:lstStyle/>
+          <a:p>
+            <a:pPr algn="r" indent="0" marL="0">
+              <a:buNone/>
+            </a:pPr>
+            <a:r>
+              <a:rPr lang="en-US" sz="900" dirty="0">
+                <a:solidFill>
+                  <a:srgbClr val="55667A"/>
+                </a:solidFill>
+                <a:latin typeface="Helvetica Neue" pitchFamily="34" charset="0"/>
+                <a:ea typeface="Helvetica Neue" pitchFamily="34" charset="-122"/>
+                <a:cs typeface="Helvetica Neue" pitchFamily="34" charset="-120"/>
+              </a:rPr>
+              <a:t>9 / 14</a:t>
+            </a:r>
+            <a:endParaRPr lang="en-US" sz="900" dirty="0"/>
           </a:p>
         </p:txBody>
       </p:sp>

--- a/articles/mochi-kiki-teams-agent/video/mochi-kiki-demo-deck.pptx
+++ b/articles/mochi-kiki-teams-agent/video/mochi-kiki-demo-deck.pptx
@@ -1427,8 +1427,8 @@
             <a:r>
               <a:rPr lang="en-US" dirty="0"/>
               <a:t>[1:25–1:30 / 5 秒]
-まずは、補完デモから。
-[撮影メモ] このタイトルカードは 3–5 秒だけ表示してすぐ次の画面録画スライドへ。</a:t>
+補完機能が実際に動いた画面です。
+[撮影メモ] このタイトルカードは 3–5 秒だけ表示してすぐ Slide 7 (実画面) へ。</a:t>
             </a:r>
             <a:endParaRPr lang="en-US" dirty="0"/>
           </a:p>
@@ -1517,9 +1517,9 @@
             <a:r>
               <a:rPr lang="en-US" dirty="0"/>
               <a:t>[1:30–2:10 / 40 秒]
-会議で「MOCHI-kiki の仕様を教えてください」と話します。
-意図検知が spec_inquiry と判定し、キーワードでハイブリッド検索が走ります。
-GPT-4o が 200 字以内に整形し、会議チャットへ [仕様補完] プレフィックス付きで自動投稿されます。
+こちらが、実際の Teams 会議の画面です。
+発言者が「MOCHI-kiki の仕様を教えてください」と話した場面で、意図検知が仕様確認だと判定し、キーワードでハイブリッド検索が走ります。
+GPT-4o が 200 字以内に整形し、会議チャットへ [仕様補完] プレフィックス付きで自動投稿されています。
 発言者はドキュメントを開かずに済みます。
 [撮影メモ] 画像を 8–10 秒表示し、必要に応じてチャットの [仕様補完] 部分にズームインまたはハイライト。</a:t>
             </a:r>
